--- a/deliverables/sunum/220202046_sunum.pptx
+++ b/deliverables/sunum/220202046_sunum.pptx
@@ -18,6 +18,7 @@
     <p:sldId id="266" r:id="rId17"/>
     <p:sldId id="267" r:id="rId18"/>
     <p:sldId id="268" r:id="rId19"/>
+    <p:sldId id="269" r:id="rId20"/>
   </p:sldIdLst>
   <p:sldSz cx="12191695" cy="6858000" type="screen4x3"/>
   <p:notesSz cx="6858000" cy="9144000"/>
@@ -3549,6 +3550,588 @@
                   <a:srgbClr val="1A237E"/>
                 </a:solidFill>
               </a:rPr>
+              <a:t>PPO vs SAC Karsilastirmasi (ayni ortam/seed/protokol)</a:t>
+            </a:r>
+          </a:p>
+        </p:txBody>
+      </p:sp>
+      <p:graphicFrame>
+        <p:nvGraphicFramePr>
+          <p:cNvPr id="3" name="Table 2"/>
+          <p:cNvGraphicFramePr>
+            <a:graphicFrameLocks noGrp="1"/>
+          </p:cNvGraphicFramePr>
+          <p:nvPr/>
+        </p:nvGraphicFramePr>
+        <p:xfrm>
+          <a:off x="1097280" y="1371600"/>
+          <a:ext cx="9966960" cy="4206240"/>
+        </p:xfrm>
+        <a:graphic>
+          <a:graphicData uri="http://schemas.openxmlformats.org/drawingml/2006/table">
+            <a:tbl>
+              <a:tblPr firstRow="1" bandRow="1">
+                <a:tableStyleId>{5C22544A-7EE6-4342-B048-85BDC9FD1C3A}</a:tableStyleId>
+              </a:tblPr>
+              <a:tblGrid>
+                <a:gridCol w="4114800"/>
+                <a:gridCol w="2926080"/>
+                <a:gridCol w="2926080"/>
+              </a:tblGrid>
+              <a:tr h="525780">
+                <a:tc>
+                  <a:txBody>
+                    <a:bodyPr/>
+                    <a:lstStyle/>
+                    <a:p>
+                      <a:r>
+                        <a:rPr sz="1500" b="1">
+                          <a:solidFill>
+                            <a:srgbClr val="FFFFFF"/>
+                          </a:solidFill>
+                        </a:rPr>
+                        <a:t>Olcut</a:t>
+                      </a:r>
+                    </a:p>
+                  </a:txBody>
+                  <a:tcPr>
+                    <a:solidFill>
+                      <a:srgbClr val="1A237E"/>
+                    </a:solidFill>
+                  </a:tcPr>
+                </a:tc>
+                <a:tc>
+                  <a:txBody>
+                    <a:bodyPr/>
+                    <a:lstStyle/>
+                    <a:p>
+                      <a:r>
+                        <a:rPr sz="1500" b="1">
+                          <a:solidFill>
+                            <a:srgbClr val="FFFFFF"/>
+                          </a:solidFill>
+                        </a:rPr>
+                        <a:t>PPO (bu calisma)</a:t>
+                      </a:r>
+                    </a:p>
+                  </a:txBody>
+                  <a:tcPr>
+                    <a:solidFill>
+                      <a:srgbClr val="1A237E"/>
+                    </a:solidFill>
+                  </a:tcPr>
+                </a:tc>
+                <a:tc>
+                  <a:txBody>
+                    <a:bodyPr/>
+                    <a:lstStyle/>
+                    <a:p>
+                      <a:r>
+                        <a:rPr sz="1500" b="1">
+                          <a:solidFill>
+                            <a:srgbClr val="FFFFFF"/>
+                          </a:solidFill>
+                        </a:rPr>
+                        <a:t>SAC (algo/td3)</a:t>
+                      </a:r>
+                    </a:p>
+                  </a:txBody>
+                  <a:tcPr>
+                    <a:solidFill>
+                      <a:srgbClr val="1A237E"/>
+                    </a:solidFill>
+                  </a:tcPr>
+                </a:tc>
+              </a:tr>
+              <a:tr h="525780">
+                <a:tc>
+                  <a:txBody>
+                    <a:bodyPr/>
+                    <a:lstStyle/>
+                    <a:p>
+                      <a:r>
+                        <a:rPr sz="1400" b="0"/>
+                        <a:t>Aile</a:t>
+                      </a:r>
+                    </a:p>
+                  </a:txBody>
+                  <a:tcPr>
+                    <a:solidFill>
+                      <a:srgbClr val="F2F4FB"/>
+                    </a:solidFill>
+                  </a:tcPr>
+                </a:tc>
+                <a:tc>
+                  <a:txBody>
+                    <a:bodyPr/>
+                    <a:lstStyle/>
+                    <a:p>
+                      <a:r>
+                        <a:rPr sz="1400" b="1"/>
+                        <a:t>on-policy</a:t>
+                      </a:r>
+                    </a:p>
+                  </a:txBody>
+                  <a:tcPr>
+                    <a:solidFill>
+                      <a:srgbClr val="F2F4FB"/>
+                    </a:solidFill>
+                  </a:tcPr>
+                </a:tc>
+                <a:tc>
+                  <a:txBody>
+                    <a:bodyPr/>
+                    <a:lstStyle/>
+                    <a:p>
+                      <a:r>
+                        <a:rPr sz="1400" b="0"/>
+                        <a:t>off-policy</a:t>
+                      </a:r>
+                    </a:p>
+                  </a:txBody>
+                  <a:tcPr>
+                    <a:solidFill>
+                      <a:srgbClr val="F2F4FB"/>
+                    </a:solidFill>
+                  </a:tcPr>
+                </a:tc>
+              </a:tr>
+              <a:tr h="525780">
+                <a:tc>
+                  <a:txBody>
+                    <a:bodyPr/>
+                    <a:lstStyle/>
+                    <a:p>
+                      <a:r>
+                        <a:rPr sz="1400" b="0"/>
+                        <a:t>Replay buffer</a:t>
+                      </a:r>
+                    </a:p>
+                  </a:txBody>
+                  <a:tcPr>
+                    <a:solidFill>
+                      <a:srgbClr val="F2F4FB"/>
+                    </a:solidFill>
+                  </a:tcPr>
+                </a:tc>
+                <a:tc>
+                  <a:txBody>
+                    <a:bodyPr/>
+                    <a:lstStyle/>
+                    <a:p>
+                      <a:r>
+                        <a:rPr sz="1400" b="1"/>
+                        <a:t>yok</a:t>
+                      </a:r>
+                    </a:p>
+                  </a:txBody>
+                  <a:tcPr>
+                    <a:solidFill>
+                      <a:srgbClr val="F2F4FB"/>
+                    </a:solidFill>
+                  </a:tcPr>
+                </a:tc>
+                <a:tc>
+                  <a:txBody>
+                    <a:bodyPr/>
+                    <a:lstStyle/>
+                    <a:p>
+                      <a:r>
+                        <a:rPr sz="1400" b="0"/>
+                        <a:t>var</a:t>
+                      </a:r>
+                    </a:p>
+                  </a:txBody>
+                  <a:tcPr>
+                    <a:solidFill>
+                      <a:srgbClr val="F2F4FB"/>
+                    </a:solidFill>
+                  </a:tcPr>
+                </a:tc>
+              </a:tr>
+              <a:tr h="525780">
+                <a:tc>
+                  <a:txBody>
+                    <a:bodyPr/>
+                    <a:lstStyle/>
+                    <a:p>
+                      <a:r>
+                        <a:rPr sz="1400" b="0"/>
+                        <a:t>Egitim adimi</a:t>
+                      </a:r>
+                    </a:p>
+                  </a:txBody>
+                  <a:tcPr>
+                    <a:solidFill>
+                      <a:srgbClr val="F2F4FB"/>
+                    </a:solidFill>
+                  </a:tcPr>
+                </a:tc>
+                <a:tc>
+                  <a:txBody>
+                    <a:bodyPr/>
+                    <a:lstStyle/>
+                    <a:p>
+                      <a:r>
+                        <a:rPr sz="1400" b="1"/>
+                        <a:t>1.5M</a:t>
+                      </a:r>
+                    </a:p>
+                  </a:txBody>
+                  <a:tcPr>
+                    <a:solidFill>
+                      <a:srgbClr val="F2F4FB"/>
+                    </a:solidFill>
+                  </a:tcPr>
+                </a:tc>
+                <a:tc>
+                  <a:txBody>
+                    <a:bodyPr/>
+                    <a:lstStyle/>
+                    <a:p>
+                      <a:r>
+                        <a:rPr sz="1400" b="0"/>
+                        <a:t>500k</a:t>
+                      </a:r>
+                    </a:p>
+                  </a:txBody>
+                  <a:tcPr>
+                    <a:solidFill>
+                      <a:srgbClr val="F2F4FB"/>
+                    </a:solidFill>
+                  </a:tcPr>
+                </a:tc>
+              </a:tr>
+              <a:tr h="525780">
+                <a:tc>
+                  <a:txBody>
+                    <a:bodyPr/>
+                    <a:lstStyle/>
+                    <a:p>
+                      <a:r>
+                        <a:rPr sz="1400" b="0"/>
+                        <a:t>Ort. eval getirisi</a:t>
+                      </a:r>
+                    </a:p>
+                  </a:txBody>
+                  <a:tcPr>
+                    <a:solidFill>
+                      <a:srgbClr val="F2F4FB"/>
+                    </a:solidFill>
+                  </a:tcPr>
+                </a:tc>
+                <a:tc>
+                  <a:txBody>
+                    <a:bodyPr/>
+                    <a:lstStyle/>
+                    <a:p>
+                      <a:r>
+                        <a:rPr sz="1400" b="1"/>
+                        <a:t>458.5</a:t>
+                      </a:r>
+                    </a:p>
+                  </a:txBody>
+                  <a:tcPr>
+                    <a:solidFill>
+                      <a:srgbClr val="F2F4FB"/>
+                    </a:solidFill>
+                  </a:tcPr>
+                </a:tc>
+                <a:tc>
+                  <a:txBody>
+                    <a:bodyPr/>
+                    <a:lstStyle/>
+                    <a:p>
+                      <a:r>
+                        <a:rPr sz="1400" b="0"/>
+                        <a:t>321.0</a:t>
+                      </a:r>
+                    </a:p>
+                  </a:txBody>
+                  <a:tcPr>
+                    <a:solidFill>
+                      <a:srgbClr val="F2F4FB"/>
+                    </a:solidFill>
+                  </a:tcPr>
+                </a:tc>
+              </a:tr>
+              <a:tr h="525780">
+                <a:tc>
+                  <a:txBody>
+                    <a:bodyPr/>
+                    <a:lstStyle/>
+                    <a:p>
+                      <a:r>
+                        <a:rPr sz="1400" b="0"/>
+                        <a:t>Basari orani (6 oda)</a:t>
+                      </a:r>
+                    </a:p>
+                  </a:txBody>
+                  <a:tcPr>
+                    <a:solidFill>
+                      <a:srgbClr val="F2F4FB"/>
+                    </a:solidFill>
+                  </a:tcPr>
+                </a:tc>
+                <a:tc>
+                  <a:txBody>
+                    <a:bodyPr/>
+                    <a:lstStyle/>
+                    <a:p>
+                      <a:r>
+                        <a:rPr sz="1400" b="1"/>
+                        <a:t>0.96</a:t>
+                      </a:r>
+                    </a:p>
+                  </a:txBody>
+                  <a:tcPr>
+                    <a:solidFill>
+                      <a:srgbClr val="F2F4FB"/>
+                    </a:solidFill>
+                  </a:tcPr>
+                </a:tc>
+                <a:tc>
+                  <a:txBody>
+                    <a:bodyPr/>
+                    <a:lstStyle/>
+                    <a:p>
+                      <a:r>
+                        <a:rPr sz="1400" b="0"/>
+                        <a:t>0.27</a:t>
+                      </a:r>
+                    </a:p>
+                  </a:txBody>
+                  <a:tcPr>
+                    <a:solidFill>
+                      <a:srgbClr val="F2F4FB"/>
+                    </a:solidFill>
+                  </a:tcPr>
+                </a:tc>
+              </a:tr>
+              <a:tr h="525780">
+                <a:tc>
+                  <a:txBody>
+                    <a:bodyPr/>
+                    <a:lstStyle/>
+                    <a:p>
+                      <a:r>
+                        <a:rPr sz="1400" b="0"/>
+                        <a:t>Ort. kapsama %</a:t>
+                      </a:r>
+                    </a:p>
+                  </a:txBody>
+                  <a:tcPr>
+                    <a:solidFill>
+                      <a:srgbClr val="F2F4FB"/>
+                    </a:solidFill>
+                  </a:tcPr>
+                </a:tc>
+                <a:tc>
+                  <a:txBody>
+                    <a:bodyPr/>
+                    <a:lstStyle/>
+                    <a:p>
+                      <a:r>
+                        <a:rPr sz="1400" b="1"/>
+                        <a:t>96.7</a:t>
+                      </a:r>
+                    </a:p>
+                  </a:txBody>
+                  <a:tcPr>
+                    <a:solidFill>
+                      <a:srgbClr val="F2F4FB"/>
+                    </a:solidFill>
+                  </a:tcPr>
+                </a:tc>
+                <a:tc>
+                  <a:txBody>
+                    <a:bodyPr/>
+                    <a:lstStyle/>
+                    <a:p>
+                      <a:r>
+                        <a:rPr sz="1400" b="0"/>
+                        <a:t>92.6</a:t>
+                      </a:r>
+                    </a:p>
+                  </a:txBody>
+                  <a:tcPr>
+                    <a:solidFill>
+                      <a:srgbClr val="F2F4FB"/>
+                    </a:solidFill>
+                  </a:tcPr>
+                </a:tc>
+              </a:tr>
+              <a:tr h="525780">
+                <a:tc>
+                  <a:txBody>
+                    <a:bodyPr/>
+                    <a:lstStyle/>
+                    <a:p>
+                      <a:r>
+                        <a:rPr sz="1400" b="0"/>
+                        <a:t>Eval carpisma orani</a:t>
+                      </a:r>
+                    </a:p>
+                  </a:txBody>
+                  <a:tcPr>
+                    <a:solidFill>
+                      <a:srgbClr val="F2F4FB"/>
+                    </a:solidFill>
+                  </a:tcPr>
+                </a:tc>
+                <a:tc>
+                  <a:txBody>
+                    <a:bodyPr/>
+                    <a:lstStyle/>
+                    <a:p>
+                      <a:r>
+                        <a:rPr sz="1400" b="1"/>
+                        <a:t>0.04</a:t>
+                      </a:r>
+                    </a:p>
+                  </a:txBody>
+                  <a:tcPr>
+                    <a:solidFill>
+                      <a:srgbClr val="F2F4FB"/>
+                    </a:solidFill>
+                  </a:tcPr>
+                </a:tc>
+                <a:tc>
+                  <a:txBody>
+                    <a:bodyPr/>
+                    <a:lstStyle/>
+                    <a:p>
+                      <a:r>
+                        <a:rPr sz="1400" b="0"/>
+                        <a:t>0.07</a:t>
+                      </a:r>
+                    </a:p>
+                  </a:txBody>
+                  <a:tcPr>
+                    <a:solidFill>
+                      <a:srgbClr val="F2F4FB"/>
+                    </a:solidFill>
+                  </a:tcPr>
+                </a:tc>
+              </a:tr>
+            </a:tbl>
+          </a:graphicData>
+        </a:graphic>
+      </p:graphicFrame>
+      <p:sp>
+        <p:nvSpPr>
+          <p:cNvPr id="4" name="TextBox 3"/>
+          <p:cNvSpPr txBox="1"/>
+          <p:nvPr/>
+        </p:nvSpPr>
+        <p:spPr>
+          <a:xfrm>
+            <a:off x="640080" y="5760720"/>
+            <a:ext cx="10972800" cy="5029200"/>
+          </a:xfrm>
+          <a:prstGeom prst="rect">
+            <a:avLst/>
+          </a:prstGeom>
+          <a:noFill/>
+        </p:spPr>
+        <p:txBody>
+          <a:bodyPr wrap="square">
+            <a:spAutoFit/>
+          </a:bodyPr>
+          <a:lstStyle/>
+          <a:p>
+            <a:pPr>
+              <a:spcAft>
+                <a:spcPts val="600"/>
+              </a:spcAft>
+            </a:pPr>
+            <a:r>
+              <a:rPr sz="1400">
+                <a:solidFill>
+                  <a:srgbClr val="424242"/>
+                </a:solidFill>
+              </a:rPr>
+              <a:t>PPO dort kalite olcutunde de onde; ozellikle 6-oda basarisinda (0.96 vs 0.27).</a:t>
+            </a:r>
+          </a:p>
+          <a:p>
+            <a:pPr>
+              <a:spcAft>
+                <a:spcPts val="600"/>
+              </a:spcAft>
+            </a:pPr>
+            <a:r>
+              <a:rPr sz="1400">
+                <a:solidFill>
+                  <a:srgbClr val="424242"/>
+                </a:solidFill>
+              </a:rPr>
+              <a:t>Bedeli: PPO 1.5M adim, SAC 500k. SAC off-policy =&gt; replay buffer ile adim basina daha ornek-verimli.</a:t>
+            </a:r>
+          </a:p>
+          <a:p>
+            <a:pPr>
+              <a:spcAft>
+                <a:spcPts val="600"/>
+              </a:spcAft>
+            </a:pPr>
+            <a:r>
+              <a:rPr sz="1400">
+                <a:solidFill>
+                  <a:srgbClr val="424242"/>
+                </a:solidFill>
+              </a:rPr>
+              <a:t>Ders ayrimi: SAC az adimda hizli oturur, PPO daha cok adimla daha yuksek nihai basariya cikar.</a:t>
+            </a:r>
+          </a:p>
+        </p:txBody>
+      </p:sp>
+    </p:spTree>
+  </p:cSld>
+  <p:clrMapOvr>
+    <a:masterClrMapping/>
+  </p:clrMapOvr>
+</p:sld>
+</file>
+
+<file path=ppt/slides/slide13.xml><?xml version="1.0" encoding="utf-8"?>
+<p:sld xmlns:a="http://schemas.openxmlformats.org/drawingml/2006/main" xmlns:p="http://schemas.openxmlformats.org/presentationml/2006/main" xmlns:r="http://schemas.openxmlformats.org/officeDocument/2006/relationships">
+  <p:cSld>
+    <p:spTree>
+      <p:nvGrpSpPr>
+        <p:cNvPr id="1" name=""/>
+        <p:cNvGrpSpPr/>
+        <p:nvPr/>
+      </p:nvGrpSpPr>
+      <p:grpSpPr/>
+      <p:sp>
+        <p:nvSpPr>
+          <p:cNvPr id="2" name="TextBox 1"/>
+          <p:cNvSpPr txBox="1"/>
+          <p:nvPr/>
+        </p:nvSpPr>
+        <p:spPr>
+          <a:xfrm>
+            <a:off x="548640" y="274320"/>
+            <a:ext cx="11064240" cy="822960"/>
+          </a:xfrm>
+          <a:prstGeom prst="rect">
+            <a:avLst/>
+          </a:prstGeom>
+          <a:noFill/>
+        </p:spPr>
+        <p:txBody>
+          <a:bodyPr wrap="square">
+            <a:spAutoFit/>
+          </a:bodyPr>
+          <a:lstStyle/>
+          <a:p>
+            <a:r>
+              <a:rPr sz="3000" b="1">
+                <a:solidFill>
+                  <a:srgbClr val="1A237E"/>
+                </a:solidFill>
+              </a:rPr>
               <a:t>Savunma Ozeti (4 Kavram Alani)</a:t>
             </a:r>
           </a:p>
@@ -3645,7 +4228,7 @@
 </p:sld>
 </file>
 
-<file path=ppt/slides/slide13.xml><?xml version="1.0" encoding="utf-8"?>
+<file path=ppt/slides/slide14.xml><?xml version="1.0" encoding="utf-8"?>
 <p:sld xmlns:a="http://schemas.openxmlformats.org/drawingml/2006/main" xmlns:p="http://schemas.openxmlformats.org/presentationml/2006/main" xmlns:r="http://schemas.openxmlformats.org/officeDocument/2006/relationships">
   <p:cSld>
     <p:spTree>

--- a/deliverables/sunum/220202046_sunum.pptx
+++ b/deliverables/sunum/220202046_sunum.pptx
@@ -19,6 +19,24 @@
     <p:sldId id="267" r:id="rId18"/>
     <p:sldId id="268" r:id="rId19"/>
     <p:sldId id="269" r:id="rId20"/>
+    <p:sldId id="270" r:id="rId21"/>
+    <p:sldId id="271" r:id="rId22"/>
+    <p:sldId id="272" r:id="rId23"/>
+    <p:sldId id="273" r:id="rId24"/>
+    <p:sldId id="274" r:id="rId25"/>
+    <p:sldId id="275" r:id="rId26"/>
+    <p:sldId id="276" r:id="rId27"/>
+    <p:sldId id="277" r:id="rId28"/>
+    <p:sldId id="278" r:id="rId29"/>
+    <p:sldId id="279" r:id="rId30"/>
+    <p:sldId id="280" r:id="rId31"/>
+    <p:sldId id="281" r:id="rId32"/>
+    <p:sldId id="282" r:id="rId33"/>
+    <p:sldId id="283" r:id="rId34"/>
+    <p:sldId id="284" r:id="rId35"/>
+    <p:sldId id="285" r:id="rId36"/>
+    <p:sldId id="286" r:id="rId37"/>
+    <p:sldId id="287" r:id="rId38"/>
   </p:sldIdLst>
   <p:sldSz cx="12191695" cy="6858000" type="screen4x3"/>
   <p:notesSz cx="6858000" cy="9144000"/>
@@ -3094,6 +3112,14 @@
 <file path=ppt/slides/slide1.xml><?xml version="1.0" encoding="utf-8"?>
 <p:sld xmlns:a="http://schemas.openxmlformats.org/drawingml/2006/main" xmlns:p="http://schemas.openxmlformats.org/presentationml/2006/main" xmlns:r="http://schemas.openxmlformats.org/officeDocument/2006/relationships">
   <p:cSld>
+    <p:bg>
+      <p:bgPr>
+        <a:solidFill>
+          <a:srgbClr val="1A237E"/>
+        </a:solidFill>
+        <a:effectLst/>
+      </p:bgPr>
+    </p:bg>
     <p:spTree>
       <p:nvGrpSpPr>
         <p:cNvPr id="1" name=""/>
@@ -3109,8 +3135,8 @@
         </p:nvSpPr>
         <p:spPr>
           <a:xfrm>
-            <a:off x="548640" y="274320"/>
-            <a:ext cx="11064240" cy="822960"/>
+            <a:off x="731520" y="1920240"/>
+            <a:ext cx="10698480" cy="1828800"/>
           </a:xfrm>
           <a:prstGeom prst="rect">
             <a:avLst/>
@@ -3124,140 +3150,62 @@
           <a:lstStyle/>
           <a:p>
             <a:r>
-              <a:rPr sz="3400" b="1">
-                <a:solidFill>
-                  <a:srgbClr val="1A237E"/>
-                </a:solidFill>
-              </a:rPr>
-              <a:t>Kapali Ortamda PPO ile Lidar Tabanli Drone Kesfi</a:t>
-            </a:r>
-          </a:p>
-        </p:txBody>
-      </p:sp>
-      <p:sp>
-        <p:nvSpPr>
-          <p:cNvPr id="3" name="TextBox 2"/>
-          <p:cNvSpPr txBox="1"/>
-          <p:nvPr/>
-        </p:nvSpPr>
-        <p:spPr>
-          <a:xfrm>
-            <a:off x="640080" y="1828800"/>
-            <a:ext cx="10972800" cy="5029200"/>
-          </a:xfrm>
-          <a:prstGeom prst="rect">
-            <a:avLst/>
-          </a:prstGeom>
-          <a:noFill/>
-        </p:spPr>
-        <p:txBody>
-          <a:bodyPr wrap="square">
-            <a:spAutoFit/>
-          </a:bodyPr>
-          <a:lstStyle/>
-          <a:p>
-            <a:pPr>
-              <a:spcAft>
-                <a:spcPts val="600"/>
-              </a:spcAft>
-            </a:pPr>
-            <a:r>
-              <a:rPr sz="2000">
-                <a:solidFill>
-                  <a:srgbClr val="424242"/>
-                </a:solidFill>
-              </a:rPr>
-              <a:t>Pekistirmeli Ogrenme Donem Projesi - Teknik Sunum</a:t>
-            </a:r>
-          </a:p>
-          <a:p>
-            <a:pPr>
-              <a:spcAft>
-                <a:spcPts val="600"/>
-              </a:spcAft>
-            </a:pPr>
-            <a:r>
-              <a:rPr sz="2000">
-                <a:solidFill>
-                  <a:srgbClr val="424242"/>
+              <a:rPr sz="4000" b="1">
+                <a:solidFill>
+                  <a:srgbClr val="FFFFFF"/>
+                </a:solidFill>
+              </a:rPr>
+              <a:t>Kapalı Ortamda PPO ile Lidar Tabanlı Drone Keşfi</a:t>
+            </a:r>
+          </a:p>
+          <a:p>
+            <a:r>
+              <a:rPr sz="2200">
+                <a:solidFill>
+                  <a:srgbClr val="B0BEE8"/>
+                </a:solidFill>
+              </a:rPr>
+              <a:t>Pekiştirmeli Öğrenme Dönem Projesi — Teknik Sunum</a:t>
+            </a:r>
+          </a:p>
+          <a:p>
+            <a:r>
+              <a:rPr sz="1800">
+                <a:solidFill>
+                  <a:srgbClr val="FFFFFF"/>
                 </a:solidFill>
               </a:rPr>
               <a:t/>
             </a:r>
           </a:p>
           <a:p>
-            <a:pPr>
-              <a:spcAft>
-                <a:spcPts val="600"/>
-              </a:spcAft>
-            </a:pPr>
-            <a:r>
-              <a:rPr sz="2000">
-                <a:solidFill>
-                  <a:srgbClr val="424242"/>
-                </a:solidFill>
-              </a:rPr>
-              <a:t>Berker Yigit - 220202046</a:t>
-            </a:r>
-          </a:p>
-          <a:p>
-            <a:pPr>
-              <a:spcAft>
-                <a:spcPts val="600"/>
-              </a:spcAft>
-            </a:pPr>
-            <a:r>
-              <a:rPr sz="2000">
-                <a:solidFill>
-                  <a:srgbClr val="424242"/>
-                </a:solidFill>
-              </a:rPr>
-              <a:t>Kocaeli Universitesi, Bilgisayar Muhendisligi (II. Ogretim)</a:t>
-            </a:r>
-          </a:p>
-          <a:p>
-            <a:pPr>
-              <a:spcAft>
-                <a:spcPts val="600"/>
-              </a:spcAft>
-            </a:pPr>
-            <a:r>
-              <a:rPr sz="2000">
-                <a:solidFill>
-                  <a:srgbClr val="424242"/>
-                </a:solidFill>
-              </a:rPr>
-              <a:t/>
-            </a:r>
-          </a:p>
-          <a:p>
-            <a:pPr>
-              <a:spcAft>
-                <a:spcPts val="600"/>
-              </a:spcAft>
-            </a:pPr>
-            <a:r>
-              <a:rPr sz="2000">
-                <a:solidFill>
-                  <a:srgbClr val="424242"/>
-                </a:solidFill>
-              </a:rPr>
-              <a:t>Algoritma: PPO (Proximal Policy Optimization)   |   Branch: algo/ppo</a:t>
-            </a:r>
-          </a:p>
-          <a:p>
-            <a:pPr>
-              <a:spcAft>
-                <a:spcPts val="600"/>
-              </a:spcAft>
-            </a:pPr>
-            <a:r>
-              <a:rPr sz="2000">
-                <a:solidFill>
-                  <a:srgbClr val="424242"/>
-                </a:solidFill>
-              </a:rPr>
-              <a:t>Depo: github.com/berkeryigit/rl_drone_pathfinding (algo/ppo)</a:t>
+            <a:r>
+              <a:rPr sz="1800">
+                <a:solidFill>
+                  <a:srgbClr val="FFFFFF"/>
+                </a:solidFill>
+              </a:rPr>
+              <a:t>Berker Yiğit — 220202046</a:t>
+            </a:r>
+          </a:p>
+          <a:p>
+            <a:r>
+              <a:rPr sz="1800">
+                <a:solidFill>
+                  <a:srgbClr val="FFFFFF"/>
+                </a:solidFill>
+              </a:rPr>
+              <a:t>Kocaeli Üniversitesi, Bilgisayar Mühendisliği (II. Öğretim)</a:t>
+            </a:r>
+          </a:p>
+          <a:p>
+            <a:r>
+              <a:rPr sz="1800">
+                <a:solidFill>
+                  <a:srgbClr val="FFFFFF"/>
+                </a:solidFill>
+              </a:rPr>
+              <a:t>Algoritma: PPO   |   Branch: algo/ppo</a:t>
             </a:r>
           </a:p>
         </p:txBody>
@@ -3273,6 +3221,14 @@
 <file path=ppt/slides/slide10.xml><?xml version="1.0" encoding="utf-8"?>
 <p:sld xmlns:a="http://schemas.openxmlformats.org/drawingml/2006/main" xmlns:p="http://schemas.openxmlformats.org/presentationml/2006/main" xmlns:r="http://schemas.openxmlformats.org/officeDocument/2006/relationships">
   <p:cSld>
+    <p:bg>
+      <p:bgPr>
+        <a:solidFill>
+          <a:srgbClr val="FFFFFF"/>
+        </a:solidFill>
+        <a:effectLst/>
+      </p:bgPr>
+    </p:bg>
     <p:spTree>
       <p:nvGrpSpPr>
         <p:cNvPr id="1" name=""/>
@@ -3282,14 +3238,57 @@
       <p:grpSpPr/>
       <p:sp>
         <p:nvSpPr>
-          <p:cNvPr id="2" name="TextBox 1"/>
+          <p:cNvPr id="2" name="Rectangle 1"/>
+          <p:cNvSpPr/>
+          <p:nvPr/>
+        </p:nvSpPr>
+        <p:spPr>
+          <a:xfrm>
+            <a:off x="0" y="0"/>
+            <a:ext cx="12191695" cy="960120"/>
+          </a:xfrm>
+          <a:prstGeom prst="rect">
+            <a:avLst/>
+          </a:prstGeom>
+          <a:solidFill>
+            <a:srgbClr val="1A237E"/>
+          </a:solidFill>
+          <a:ln>
+            <a:noFill/>
+          </a:ln>
+        </p:spPr>
+        <p:style>
+          <a:lnRef idx="1">
+            <a:schemeClr val="accent1"/>
+          </a:lnRef>
+          <a:fillRef idx="3">
+            <a:schemeClr val="accent1"/>
+          </a:fillRef>
+          <a:effectRef idx="2">
+            <a:schemeClr val="accent1"/>
+          </a:effectRef>
+          <a:fontRef idx="minor">
+            <a:schemeClr val="lt1"/>
+          </a:fontRef>
+        </p:style>
+        <p:txBody>
+          <a:bodyPr rtlCol="0" anchor="ctr"/>
+          <a:lstStyle/>
+          <a:p>
+            <a:pPr algn="ctr"/>
+          </a:p>
+        </p:txBody>
+      </p:sp>
+      <p:sp>
+        <p:nvSpPr>
+          <p:cNvPr id="3" name="TextBox 2"/>
           <p:cNvSpPr txBox="1"/>
           <p:nvPr/>
         </p:nvSpPr>
         <p:spPr>
           <a:xfrm>
-            <a:off x="548640" y="274320"/>
-            <a:ext cx="11064240" cy="822960"/>
+            <a:off x="457200" y="164592"/>
+            <a:ext cx="11247120" cy="685800"/>
           </a:xfrm>
           <a:prstGeom prst="rect">
             <a:avLst/>
@@ -3303,19 +3302,19 @@
           <a:lstStyle/>
           <a:p>
             <a:r>
-              <a:rPr sz="2600" b="1">
-                <a:solidFill>
-                  <a:srgbClr val="1A237E"/>
-                </a:solidFill>
-              </a:rPr>
-              <a:t>Grafik 4 - Hiperparametre Duyarliligi</a:t>
+              <a:rPr sz="2300" b="1">
+                <a:solidFill>
+                  <a:srgbClr val="FFFFFF"/>
+                </a:solidFill>
+              </a:rPr>
+              <a:t>Grafik 3 — Loss Eğrisi (policy gradient &amp; value)</a:t>
             </a:r>
           </a:p>
         </p:txBody>
       </p:sp>
       <p:pic>
         <p:nvPicPr>
-          <p:cNvPr id="3" name="Picture 2" descr="4_hiperparametre_duyarlilik.png"/>
+          <p:cNvPr id="4" name="Picture 3" descr="3_loss_egrisi.png"/>
           <p:cNvPicPr>
             <a:picLocks noChangeAspect="1"/>
           </p:cNvPicPr>
@@ -3329,8 +3328,8 @@
         </p:blipFill>
         <p:spPr>
           <a:xfrm>
-            <a:off x="365760" y="1188720"/>
-            <a:ext cx="11038802" cy="4937760"/>
+            <a:off x="320040" y="1143000"/>
+            <a:ext cx="9281382" cy="5029200"/>
           </a:xfrm>
           <a:prstGeom prst="rect">
             <a:avLst/>
@@ -3339,14 +3338,14 @@
       </p:pic>
       <p:sp>
         <p:nvSpPr>
-          <p:cNvPr id="4" name="TextBox 3"/>
+          <p:cNvPr id="5" name="TextBox 4"/>
           <p:cNvSpPr txBox="1"/>
           <p:nvPr/>
         </p:nvSpPr>
         <p:spPr>
           <a:xfrm>
-            <a:off x="7863840" y="1280160"/>
-            <a:ext cx="4023360" cy="4937760"/>
+            <a:off x="7955279" y="1188720"/>
+            <a:ext cx="4023360" cy="5212080"/>
           </a:xfrm>
           <a:prstGeom prst="rect">
             <a:avLst/>
@@ -3362,23 +3361,70 @@
             <a:r>
               <a:rPr sz="1600" b="1">
                 <a:solidFill>
-                  <a:srgbClr val="1A237E"/>
+                  <a:srgbClr val="1565C0"/>
                 </a:solidFill>
               </a:rPr>
               <a:t>Yorum</a:t>
             </a:r>
           </a:p>
           <a:p>
-            <a:r>
-              <a:rPr sz="1400">
-                <a:solidFill>
-                  <a:srgbClr val="424242"/>
-                </a:solidFill>
-              </a:rPr>
-              <a:t>Gozlem: ent_coef en iyi 0.05'te (368); lr en iyi 1e-4'te (375), lr buyudukce hafif duser. Kisa butce (200k) oldugu icin getiriler ana koSudan dusuk.
-Karsilastirma: Farklar hata bandi icinde; ajan bu aralikta HP'ye az duyarli.
-Aciklama: Yuksek ent_coef daha cok kesif =&gt; kisa butcede biraz daha iyi; cok yuksek lr (1e-3) erken kararliligi bozar (kesif-somuru).
-Sonuc: Taban degerler (lr=3e-4, ent=0.005) guvenli orta nokta; ince ayar kritik degil.</a:t>
+            <a:pPr>
+              <a:spcAft>
+                <a:spcPts val="500"/>
+              </a:spcAft>
+            </a:pPr>
+            <a:r>
+              <a:rPr sz="1250">
+                <a:solidFill>
+                  <a:srgbClr val="373737"/>
+                </a:solidFill>
+              </a:rPr>
+              <a:t>Gözlem: Critic (value) loss ~0.3M'de ~140 tepe yapıp ~30'a düşer; actor loss küçük ve yatay.</a:t>
+            </a:r>
+          </a:p>
+          <a:p>
+            <a:pPr>
+              <a:spcAft>
+                <a:spcPts val="500"/>
+              </a:spcAft>
+            </a:pPr>
+            <a:r>
+              <a:rPr sz="1250">
+                <a:solidFill>
+                  <a:srgbClr val="373737"/>
+                </a:solidFill>
+              </a:rPr>
+              <a:t>Karşılaştırma: Critic tepesi getirinin en hızlı yükseldiği döneme denk gelir.</a:t>
+            </a:r>
+          </a:p>
+          <a:p>
+            <a:pPr>
+              <a:spcAft>
+                <a:spcPts val="500"/>
+              </a:spcAft>
+            </a:pPr>
+            <a:r>
+              <a:rPr sz="1250">
+                <a:solidFill>
+                  <a:srgbClr val="373737"/>
+                </a:solidFill>
+              </a:rPr>
+              <a:t>Açıklama: Büyük ödüller keşfedilince değer hedefleri büyür (critic zorlanır); politika oturunca düşer. Actor küçük çünkü klips güncellemeyi sınırlar.</a:t>
+            </a:r>
+          </a:p>
+          <a:p>
+            <a:pPr>
+              <a:spcAft>
+                <a:spcPts val="500"/>
+              </a:spcAft>
+            </a:pPr>
+            <a:r>
+              <a:rPr sz="1250">
+                <a:solidFill>
+                  <a:srgbClr val="373737"/>
+                </a:solidFill>
+              </a:rPr>
+              <a:t>Sonuç: Critic loss düşüşü sağlıklı yakınsama, actor loss yataylık kararlılığı gösterir.</a:t>
             </a:r>
           </a:p>
         </p:txBody>
@@ -3394,6 +3440,14 @@
 <file path=ppt/slides/slide11.xml><?xml version="1.0" encoding="utf-8"?>
 <p:sld xmlns:a="http://schemas.openxmlformats.org/drawingml/2006/main" xmlns:p="http://schemas.openxmlformats.org/presentationml/2006/main" xmlns:r="http://schemas.openxmlformats.org/officeDocument/2006/relationships">
   <p:cSld>
+    <p:bg>
+      <p:bgPr>
+        <a:solidFill>
+          <a:srgbClr val="FFFFFF"/>
+        </a:solidFill>
+        <a:effectLst/>
+      </p:bgPr>
+    </p:bg>
     <p:spTree>
       <p:nvGrpSpPr>
         <p:cNvPr id="1" name=""/>
@@ -3403,14 +3457,57 @@
       <p:grpSpPr/>
       <p:sp>
         <p:nvSpPr>
-          <p:cNvPr id="2" name="TextBox 1"/>
+          <p:cNvPr id="2" name="Rectangle 1"/>
+          <p:cNvSpPr/>
+          <p:nvPr/>
+        </p:nvSpPr>
+        <p:spPr>
+          <a:xfrm>
+            <a:off x="0" y="0"/>
+            <a:ext cx="12191695" cy="960120"/>
+          </a:xfrm>
+          <a:prstGeom prst="rect">
+            <a:avLst/>
+          </a:prstGeom>
+          <a:solidFill>
+            <a:srgbClr val="1A237E"/>
+          </a:solidFill>
+          <a:ln>
+            <a:noFill/>
+          </a:ln>
+        </p:spPr>
+        <p:style>
+          <a:lnRef idx="1">
+            <a:schemeClr val="accent1"/>
+          </a:lnRef>
+          <a:fillRef idx="3">
+            <a:schemeClr val="accent1"/>
+          </a:fillRef>
+          <a:effectRef idx="2">
+            <a:schemeClr val="accent1"/>
+          </a:effectRef>
+          <a:fontRef idx="minor">
+            <a:schemeClr val="lt1"/>
+          </a:fontRef>
+        </p:style>
+        <p:txBody>
+          <a:bodyPr rtlCol="0" anchor="ctr"/>
+          <a:lstStyle/>
+          <a:p>
+            <a:pPr algn="ctr"/>
+          </a:p>
+        </p:txBody>
+      </p:sp>
+      <p:sp>
+        <p:nvSpPr>
+          <p:cNvPr id="3" name="TextBox 2"/>
           <p:cNvSpPr txBox="1"/>
           <p:nvPr/>
         </p:nvSpPr>
         <p:spPr>
           <a:xfrm>
-            <a:off x="548640" y="274320"/>
-            <a:ext cx="11064240" cy="822960"/>
+            <a:off x="457200" y="164592"/>
+            <a:ext cx="11247120" cy="685800"/>
           </a:xfrm>
           <a:prstGeom prst="rect">
             <a:avLst/>
@@ -3424,19 +3521,19 @@
           <a:lstStyle/>
           <a:p>
             <a:r>
-              <a:rPr sz="2600" b="1">
-                <a:solidFill>
-                  <a:srgbClr val="1A237E"/>
-                </a:solidFill>
-              </a:rPr>
-              <a:t>Grafik 5 - Baseline Karsilastirma</a:t>
+              <a:rPr sz="2300" b="1">
+                <a:solidFill>
+                  <a:srgbClr val="FFFFFF"/>
+                </a:solidFill>
+              </a:rPr>
+              <a:t>Grafik 4 — Hiperparametre Duyarlılığı (5 parametre)</a:t>
             </a:r>
           </a:p>
         </p:txBody>
       </p:sp>
       <p:pic>
         <p:nvPicPr>
-          <p:cNvPr id="3" name="Picture 2" descr="5_baseline_karsilastirma.png"/>
+          <p:cNvPr id="4" name="Picture 3" descr="4_hiperparametre_duyarlilik.png"/>
           <p:cNvPicPr>
             <a:picLocks noChangeAspect="1"/>
           </p:cNvPicPr>
@@ -3450,8 +3547,8 @@
         </p:blipFill>
         <p:spPr>
           <a:xfrm>
-            <a:off x="365760" y="1188720"/>
-            <a:ext cx="7004729" cy="4937760"/>
+            <a:off x="548640" y="1188720"/>
+            <a:ext cx="11064240" cy="2515562"/>
           </a:xfrm>
           <a:prstGeom prst="rect">
             <a:avLst/>
@@ -3460,14 +3557,14 @@
       </p:pic>
       <p:sp>
         <p:nvSpPr>
-          <p:cNvPr id="4" name="TextBox 3"/>
+          <p:cNvPr id="5" name="TextBox 4"/>
           <p:cNvSpPr txBox="1"/>
           <p:nvPr/>
         </p:nvSpPr>
         <p:spPr>
           <a:xfrm>
-            <a:off x="7863840" y="1280160"/>
-            <a:ext cx="4023360" cy="4937760"/>
+            <a:off x="548640" y="5806440"/>
+            <a:ext cx="11064240" cy="914400"/>
           </a:xfrm>
           <a:prstGeom prst="rect">
             <a:avLst/>
@@ -3481,25 +3578,12 @@
           <a:lstStyle/>
           <a:p>
             <a:r>
-              <a:rPr sz="1600" b="1">
-                <a:solidFill>
-                  <a:srgbClr val="1A237E"/>
-                </a:solidFill>
-              </a:rPr>
-              <a:t>Yorum</a:t>
-            </a:r>
-          </a:p>
-          <a:p>
-            <a:r>
-              <a:rPr sz="1400">
-                <a:solidFill>
-                  <a:srgbClr val="424242"/>
-                </a:solidFill>
-              </a:rPr>
-              <a:t>Gozlem: Eval getirisi PPO 459, heuristic 402, random 49.
-Karsilastirma: Getiride az fark olsa da kapsama (%96.7 vs %79.9) ve carpisma (0.04 vs 0.45) farki cok buyuk; random her olcutte geride.
-Aciklama: Heuristic kapilari planlayamaz ve sik carpar; PPO lidar+deger ile daha cok oda gezip neredeyse hic carpmaz.
-Sonuc: Ogrenme gercek kazanim; problem basit kural/rastgelelikle cozulemez (B5).</a:t>
+              <a:rPr sz="1100">
+                <a:solidFill>
+                  <a:srgbClr val="373737"/>
+                </a:solidFill>
+              </a:rPr>
+              <a:t>Gözlem: clip_range, ent_coef, gamma, learning_rate, vf_coef 5 tohumla tarandı; eğriler hata bandı içinde yatay.  Karşılaştırma: Orta clip (0.2), 0.98–0.99 gamma ve düşük-orta lr en dengeli; uçlar varyansı artırır.  Açıklama: Yüksek ent_coef/gamma keşfi (exploration), düşük lr/orta clip sömürüyü (exploitation) ve kararlılığı güçlendirir.  Sonuç: Seçilen taban değerler güvenli orta nokta; sonuç bu aralıkta gürbüz.</a:t>
             </a:r>
           </a:p>
         </p:txBody>
@@ -3515,6 +3599,14 @@
 <file path=ppt/slides/slide12.xml><?xml version="1.0" encoding="utf-8"?>
 <p:sld xmlns:a="http://schemas.openxmlformats.org/drawingml/2006/main" xmlns:p="http://schemas.openxmlformats.org/presentationml/2006/main" xmlns:r="http://schemas.openxmlformats.org/officeDocument/2006/relationships">
   <p:cSld>
+    <p:bg>
+      <p:bgPr>
+        <a:solidFill>
+          <a:srgbClr val="FFFFFF"/>
+        </a:solidFill>
+        <a:effectLst/>
+      </p:bgPr>
+    </p:bg>
     <p:spTree>
       <p:nvGrpSpPr>
         <p:cNvPr id="1" name=""/>
@@ -3524,14 +3616,57 @@
       <p:grpSpPr/>
       <p:sp>
         <p:nvSpPr>
-          <p:cNvPr id="2" name="TextBox 1"/>
+          <p:cNvPr id="2" name="Rectangle 1"/>
+          <p:cNvSpPr/>
+          <p:nvPr/>
+        </p:nvSpPr>
+        <p:spPr>
+          <a:xfrm>
+            <a:off x="0" y="0"/>
+            <a:ext cx="12191695" cy="960120"/>
+          </a:xfrm>
+          <a:prstGeom prst="rect">
+            <a:avLst/>
+          </a:prstGeom>
+          <a:solidFill>
+            <a:srgbClr val="1A237E"/>
+          </a:solidFill>
+          <a:ln>
+            <a:noFill/>
+          </a:ln>
+        </p:spPr>
+        <p:style>
+          <a:lnRef idx="1">
+            <a:schemeClr val="accent1"/>
+          </a:lnRef>
+          <a:fillRef idx="3">
+            <a:schemeClr val="accent1"/>
+          </a:fillRef>
+          <a:effectRef idx="2">
+            <a:schemeClr val="accent1"/>
+          </a:effectRef>
+          <a:fontRef idx="minor">
+            <a:schemeClr val="lt1"/>
+          </a:fontRef>
+        </p:style>
+        <p:txBody>
+          <a:bodyPr rtlCol="0" anchor="ctr"/>
+          <a:lstStyle/>
+          <a:p>
+            <a:pPr algn="ctr"/>
+          </a:p>
+        </p:txBody>
+      </p:sp>
+      <p:sp>
+        <p:nvSpPr>
+          <p:cNvPr id="3" name="TextBox 2"/>
           <p:cNvSpPr txBox="1"/>
           <p:nvPr/>
         </p:nvSpPr>
         <p:spPr>
           <a:xfrm>
-            <a:off x="548640" y="274320"/>
-            <a:ext cx="11064240" cy="822960"/>
+            <a:off x="457200" y="164592"/>
+            <a:ext cx="11247120" cy="685800"/>
           </a:xfrm>
           <a:prstGeom prst="rect">
             <a:avLst/>
@@ -3545,27 +3680,2489 @@
           <a:lstStyle/>
           <a:p>
             <a:r>
-              <a:rPr sz="3000" b="1">
-                <a:solidFill>
-                  <a:srgbClr val="1A237E"/>
-                </a:solidFill>
-              </a:rPr>
-              <a:t>PPO vs SAC Karsilastirmasi (ayni ortam/seed/protokol)</a:t>
+              <a:rPr sz="2300" b="1">
+                <a:solidFill>
+                  <a:srgbClr val="FFFFFF"/>
+                </a:solidFill>
+              </a:rPr>
+              <a:t>Grafik 5 — Baseline Karşılaştırma (getiri)</a:t>
+            </a:r>
+          </a:p>
+        </p:txBody>
+      </p:sp>
+      <p:pic>
+        <p:nvPicPr>
+          <p:cNvPr id="4" name="Picture 3" descr="5_baseline_karsilastirma.png"/>
+          <p:cNvPicPr>
+            <a:picLocks noChangeAspect="1"/>
+          </p:cNvPicPr>
+          <p:nvPr/>
+        </p:nvPicPr>
+        <p:blipFill>
+          <a:blip r:embed="rId2"/>
+          <a:stretch>
+            <a:fillRect/>
+          </a:stretch>
+        </p:blipFill>
+        <p:spPr>
+          <a:xfrm>
+            <a:off x="320040" y="1143000"/>
+            <a:ext cx="6756648" cy="5029200"/>
+          </a:xfrm>
+          <a:prstGeom prst="rect">
+            <a:avLst/>
+          </a:prstGeom>
+        </p:spPr>
+      </p:pic>
+      <p:sp>
+        <p:nvSpPr>
+          <p:cNvPr id="5" name="TextBox 4"/>
+          <p:cNvSpPr txBox="1"/>
+          <p:nvPr/>
+        </p:nvSpPr>
+        <p:spPr>
+          <a:xfrm>
+            <a:off x="7955279" y="1188720"/>
+            <a:ext cx="4023360" cy="5212080"/>
+          </a:xfrm>
+          <a:prstGeom prst="rect">
+            <a:avLst/>
+          </a:prstGeom>
+          <a:noFill/>
+        </p:spPr>
+        <p:txBody>
+          <a:bodyPr wrap="square">
+            <a:spAutoFit/>
+          </a:bodyPr>
+          <a:lstStyle/>
+          <a:p>
+            <a:r>
+              <a:rPr sz="1600" b="1">
+                <a:solidFill>
+                  <a:srgbClr val="1565C0"/>
+                </a:solidFill>
+              </a:rPr>
+              <a:t>Yorum</a:t>
+            </a:r>
+          </a:p>
+          <a:p>
+            <a:pPr>
+              <a:spcAft>
+                <a:spcPts val="500"/>
+              </a:spcAft>
+            </a:pPr>
+            <a:r>
+              <a:rPr sz="1250">
+                <a:solidFill>
+                  <a:srgbClr val="373737"/>
+                </a:solidFill>
+              </a:rPr>
+              <a:t>Gözlem: Eval getirisi PPO ~459, heuristic ~402, random ~49.</a:t>
+            </a:r>
+          </a:p>
+          <a:p>
+            <a:pPr>
+              <a:spcAft>
+                <a:spcPts val="500"/>
+              </a:spcAft>
+            </a:pPr>
+            <a:r>
+              <a:rPr sz="1250">
+                <a:solidFill>
+                  <a:srgbClr val="373737"/>
+                </a:solidFill>
+              </a:rPr>
+              <a:t>Karşılaştırma: Getiride az fark olsa da kapsama ve çarpışma farkı çok büyük; random her ölçütte geride.</a:t>
+            </a:r>
+          </a:p>
+          <a:p>
+            <a:pPr>
+              <a:spcAft>
+                <a:spcPts val="500"/>
+              </a:spcAft>
+            </a:pPr>
+            <a:r>
+              <a:rPr sz="1250">
+                <a:solidFill>
+                  <a:srgbClr val="373737"/>
+                </a:solidFill>
+              </a:rPr>
+              <a:t>Açıklama: Heuristic kapıları planlayamaz ve sık çarpar; PPO lidar+değer ile daha çok oda gezip neredeyse hiç çarpmaz.</a:t>
+            </a:r>
+          </a:p>
+          <a:p>
+            <a:pPr>
+              <a:spcAft>
+                <a:spcPts val="500"/>
+              </a:spcAft>
+            </a:pPr>
+            <a:r>
+              <a:rPr sz="1250">
+                <a:solidFill>
+                  <a:srgbClr val="373737"/>
+                </a:solidFill>
+              </a:rPr>
+              <a:t>Sonuç: Öğrenme gerçek kazanım; problem basit kural/rastgelelikle çözülemez (rehber B5).</a:t>
+            </a:r>
+          </a:p>
+        </p:txBody>
+      </p:sp>
+    </p:spTree>
+  </p:cSld>
+  <p:clrMapOvr>
+    <a:masterClrMapping/>
+  </p:clrMapOvr>
+</p:sld>
+</file>
+
+<file path=ppt/slides/slide13.xml><?xml version="1.0" encoding="utf-8"?>
+<p:sld xmlns:a="http://schemas.openxmlformats.org/drawingml/2006/main" xmlns:p="http://schemas.openxmlformats.org/presentationml/2006/main" xmlns:r="http://schemas.openxmlformats.org/officeDocument/2006/relationships">
+  <p:cSld>
+    <p:bg>
+      <p:bgPr>
+        <a:solidFill>
+          <a:srgbClr val="FFFFFF"/>
+        </a:solidFill>
+        <a:effectLst/>
+      </p:bgPr>
+    </p:bg>
+    <p:spTree>
+      <p:nvGrpSpPr>
+        <p:cNvPr id="1" name=""/>
+        <p:cNvGrpSpPr/>
+        <p:nvPr/>
+      </p:nvGrpSpPr>
+      <p:grpSpPr/>
+      <p:sp>
+        <p:nvSpPr>
+          <p:cNvPr id="2" name="Rectangle 1"/>
+          <p:cNvSpPr/>
+          <p:nvPr/>
+        </p:nvSpPr>
+        <p:spPr>
+          <a:xfrm>
+            <a:off x="0" y="0"/>
+            <a:ext cx="12191695" cy="960120"/>
+          </a:xfrm>
+          <a:prstGeom prst="rect">
+            <a:avLst/>
+          </a:prstGeom>
+          <a:solidFill>
+            <a:srgbClr val="1A237E"/>
+          </a:solidFill>
+          <a:ln>
+            <a:noFill/>
+          </a:ln>
+        </p:spPr>
+        <p:style>
+          <a:lnRef idx="1">
+            <a:schemeClr val="accent1"/>
+          </a:lnRef>
+          <a:fillRef idx="3">
+            <a:schemeClr val="accent1"/>
+          </a:fillRef>
+          <a:effectRef idx="2">
+            <a:schemeClr val="accent1"/>
+          </a:effectRef>
+          <a:fontRef idx="minor">
+            <a:schemeClr val="lt1"/>
+          </a:fontRef>
+        </p:style>
+        <p:txBody>
+          <a:bodyPr rtlCol="0" anchor="ctr"/>
+          <a:lstStyle/>
+          <a:p>
+            <a:pPr algn="ctr"/>
+          </a:p>
+        </p:txBody>
+      </p:sp>
+      <p:sp>
+        <p:nvSpPr>
+          <p:cNvPr id="3" name="TextBox 2"/>
+          <p:cNvSpPr txBox="1"/>
+          <p:nvPr/>
+        </p:nvSpPr>
+        <p:spPr>
+          <a:xfrm>
+            <a:off x="457200" y="164592"/>
+            <a:ext cx="11247120" cy="685800"/>
+          </a:xfrm>
+          <a:prstGeom prst="rect">
+            <a:avLst/>
+          </a:prstGeom>
+          <a:noFill/>
+        </p:spPr>
+        <p:txBody>
+          <a:bodyPr wrap="square">
+            <a:spAutoFit/>
+          </a:bodyPr>
+          <a:lstStyle/>
+          <a:p>
+            <a:r>
+              <a:rPr sz="2300" b="1">
+                <a:solidFill>
+                  <a:srgbClr val="FFFFFF"/>
+                </a:solidFill>
+              </a:rPr>
+              <a:t>Grafik 5b — Baseline 4 Metrik (görev metrikleri)</a:t>
+            </a:r>
+          </a:p>
+        </p:txBody>
+      </p:sp>
+      <p:pic>
+        <p:nvPicPr>
+          <p:cNvPr id="4" name="Picture 3" descr="5b_baseline_4metrik.png"/>
+          <p:cNvPicPr>
+            <a:picLocks noChangeAspect="1"/>
+          </p:cNvPicPr>
+          <p:nvPr/>
+        </p:nvPicPr>
+        <p:blipFill>
+          <a:blip r:embed="rId2"/>
+          <a:stretch>
+            <a:fillRect/>
+          </a:stretch>
+        </p:blipFill>
+        <p:spPr>
+          <a:xfrm>
+            <a:off x="548640" y="1188720"/>
+            <a:ext cx="11064240" cy="2979841"/>
+          </a:xfrm>
+          <a:prstGeom prst="rect">
+            <a:avLst/>
+          </a:prstGeom>
+        </p:spPr>
+      </p:pic>
+      <p:sp>
+        <p:nvSpPr>
+          <p:cNvPr id="5" name="TextBox 4"/>
+          <p:cNvSpPr txBox="1"/>
+          <p:nvPr/>
+        </p:nvSpPr>
+        <p:spPr>
+          <a:xfrm>
+            <a:off x="548640" y="5806440"/>
+            <a:ext cx="11064240" cy="914400"/>
+          </a:xfrm>
+          <a:prstGeom prst="rect">
+            <a:avLst/>
+          </a:prstGeom>
+          <a:noFill/>
+        </p:spPr>
+        <p:txBody>
+          <a:bodyPr wrap="square">
+            <a:spAutoFit/>
+          </a:bodyPr>
+          <a:lstStyle/>
+          <a:p>
+            <a:r>
+              <a:rPr sz="1100">
+                <a:solidFill>
+                  <a:srgbClr val="373737"/>
+                </a:solidFill>
+              </a:rPr>
+              <a:t>Gözlem: Getiri, oda, kapsama ve başarı metriklerinin dördünde de PPO önde.  Karşılaştırma: Özellikle tam-keşif başarısında PPO açık ara önde; random %0 başarı.  Açıklama: Görev metrikleri (oda/kapsama) sadece getiriye değil sistematik keşfe bakar; PPO bunu öğrenir.  Sonuç: PPO yalnızca puan değil, gerçek görev hedefini de baskalarından iyi yapar.</a:t>
+            </a:r>
+          </a:p>
+        </p:txBody>
+      </p:sp>
+    </p:spTree>
+  </p:cSld>
+  <p:clrMapOvr>
+    <a:masterClrMapping/>
+  </p:clrMapOvr>
+</p:sld>
+</file>
+
+<file path=ppt/slides/slide14.xml><?xml version="1.0" encoding="utf-8"?>
+<p:sld xmlns:a="http://schemas.openxmlformats.org/drawingml/2006/main" xmlns:p="http://schemas.openxmlformats.org/presentationml/2006/main" xmlns:r="http://schemas.openxmlformats.org/officeDocument/2006/relationships">
+  <p:cSld>
+    <p:bg>
+      <p:bgPr>
+        <a:solidFill>
+          <a:srgbClr val="FFFFFF"/>
+        </a:solidFill>
+        <a:effectLst/>
+      </p:bgPr>
+    </p:bg>
+    <p:spTree>
+      <p:nvGrpSpPr>
+        <p:cNvPr id="1" name=""/>
+        <p:cNvGrpSpPr/>
+        <p:nvPr/>
+      </p:nvGrpSpPr>
+      <p:grpSpPr/>
+      <p:sp>
+        <p:nvSpPr>
+          <p:cNvPr id="2" name="Rectangle 1"/>
+          <p:cNvSpPr/>
+          <p:nvPr/>
+        </p:nvSpPr>
+        <p:spPr>
+          <a:xfrm>
+            <a:off x="0" y="0"/>
+            <a:ext cx="12191695" cy="960120"/>
+          </a:xfrm>
+          <a:prstGeom prst="rect">
+            <a:avLst/>
+          </a:prstGeom>
+          <a:solidFill>
+            <a:srgbClr val="1A237E"/>
+          </a:solidFill>
+          <a:ln>
+            <a:noFill/>
+          </a:ln>
+        </p:spPr>
+        <p:style>
+          <a:lnRef idx="1">
+            <a:schemeClr val="accent1"/>
+          </a:lnRef>
+          <a:fillRef idx="3">
+            <a:schemeClr val="accent1"/>
+          </a:fillRef>
+          <a:effectRef idx="2">
+            <a:schemeClr val="accent1"/>
+          </a:effectRef>
+          <a:fontRef idx="minor">
+            <a:schemeClr val="lt1"/>
+          </a:fontRef>
+        </p:style>
+        <p:txBody>
+          <a:bodyPr rtlCol="0" anchor="ctr"/>
+          <a:lstStyle/>
+          <a:p>
+            <a:pPr algn="ctr"/>
+          </a:p>
+        </p:txBody>
+      </p:sp>
+      <p:sp>
+        <p:nvSpPr>
+          <p:cNvPr id="3" name="TextBox 2"/>
+          <p:cNvSpPr txBox="1"/>
+          <p:nvPr/>
+        </p:nvSpPr>
+        <p:spPr>
+          <a:xfrm>
+            <a:off x="457200" y="164592"/>
+            <a:ext cx="11247120" cy="685800"/>
+          </a:xfrm>
+          <a:prstGeom prst="rect">
+            <a:avLst/>
+          </a:prstGeom>
+          <a:noFill/>
+        </p:spPr>
+        <p:txBody>
+          <a:bodyPr wrap="square">
+            <a:spAutoFit/>
+          </a:bodyPr>
+          <a:lstStyle/>
+          <a:p>
+            <a:r>
+              <a:rPr sz="2300" b="1">
+                <a:solidFill>
+                  <a:srgbClr val="FFFFFF"/>
+                </a:solidFill>
+              </a:rPr>
+              <a:t>Grafik 6 — PPO İç Dinamikleri (clip / KL / entropi)</a:t>
+            </a:r>
+          </a:p>
+        </p:txBody>
+      </p:sp>
+      <p:pic>
+        <p:nvPicPr>
+          <p:cNvPr id="4" name="Picture 3" descr="6_ppo_ic_dinamikler.png"/>
+          <p:cNvPicPr>
+            <a:picLocks noChangeAspect="1"/>
+          </p:cNvPicPr>
+          <p:nvPr/>
+        </p:nvPicPr>
+        <p:blipFill>
+          <a:blip r:embed="rId2"/>
+          <a:stretch>
+            <a:fillRect/>
+          </a:stretch>
+        </p:blipFill>
+        <p:spPr>
+          <a:xfrm>
+            <a:off x="548640" y="1188720"/>
+            <a:ext cx="11064240" cy="3171811"/>
+          </a:xfrm>
+          <a:prstGeom prst="rect">
+            <a:avLst/>
+          </a:prstGeom>
+        </p:spPr>
+      </p:pic>
+      <p:sp>
+        <p:nvSpPr>
+          <p:cNvPr id="5" name="TextBox 4"/>
+          <p:cNvSpPr txBox="1"/>
+          <p:nvPr/>
+        </p:nvSpPr>
+        <p:spPr>
+          <a:xfrm>
+            <a:off x="548640" y="5806440"/>
+            <a:ext cx="11064240" cy="914400"/>
+          </a:xfrm>
+          <a:prstGeom prst="rect">
+            <a:avLst/>
+          </a:prstGeom>
+          <a:noFill/>
+        </p:spPr>
+        <p:txBody>
+          <a:bodyPr wrap="square">
+            <a:spAutoFit/>
+          </a:bodyPr>
+          <a:lstStyle/>
+          <a:p>
+            <a:r>
+              <a:rPr sz="1100">
+                <a:solidFill>
+                  <a:srgbClr val="373737"/>
+                </a:solidFill>
+              </a:rPr>
+              <a:t>Gözlem: clip_fraction ~0.04'ten ~0.16'ya çıkar, approx_kl büyür, entropi azalır.  Karşılaştırma: DQN'deki epsilon çizelgesinin PPO karşılığı; keşiften sömürüye geçiş ÖĞRENİLEREK olur.  Açıklama: Başta yüksek entropi geniş keşif sağlar; politika iyileştikçe avantajlı eylemlere olasılık yığılır, entropi düşer.  Sonuç: Eğrilerin patlamadan seyretmesi klips'in güncellemeleri güvenli tuttuğunu gösterir.</a:t>
+            </a:r>
+          </a:p>
+        </p:txBody>
+      </p:sp>
+    </p:spTree>
+  </p:cSld>
+  <p:clrMapOvr>
+    <a:masterClrMapping/>
+  </p:clrMapOvr>
+</p:sld>
+</file>
+
+<file path=ppt/slides/slide15.xml><?xml version="1.0" encoding="utf-8"?>
+<p:sld xmlns:a="http://schemas.openxmlformats.org/drawingml/2006/main" xmlns:p="http://schemas.openxmlformats.org/presentationml/2006/main" xmlns:r="http://schemas.openxmlformats.org/officeDocument/2006/relationships">
+  <p:cSld>
+    <p:bg>
+      <p:bgPr>
+        <a:solidFill>
+          <a:srgbClr val="FFFFFF"/>
+        </a:solidFill>
+        <a:effectLst/>
+      </p:bgPr>
+    </p:bg>
+    <p:spTree>
+      <p:nvGrpSpPr>
+        <p:cNvPr id="1" name=""/>
+        <p:cNvGrpSpPr/>
+        <p:nvPr/>
+      </p:nvGrpSpPr>
+      <p:grpSpPr/>
+      <p:sp>
+        <p:nvSpPr>
+          <p:cNvPr id="2" name="Rectangle 1"/>
+          <p:cNvSpPr/>
+          <p:nvPr/>
+        </p:nvSpPr>
+        <p:spPr>
+          <a:xfrm>
+            <a:off x="0" y="0"/>
+            <a:ext cx="12191695" cy="960120"/>
+          </a:xfrm>
+          <a:prstGeom prst="rect">
+            <a:avLst/>
+          </a:prstGeom>
+          <a:solidFill>
+            <a:srgbClr val="1A237E"/>
+          </a:solidFill>
+          <a:ln>
+            <a:noFill/>
+          </a:ln>
+        </p:spPr>
+        <p:style>
+          <a:lnRef idx="1">
+            <a:schemeClr val="accent1"/>
+          </a:lnRef>
+          <a:fillRef idx="3">
+            <a:schemeClr val="accent1"/>
+          </a:fillRef>
+          <a:effectRef idx="2">
+            <a:schemeClr val="accent1"/>
+          </a:effectRef>
+          <a:fontRef idx="minor">
+            <a:schemeClr val="lt1"/>
+          </a:fontRef>
+        </p:style>
+        <p:txBody>
+          <a:bodyPr rtlCol="0" anchor="ctr"/>
+          <a:lstStyle/>
+          <a:p>
+            <a:pPr algn="ctr"/>
+          </a:p>
+        </p:txBody>
+      </p:sp>
+      <p:sp>
+        <p:nvSpPr>
+          <p:cNvPr id="3" name="TextBox 2"/>
+          <p:cNvSpPr txBox="1"/>
+          <p:nvPr/>
+        </p:nvSpPr>
+        <p:spPr>
+          <a:xfrm>
+            <a:off x="457200" y="164592"/>
+            <a:ext cx="11247120" cy="685800"/>
+          </a:xfrm>
+          <a:prstGeom prst="rect">
+            <a:avLst/>
+          </a:prstGeom>
+          <a:noFill/>
+        </p:spPr>
+        <p:txBody>
+          <a:bodyPr wrap="square">
+            <a:spAutoFit/>
+          </a:bodyPr>
+          <a:lstStyle/>
+          <a:p>
+            <a:r>
+              <a:rPr sz="2300" b="1">
+                <a:solidFill>
+                  <a:srgbClr val="FFFFFF"/>
+                </a:solidFill>
+              </a:rPr>
+              <a:t>Grafik 7 — Oda Keşif Süreci</a:t>
+            </a:r>
+          </a:p>
+        </p:txBody>
+      </p:sp>
+      <p:pic>
+        <p:nvPicPr>
+          <p:cNvPr id="4" name="Picture 3" descr="7_oda_kesif_sureci.png"/>
+          <p:cNvPicPr>
+            <a:picLocks noChangeAspect="1"/>
+          </p:cNvPicPr>
+          <p:nvPr/>
+        </p:nvPicPr>
+        <p:blipFill>
+          <a:blip r:embed="rId2"/>
+          <a:stretch>
+            <a:fillRect/>
+          </a:stretch>
+        </p:blipFill>
+        <p:spPr>
+          <a:xfrm>
+            <a:off x="320040" y="1143000"/>
+            <a:ext cx="8369764" cy="5029200"/>
+          </a:xfrm>
+          <a:prstGeom prst="rect">
+            <a:avLst/>
+          </a:prstGeom>
+        </p:spPr>
+      </p:pic>
+      <p:sp>
+        <p:nvSpPr>
+          <p:cNvPr id="5" name="TextBox 4"/>
+          <p:cNvSpPr txBox="1"/>
+          <p:nvPr/>
+        </p:nvSpPr>
+        <p:spPr>
+          <a:xfrm>
+            <a:off x="7955279" y="1188720"/>
+            <a:ext cx="4023360" cy="5212080"/>
+          </a:xfrm>
+          <a:prstGeom prst="rect">
+            <a:avLst/>
+          </a:prstGeom>
+          <a:noFill/>
+        </p:spPr>
+        <p:txBody>
+          <a:bodyPr wrap="square">
+            <a:spAutoFit/>
+          </a:bodyPr>
+          <a:lstStyle/>
+          <a:p>
+            <a:r>
+              <a:rPr sz="1600" b="1">
+                <a:solidFill>
+                  <a:srgbClr val="1565C0"/>
+                </a:solidFill>
+              </a:rPr>
+              <a:t>Yorum</a:t>
+            </a:r>
+          </a:p>
+          <a:p>
+            <a:pPr>
+              <a:spcAft>
+                <a:spcPts val="500"/>
+              </a:spcAft>
+            </a:pPr>
+            <a:r>
+              <a:rPr sz="1250">
+                <a:solidFill>
+                  <a:srgbClr val="373737"/>
+                </a:solidFill>
+              </a:rPr>
+              <a:t>Gözlem: Episode başına keşfedilen oda 1'den yükselip hedef 6'ya yaklaşır.</a:t>
+            </a:r>
+          </a:p>
+          <a:p>
+            <a:pPr>
+              <a:spcAft>
+                <a:spcPts val="500"/>
+              </a:spcAft>
+            </a:pPr>
+            <a:r>
+              <a:rPr sz="1250">
+                <a:solidFill>
+                  <a:srgbClr val="373737"/>
+                </a:solidFill>
+              </a:rPr>
+              <a:t>Karşılaştırma: Başta sadece doğulan oda; sonda ortalama 5–6 banda çıkar.</a:t>
+            </a:r>
+          </a:p>
+          <a:p>
+            <a:pPr>
+              <a:spcAft>
+                <a:spcPts val="500"/>
+              </a:spcAft>
+            </a:pPr>
+            <a:r>
+              <a:rPr sz="1250">
+                <a:solidFill>
+                  <a:srgbClr val="373737"/>
+                </a:solidFill>
+              </a:rPr>
+              <a:t>Açıklama: Çarpışmadan kaçınmayı öğrenen ajan hayatta kalır ve kapıları bulup derin odalara erişir (+20/+60 ödül).</a:t>
+            </a:r>
+          </a:p>
+          <a:p>
+            <a:pPr>
+              <a:spcAft>
+                <a:spcPts val="500"/>
+              </a:spcAft>
+            </a:pPr>
+            <a:r>
+              <a:rPr sz="1250">
+                <a:solidFill>
+                  <a:srgbClr val="373737"/>
+                </a:solidFill>
+              </a:rPr>
+              <a:t>Sonuç: Model havada kalmayı değil, asıl amaç olan alan taramayı da yapar.</a:t>
+            </a:r>
+          </a:p>
+        </p:txBody>
+      </p:sp>
+    </p:spTree>
+  </p:cSld>
+  <p:clrMapOvr>
+    <a:masterClrMapping/>
+  </p:clrMapOvr>
+</p:sld>
+</file>
+
+<file path=ppt/slides/slide16.xml><?xml version="1.0" encoding="utf-8"?>
+<p:sld xmlns:a="http://schemas.openxmlformats.org/drawingml/2006/main" xmlns:p="http://schemas.openxmlformats.org/presentationml/2006/main" xmlns:r="http://schemas.openxmlformats.org/officeDocument/2006/relationships">
+  <p:cSld>
+    <p:bg>
+      <p:bgPr>
+        <a:solidFill>
+          <a:srgbClr val="FFFFFF"/>
+        </a:solidFill>
+        <a:effectLst/>
+      </p:bgPr>
+    </p:bg>
+    <p:spTree>
+      <p:nvGrpSpPr>
+        <p:cNvPr id="1" name=""/>
+        <p:cNvGrpSpPr/>
+        <p:nvPr/>
+      </p:nvGrpSpPr>
+      <p:grpSpPr/>
+      <p:sp>
+        <p:nvSpPr>
+          <p:cNvPr id="2" name="Rectangle 1"/>
+          <p:cNvSpPr/>
+          <p:nvPr/>
+        </p:nvSpPr>
+        <p:spPr>
+          <a:xfrm>
+            <a:off x="0" y="0"/>
+            <a:ext cx="12191695" cy="960120"/>
+          </a:xfrm>
+          <a:prstGeom prst="rect">
+            <a:avLst/>
+          </a:prstGeom>
+          <a:solidFill>
+            <a:srgbClr val="1A237E"/>
+          </a:solidFill>
+          <a:ln>
+            <a:noFill/>
+          </a:ln>
+        </p:spPr>
+        <p:style>
+          <a:lnRef idx="1">
+            <a:schemeClr val="accent1"/>
+          </a:lnRef>
+          <a:fillRef idx="3">
+            <a:schemeClr val="accent1"/>
+          </a:fillRef>
+          <a:effectRef idx="2">
+            <a:schemeClr val="accent1"/>
+          </a:effectRef>
+          <a:fontRef idx="minor">
+            <a:schemeClr val="lt1"/>
+          </a:fontRef>
+        </p:style>
+        <p:txBody>
+          <a:bodyPr rtlCol="0" anchor="ctr"/>
+          <a:lstStyle/>
+          <a:p>
+            <a:pPr algn="ctr"/>
+          </a:p>
+        </p:txBody>
+      </p:sp>
+      <p:sp>
+        <p:nvSpPr>
+          <p:cNvPr id="3" name="TextBox 2"/>
+          <p:cNvSpPr txBox="1"/>
+          <p:nvPr/>
+        </p:nvSpPr>
+        <p:spPr>
+          <a:xfrm>
+            <a:off x="457200" y="164592"/>
+            <a:ext cx="11247120" cy="685800"/>
+          </a:xfrm>
+          <a:prstGeom prst="rect">
+            <a:avLst/>
+          </a:prstGeom>
+          <a:noFill/>
+        </p:spPr>
+        <p:txBody>
+          <a:bodyPr wrap="square">
+            <a:spAutoFit/>
+          </a:bodyPr>
+          <a:lstStyle/>
+          <a:p>
+            <a:r>
+              <a:rPr sz="2300" b="1">
+                <a:solidFill>
+                  <a:srgbClr val="FFFFFF"/>
+                </a:solidFill>
+              </a:rPr>
+              <a:t>Grafik 8 — Çarpışma Oranı</a:t>
+            </a:r>
+          </a:p>
+        </p:txBody>
+      </p:sp>
+      <p:pic>
+        <p:nvPicPr>
+          <p:cNvPr id="4" name="Picture 3" descr="8_carpisma_orani.png"/>
+          <p:cNvPicPr>
+            <a:picLocks noChangeAspect="1"/>
+          </p:cNvPicPr>
+          <p:nvPr/>
+        </p:nvPicPr>
+        <p:blipFill>
+          <a:blip r:embed="rId2"/>
+          <a:stretch>
+            <a:fillRect/>
+          </a:stretch>
+        </p:blipFill>
+        <p:spPr>
+          <a:xfrm>
+            <a:off x="320040" y="1143000"/>
+            <a:ext cx="8528838" cy="5029200"/>
+          </a:xfrm>
+          <a:prstGeom prst="rect">
+            <a:avLst/>
+          </a:prstGeom>
+        </p:spPr>
+      </p:pic>
+      <p:sp>
+        <p:nvSpPr>
+          <p:cNvPr id="5" name="TextBox 4"/>
+          <p:cNvSpPr txBox="1"/>
+          <p:nvPr/>
+        </p:nvSpPr>
+        <p:spPr>
+          <a:xfrm>
+            <a:off x="7955279" y="1188720"/>
+            <a:ext cx="4023360" cy="5212080"/>
+          </a:xfrm>
+          <a:prstGeom prst="rect">
+            <a:avLst/>
+          </a:prstGeom>
+          <a:noFill/>
+        </p:spPr>
+        <p:txBody>
+          <a:bodyPr wrap="square">
+            <a:spAutoFit/>
+          </a:bodyPr>
+          <a:lstStyle/>
+          <a:p>
+            <a:r>
+              <a:rPr sz="1600" b="1">
+                <a:solidFill>
+                  <a:srgbClr val="1565C0"/>
+                </a:solidFill>
+              </a:rPr>
+              <a:t>Yorum</a:t>
+            </a:r>
+          </a:p>
+          <a:p>
+            <a:pPr>
+              <a:spcAft>
+                <a:spcPts val="500"/>
+              </a:spcAft>
+            </a:pPr>
+            <a:r>
+              <a:rPr sz="1250">
+                <a:solidFill>
+                  <a:srgbClr val="373737"/>
+                </a:solidFill>
+              </a:rPr>
+              <a:t>Gözlem: Çarpışma oranı başta ~%100'e yakınken zamanla ciddi ve kararlı düşer.</a:t>
+            </a:r>
+          </a:p>
+          <a:p>
+            <a:pPr>
+              <a:spcAft>
+                <a:spcPts val="500"/>
+              </a:spcAft>
+            </a:pPr>
+            <a:r>
+              <a:rPr sz="1250">
+                <a:solidFill>
+                  <a:srgbClr val="373737"/>
+                </a:solidFill>
+              </a:rPr>
+              <a:t>Karşılaştırma: Per-seed eğriler aynı yönde; sonda düşük bantta sabitlenir.</a:t>
+            </a:r>
+          </a:p>
+          <a:p>
+            <a:pPr>
+              <a:spcAft>
+                <a:spcPts val="500"/>
+              </a:spcAft>
+            </a:pPr>
+            <a:r>
+              <a:rPr sz="1250">
+                <a:solidFill>
+                  <a:srgbClr val="373737"/>
+                </a:solidFill>
+              </a:rPr>
+              <a:t>Açıklama: Lidar mesafesi ile -40 çarpışma cezası ilişkisi ağ tarafından kurulur; kaçış davranışı değere yansır.</a:t>
+            </a:r>
+          </a:p>
+          <a:p>
+            <a:pPr>
+              <a:spcAft>
+                <a:spcPts val="500"/>
+              </a:spcAft>
+            </a:pPr>
+            <a:r>
+              <a:rPr sz="1250">
+                <a:solidFill>
+                  <a:srgbClr val="373737"/>
+                </a:solidFill>
+              </a:rPr>
+              <a:t>Sonuç: Ajan engel algılama ve çarpışmadan sakınmayı kalıcı olarak edinir.</a:t>
+            </a:r>
+          </a:p>
+        </p:txBody>
+      </p:sp>
+    </p:spTree>
+  </p:cSld>
+  <p:clrMapOvr>
+    <a:masterClrMapping/>
+  </p:clrMapOvr>
+</p:sld>
+</file>
+
+<file path=ppt/slides/slide17.xml><?xml version="1.0" encoding="utf-8"?>
+<p:sld xmlns:a="http://schemas.openxmlformats.org/drawingml/2006/main" xmlns:p="http://schemas.openxmlformats.org/presentationml/2006/main" xmlns:r="http://schemas.openxmlformats.org/officeDocument/2006/relationships">
+  <p:cSld>
+    <p:bg>
+      <p:bgPr>
+        <a:solidFill>
+          <a:srgbClr val="FFFFFF"/>
+        </a:solidFill>
+        <a:effectLst/>
+      </p:bgPr>
+    </p:bg>
+    <p:spTree>
+      <p:nvGrpSpPr>
+        <p:cNvPr id="1" name=""/>
+        <p:cNvGrpSpPr/>
+        <p:nvPr/>
+      </p:nvGrpSpPr>
+      <p:grpSpPr/>
+      <p:sp>
+        <p:nvSpPr>
+          <p:cNvPr id="2" name="Rectangle 1"/>
+          <p:cNvSpPr/>
+          <p:nvPr/>
+        </p:nvSpPr>
+        <p:spPr>
+          <a:xfrm>
+            <a:off x="0" y="0"/>
+            <a:ext cx="12191695" cy="960120"/>
+          </a:xfrm>
+          <a:prstGeom prst="rect">
+            <a:avLst/>
+          </a:prstGeom>
+          <a:solidFill>
+            <a:srgbClr val="1A237E"/>
+          </a:solidFill>
+          <a:ln>
+            <a:noFill/>
+          </a:ln>
+        </p:spPr>
+        <p:style>
+          <a:lnRef idx="1">
+            <a:schemeClr val="accent1"/>
+          </a:lnRef>
+          <a:fillRef idx="3">
+            <a:schemeClr val="accent1"/>
+          </a:fillRef>
+          <a:effectRef idx="2">
+            <a:schemeClr val="accent1"/>
+          </a:effectRef>
+          <a:fontRef idx="minor">
+            <a:schemeClr val="lt1"/>
+          </a:fontRef>
+        </p:style>
+        <p:txBody>
+          <a:bodyPr rtlCol="0" anchor="ctr"/>
+          <a:lstStyle/>
+          <a:p>
+            <a:pPr algn="ctr"/>
+          </a:p>
+        </p:txBody>
+      </p:sp>
+      <p:sp>
+        <p:nvSpPr>
+          <p:cNvPr id="3" name="TextBox 2"/>
+          <p:cNvSpPr txBox="1"/>
+          <p:nvPr/>
+        </p:nvSpPr>
+        <p:spPr>
+          <a:xfrm>
+            <a:off x="457200" y="164592"/>
+            <a:ext cx="11247120" cy="685800"/>
+          </a:xfrm>
+          <a:prstGeom prst="rect">
+            <a:avLst/>
+          </a:prstGeom>
+          <a:noFill/>
+        </p:spPr>
+        <p:txBody>
+          <a:bodyPr wrap="square">
+            <a:spAutoFit/>
+          </a:bodyPr>
+          <a:lstStyle/>
+          <a:p>
+            <a:r>
+              <a:rPr sz="2300" b="1">
+                <a:solidFill>
+                  <a:srgbClr val="FFFFFF"/>
+                </a:solidFill>
+              </a:rPr>
+              <a:t>Grafik 9 — Seed Karşılaştırması</a:t>
+            </a:r>
+          </a:p>
+        </p:txBody>
+      </p:sp>
+      <p:pic>
+        <p:nvPicPr>
+          <p:cNvPr id="4" name="Picture 3" descr="9_seed_karsilastirma.png"/>
+          <p:cNvPicPr>
+            <a:picLocks noChangeAspect="1"/>
+          </p:cNvPicPr>
+          <p:nvPr/>
+        </p:nvPicPr>
+        <p:blipFill>
+          <a:blip r:embed="rId2"/>
+          <a:stretch>
+            <a:fillRect/>
+          </a:stretch>
+        </p:blipFill>
+        <p:spPr>
+          <a:xfrm>
+            <a:off x="320040" y="1143000"/>
+            <a:ext cx="8528838" cy="5029200"/>
+          </a:xfrm>
+          <a:prstGeom prst="rect">
+            <a:avLst/>
+          </a:prstGeom>
+        </p:spPr>
+      </p:pic>
+      <p:sp>
+        <p:nvSpPr>
+          <p:cNvPr id="5" name="TextBox 4"/>
+          <p:cNvSpPr txBox="1"/>
+          <p:nvPr/>
+        </p:nvSpPr>
+        <p:spPr>
+          <a:xfrm>
+            <a:off x="7955279" y="1188720"/>
+            <a:ext cx="4023360" cy="5212080"/>
+          </a:xfrm>
+          <a:prstGeom prst="rect">
+            <a:avLst/>
+          </a:prstGeom>
+          <a:noFill/>
+        </p:spPr>
+        <p:txBody>
+          <a:bodyPr wrap="square">
+            <a:spAutoFit/>
+          </a:bodyPr>
+          <a:lstStyle/>
+          <a:p>
+            <a:r>
+              <a:rPr sz="1600" b="1">
+                <a:solidFill>
+                  <a:srgbClr val="1565C0"/>
+                </a:solidFill>
+              </a:rPr>
+              <a:t>Yorum</a:t>
+            </a:r>
+          </a:p>
+          <a:p>
+            <a:pPr>
+              <a:spcAft>
+                <a:spcPts val="500"/>
+              </a:spcAft>
+            </a:pPr>
+            <a:r>
+              <a:rPr sz="1250">
+                <a:solidFill>
+                  <a:srgbClr val="373737"/>
+                </a:solidFill>
+              </a:rPr>
+              <a:t>Gözlem: 5 tohumun her biri kendine özgü yörünge izler; bazıları hızlı, bazıları yavaş yükselir.</a:t>
+            </a:r>
+          </a:p>
+          <a:p>
+            <a:pPr>
+              <a:spcAft>
+                <a:spcPts val="500"/>
+              </a:spcAft>
+            </a:pPr>
+            <a:r>
+              <a:rPr sz="1250">
+                <a:solidFill>
+                  <a:srgbClr val="373737"/>
+                </a:solidFill>
+              </a:rPr>
+              <a:t>Karşılaştırma: Başlangıç hızları farklı olsa da hepsi yakın ve yüksek platoya ulaşır.</a:t>
+            </a:r>
+          </a:p>
+          <a:p>
+            <a:pPr>
+              <a:spcAft>
+                <a:spcPts val="500"/>
+              </a:spcAft>
+            </a:pPr>
+            <a:r>
+              <a:rPr sz="1250">
+                <a:solidFill>
+                  <a:srgbClr val="373737"/>
+                </a:solidFill>
+              </a:rPr>
+              <a:t>Açıklama: Fark, başlangıç pozisyonu rastgeleliği ve ağırlık ilklendirmesinden gelir; &gt;=5 tohum bu varyans için gerekli.</a:t>
+            </a:r>
+          </a:p>
+          <a:p>
+            <a:pPr>
+              <a:spcAft>
+                <a:spcPts val="500"/>
+              </a:spcAft>
+            </a:pPr>
+            <a:r>
+              <a:rPr sz="1250">
+                <a:solidFill>
+                  <a:srgbClr val="373737"/>
+                </a:solidFill>
+              </a:rPr>
+              <a:t>Sonuç: Yakınsamanın korunması algoritmanın gürbüzlüğünü (robustness) kanıtlar.</a:t>
+            </a:r>
+          </a:p>
+        </p:txBody>
+      </p:sp>
+    </p:spTree>
+  </p:cSld>
+  <p:clrMapOvr>
+    <a:masterClrMapping/>
+  </p:clrMapOvr>
+</p:sld>
+</file>
+
+<file path=ppt/slides/slide18.xml><?xml version="1.0" encoding="utf-8"?>
+<p:sld xmlns:a="http://schemas.openxmlformats.org/drawingml/2006/main" xmlns:p="http://schemas.openxmlformats.org/presentationml/2006/main" xmlns:r="http://schemas.openxmlformats.org/officeDocument/2006/relationships">
+  <p:cSld>
+    <p:bg>
+      <p:bgPr>
+        <a:solidFill>
+          <a:srgbClr val="FFFFFF"/>
+        </a:solidFill>
+        <a:effectLst/>
+      </p:bgPr>
+    </p:bg>
+    <p:spTree>
+      <p:nvGrpSpPr>
+        <p:cNvPr id="1" name=""/>
+        <p:cNvGrpSpPr/>
+        <p:nvPr/>
+      </p:nvGrpSpPr>
+      <p:grpSpPr/>
+      <p:sp>
+        <p:nvSpPr>
+          <p:cNvPr id="2" name="Rectangle 1"/>
+          <p:cNvSpPr/>
+          <p:nvPr/>
+        </p:nvSpPr>
+        <p:spPr>
+          <a:xfrm>
+            <a:off x="0" y="0"/>
+            <a:ext cx="12191695" cy="960120"/>
+          </a:xfrm>
+          <a:prstGeom prst="rect">
+            <a:avLst/>
+          </a:prstGeom>
+          <a:solidFill>
+            <a:srgbClr val="1A237E"/>
+          </a:solidFill>
+          <a:ln>
+            <a:noFill/>
+          </a:ln>
+        </p:spPr>
+        <p:style>
+          <a:lnRef idx="1">
+            <a:schemeClr val="accent1"/>
+          </a:lnRef>
+          <a:fillRef idx="3">
+            <a:schemeClr val="accent1"/>
+          </a:fillRef>
+          <a:effectRef idx="2">
+            <a:schemeClr val="accent1"/>
+          </a:effectRef>
+          <a:fontRef idx="minor">
+            <a:schemeClr val="lt1"/>
+          </a:fontRef>
+        </p:style>
+        <p:txBody>
+          <a:bodyPr rtlCol="0" anchor="ctr"/>
+          <a:lstStyle/>
+          <a:p>
+            <a:pPr algn="ctr"/>
+          </a:p>
+        </p:txBody>
+      </p:sp>
+      <p:sp>
+        <p:nvSpPr>
+          <p:cNvPr id="3" name="TextBox 2"/>
+          <p:cNvSpPr txBox="1"/>
+          <p:nvPr/>
+        </p:nvSpPr>
+        <p:spPr>
+          <a:xfrm>
+            <a:off x="457200" y="164592"/>
+            <a:ext cx="11247120" cy="685800"/>
+          </a:xfrm>
+          <a:prstGeom prst="rect">
+            <a:avLst/>
+          </a:prstGeom>
+          <a:noFill/>
+        </p:spPr>
+        <p:txBody>
+          <a:bodyPr wrap="square">
+            <a:spAutoFit/>
+          </a:bodyPr>
+          <a:lstStyle/>
+          <a:p>
+            <a:r>
+              <a:rPr sz="2300" b="1">
+                <a:solidFill>
+                  <a:srgbClr val="FFFFFF"/>
+                </a:solidFill>
+              </a:rPr>
+              <a:t>Grafik 10 — gamma × lr Isı Haritası</a:t>
+            </a:r>
+          </a:p>
+        </p:txBody>
+      </p:sp>
+      <p:pic>
+        <p:nvPicPr>
+          <p:cNvPr id="4" name="Picture 3" descr="10_gamma_lr_heatmap.png"/>
+          <p:cNvPicPr>
+            <a:picLocks noChangeAspect="1"/>
+          </p:cNvPicPr>
+          <p:nvPr/>
+        </p:nvPicPr>
+        <p:blipFill>
+          <a:blip r:embed="rId2"/>
+          <a:stretch>
+            <a:fillRect/>
+          </a:stretch>
+        </p:blipFill>
+        <p:spPr>
+          <a:xfrm>
+            <a:off x="548640" y="1188720"/>
+            <a:ext cx="11064240" cy="3311840"/>
+          </a:xfrm>
+          <a:prstGeom prst="rect">
+            <a:avLst/>
+          </a:prstGeom>
+        </p:spPr>
+      </p:pic>
+      <p:sp>
+        <p:nvSpPr>
+          <p:cNvPr id="5" name="TextBox 4"/>
+          <p:cNvSpPr txBox="1"/>
+          <p:nvPr/>
+        </p:nvSpPr>
+        <p:spPr>
+          <a:xfrm>
+            <a:off x="548640" y="5806440"/>
+            <a:ext cx="11064240" cy="914400"/>
+          </a:xfrm>
+          <a:prstGeom prst="rect">
+            <a:avLst/>
+          </a:prstGeom>
+          <a:noFill/>
+        </p:spPr>
+        <p:txBody>
+          <a:bodyPr wrap="square">
+            <a:spAutoFit/>
+          </a:bodyPr>
+          <a:lstStyle/>
+          <a:p>
+            <a:r>
+              <a:rPr sz="1100">
+                <a:solidFill>
+                  <a:srgbClr val="373737"/>
+                </a:solidFill>
+              </a:rPr>
+              <a:t>Gözlem: 3×3 ızgarada getiri/oda/skor ısı haritası; en iyi bölge orta-yüksek gamma + düşük-orta lr köşesi.  Karşılaştırma: Yüksek lr + düşük gamma köşesi en zayıf.  Açıklama: Yüksek gamma gecikmeli oda ödülünü taşır; düşük lr güncellemeyi kararlı tutar; ikisi birlikte en iyi.  Sonuç: Seçilen (gamma=0.98, lr=3e-4) bu en iyi bölgenin içinde; ızgara seçimi doğrular.</a:t>
+            </a:r>
+          </a:p>
+        </p:txBody>
+      </p:sp>
+    </p:spTree>
+  </p:cSld>
+  <p:clrMapOvr>
+    <a:masterClrMapping/>
+  </p:clrMapOvr>
+</p:sld>
+</file>
+
+<file path=ppt/slides/slide19.xml><?xml version="1.0" encoding="utf-8"?>
+<p:sld xmlns:a="http://schemas.openxmlformats.org/drawingml/2006/main" xmlns:p="http://schemas.openxmlformats.org/presentationml/2006/main" xmlns:r="http://schemas.openxmlformats.org/officeDocument/2006/relationships">
+  <p:cSld>
+    <p:bg>
+      <p:bgPr>
+        <a:solidFill>
+          <a:srgbClr val="FFFFFF"/>
+        </a:solidFill>
+        <a:effectLst/>
+      </p:bgPr>
+    </p:bg>
+    <p:spTree>
+      <p:nvGrpSpPr>
+        <p:cNvPr id="1" name=""/>
+        <p:cNvGrpSpPr/>
+        <p:nvPr/>
+      </p:nvGrpSpPr>
+      <p:grpSpPr/>
+      <p:sp>
+        <p:nvSpPr>
+          <p:cNvPr id="2" name="Rectangle 1"/>
+          <p:cNvSpPr/>
+          <p:nvPr/>
+        </p:nvSpPr>
+        <p:spPr>
+          <a:xfrm>
+            <a:off x="0" y="0"/>
+            <a:ext cx="12191695" cy="960120"/>
+          </a:xfrm>
+          <a:prstGeom prst="rect">
+            <a:avLst/>
+          </a:prstGeom>
+          <a:solidFill>
+            <a:srgbClr val="1A237E"/>
+          </a:solidFill>
+          <a:ln>
+            <a:noFill/>
+          </a:ln>
+        </p:spPr>
+        <p:style>
+          <a:lnRef idx="1">
+            <a:schemeClr val="accent1"/>
+          </a:lnRef>
+          <a:fillRef idx="3">
+            <a:schemeClr val="accent1"/>
+          </a:fillRef>
+          <a:effectRef idx="2">
+            <a:schemeClr val="accent1"/>
+          </a:effectRef>
+          <a:fontRef idx="minor">
+            <a:schemeClr val="lt1"/>
+          </a:fontRef>
+        </p:style>
+        <p:txBody>
+          <a:bodyPr rtlCol="0" anchor="ctr"/>
+          <a:lstStyle/>
+          <a:p>
+            <a:pPr algn="ctr"/>
+          </a:p>
+        </p:txBody>
+      </p:sp>
+      <p:sp>
+        <p:nvSpPr>
+          <p:cNvPr id="3" name="TextBox 2"/>
+          <p:cNvSpPr txBox="1"/>
+          <p:nvPr/>
+        </p:nvSpPr>
+        <p:spPr>
+          <a:xfrm>
+            <a:off x="457200" y="164592"/>
+            <a:ext cx="11247120" cy="685800"/>
+          </a:xfrm>
+          <a:prstGeom prst="rect">
+            <a:avLst/>
+          </a:prstGeom>
+          <a:noFill/>
+        </p:spPr>
+        <p:txBody>
+          <a:bodyPr wrap="square">
+            <a:spAutoFit/>
+          </a:bodyPr>
+          <a:lstStyle/>
+          <a:p>
+            <a:r>
+              <a:rPr sz="2300" b="1">
+                <a:solidFill>
+                  <a:srgbClr val="FFFFFF"/>
+                </a:solidFill>
+              </a:rPr>
+              <a:t>Grafik 13 — Değer Fonksiyonu Kalitesi (explained_variance)</a:t>
+            </a:r>
+          </a:p>
+        </p:txBody>
+      </p:sp>
+      <p:pic>
+        <p:nvPicPr>
+          <p:cNvPr id="4" name="Picture 3" descr="13_explained_variance.png"/>
+          <p:cNvPicPr>
+            <a:picLocks noChangeAspect="1"/>
+          </p:cNvPicPr>
+          <p:nvPr/>
+        </p:nvPicPr>
+        <p:blipFill>
+          <a:blip r:embed="rId2"/>
+          <a:stretch>
+            <a:fillRect/>
+          </a:stretch>
+        </p:blipFill>
+        <p:spPr>
+          <a:xfrm>
+            <a:off x="320040" y="1143000"/>
+            <a:ext cx="8486010" cy="5029200"/>
+          </a:xfrm>
+          <a:prstGeom prst="rect">
+            <a:avLst/>
+          </a:prstGeom>
+        </p:spPr>
+      </p:pic>
+      <p:sp>
+        <p:nvSpPr>
+          <p:cNvPr id="5" name="TextBox 4"/>
+          <p:cNvSpPr txBox="1"/>
+          <p:nvPr/>
+        </p:nvSpPr>
+        <p:spPr>
+          <a:xfrm>
+            <a:off x="7955279" y="1188720"/>
+            <a:ext cx="4023360" cy="5212080"/>
+          </a:xfrm>
+          <a:prstGeom prst="rect">
+            <a:avLst/>
+          </a:prstGeom>
+          <a:noFill/>
+        </p:spPr>
+        <p:txBody>
+          <a:bodyPr wrap="square">
+            <a:spAutoFit/>
+          </a:bodyPr>
+          <a:lstStyle/>
+          <a:p>
+            <a:r>
+              <a:rPr sz="1600" b="1">
+                <a:solidFill>
+                  <a:srgbClr val="1565C0"/>
+                </a:solidFill>
+              </a:rPr>
+              <a:t>Yorum</a:t>
+            </a:r>
+          </a:p>
+          <a:p>
+            <a:pPr>
+              <a:spcAft>
+                <a:spcPts val="500"/>
+              </a:spcAft>
+            </a:pPr>
+            <a:r>
+              <a:rPr sz="1250">
+                <a:solidFill>
+                  <a:srgbClr val="373737"/>
+                </a:solidFill>
+              </a:rPr>
+              <a:t>Gözlem: Açıklanan varyans eğitim boyunca yükselip 1'e (ideal) yaklaşır.</a:t>
+            </a:r>
+          </a:p>
+          <a:p>
+            <a:pPr>
+              <a:spcAft>
+                <a:spcPts val="500"/>
+              </a:spcAft>
+            </a:pPr>
+            <a:r>
+              <a:rPr sz="1250">
+                <a:solidFill>
+                  <a:srgbClr val="373737"/>
+                </a:solidFill>
+              </a:rPr>
+              <a:t>Karşılaştırma: 5 tohumda da kritik getirinin varyansını büyük ölçüde açıklar hale gelir.</a:t>
+            </a:r>
+          </a:p>
+          <a:p>
+            <a:pPr>
+              <a:spcAft>
+                <a:spcPts val="500"/>
+              </a:spcAft>
+            </a:pPr>
+            <a:r>
+              <a:rPr sz="1250">
+                <a:solidFill>
+                  <a:srgbClr val="373737"/>
+                </a:solidFill>
+              </a:rPr>
+              <a:t>Açıklama: Kritik durum değerlerini giderek isabetli tahmin eder; GAE avantajları güvenilirleşir.</a:t>
+            </a:r>
+          </a:p>
+          <a:p>
+            <a:pPr>
+              <a:spcAft>
+                <a:spcPts val="500"/>
+              </a:spcAft>
+            </a:pPr>
+            <a:r>
+              <a:rPr sz="1250">
+                <a:solidFill>
+                  <a:srgbClr val="373737"/>
+                </a:solidFill>
+              </a:rPr>
+              <a:t>Sonuç: Yüksek açıklanan varyans, politika gradyanının düşük-varyanslı ve sağlıklı olduğunun kanıtıdır.</a:t>
+            </a:r>
+          </a:p>
+        </p:txBody>
+      </p:sp>
+    </p:spTree>
+  </p:cSld>
+  <p:clrMapOvr>
+    <a:masterClrMapping/>
+  </p:clrMapOvr>
+</p:sld>
+</file>
+
+<file path=ppt/slides/slide2.xml><?xml version="1.0" encoding="utf-8"?>
+<p:sld xmlns:a="http://schemas.openxmlformats.org/drawingml/2006/main" xmlns:p="http://schemas.openxmlformats.org/presentationml/2006/main" xmlns:r="http://schemas.openxmlformats.org/officeDocument/2006/relationships">
+  <p:cSld>
+    <p:bg>
+      <p:bgPr>
+        <a:solidFill>
+          <a:srgbClr val="FFFFFF"/>
+        </a:solidFill>
+        <a:effectLst/>
+      </p:bgPr>
+    </p:bg>
+    <p:spTree>
+      <p:nvGrpSpPr>
+        <p:cNvPr id="1" name=""/>
+        <p:cNvGrpSpPr/>
+        <p:nvPr/>
+      </p:nvGrpSpPr>
+      <p:grpSpPr/>
+      <p:sp>
+        <p:nvSpPr>
+          <p:cNvPr id="2" name="Rectangle 1"/>
+          <p:cNvSpPr/>
+          <p:nvPr/>
+        </p:nvSpPr>
+        <p:spPr>
+          <a:xfrm>
+            <a:off x="0" y="0"/>
+            <a:ext cx="12191695" cy="960120"/>
+          </a:xfrm>
+          <a:prstGeom prst="rect">
+            <a:avLst/>
+          </a:prstGeom>
+          <a:solidFill>
+            <a:srgbClr val="1A237E"/>
+          </a:solidFill>
+          <a:ln>
+            <a:noFill/>
+          </a:ln>
+        </p:spPr>
+        <p:style>
+          <a:lnRef idx="1">
+            <a:schemeClr val="accent1"/>
+          </a:lnRef>
+          <a:fillRef idx="3">
+            <a:schemeClr val="accent1"/>
+          </a:fillRef>
+          <a:effectRef idx="2">
+            <a:schemeClr val="accent1"/>
+          </a:effectRef>
+          <a:fontRef idx="minor">
+            <a:schemeClr val="lt1"/>
+          </a:fontRef>
+        </p:style>
+        <p:txBody>
+          <a:bodyPr rtlCol="0" anchor="ctr"/>
+          <a:lstStyle/>
+          <a:p>
+            <a:pPr algn="ctr"/>
+          </a:p>
+        </p:txBody>
+      </p:sp>
+      <p:sp>
+        <p:nvSpPr>
+          <p:cNvPr id="3" name="TextBox 2"/>
+          <p:cNvSpPr txBox="1"/>
+          <p:nvPr/>
+        </p:nvSpPr>
+        <p:spPr>
+          <a:xfrm>
+            <a:off x="457200" y="164592"/>
+            <a:ext cx="11247120" cy="685800"/>
+          </a:xfrm>
+          <a:prstGeom prst="rect">
+            <a:avLst/>
+          </a:prstGeom>
+          <a:noFill/>
+        </p:spPr>
+        <p:txBody>
+          <a:bodyPr wrap="square">
+            <a:spAutoFit/>
+          </a:bodyPr>
+          <a:lstStyle/>
+          <a:p>
+            <a:r>
+              <a:rPr sz="2800" b="1">
+                <a:solidFill>
+                  <a:srgbClr val="FFFFFF"/>
+                </a:solidFill>
+              </a:rPr>
+              <a:t>İçerik</a:t>
+            </a:r>
+          </a:p>
+        </p:txBody>
+      </p:sp>
+      <p:sp>
+        <p:nvSpPr>
+          <p:cNvPr id="4" name="TextBox 3"/>
+          <p:cNvSpPr txBox="1"/>
+          <p:nvPr/>
+        </p:nvSpPr>
+        <p:spPr>
+          <a:xfrm>
+            <a:off x="640080" y="1234440"/>
+            <a:ext cx="10972800" cy="5212080"/>
+          </a:xfrm>
+          <a:prstGeom prst="rect">
+            <a:avLst/>
+          </a:prstGeom>
+          <a:noFill/>
+        </p:spPr>
+        <p:txBody>
+          <a:bodyPr wrap="square">
+            <a:spAutoFit/>
+          </a:bodyPr>
+          <a:lstStyle/>
+          <a:p>
+            <a:pPr>
+              <a:spcAft>
+                <a:spcPts val="700"/>
+              </a:spcAft>
+            </a:pPr>
+            <a:r>
+              <a:rPr sz="1900">
+                <a:solidFill>
+                  <a:srgbClr val="373737"/>
+                </a:solidFill>
+              </a:rPr>
+              <a:t>Problem ve Neden Pekiştirmeli Öğrenme?</a:t>
+            </a:r>
+          </a:p>
+          <a:p>
+            <a:pPr>
+              <a:spcAft>
+                <a:spcPts val="700"/>
+              </a:spcAft>
+            </a:pPr>
+            <a:r>
+              <a:rPr sz="1900">
+                <a:solidFill>
+                  <a:srgbClr val="373737"/>
+                </a:solidFill>
+              </a:rPr>
+              <a:t>Ortam ve MDP (durum / eylem / ödül) — SAC ile birebir aynı</a:t>
+            </a:r>
+          </a:p>
+          <a:p>
+            <a:pPr>
+              <a:spcAft>
+                <a:spcPts val="700"/>
+              </a:spcAft>
+            </a:pPr>
+            <a:r>
+              <a:rPr sz="1900">
+                <a:solidFill>
+                  <a:srgbClr val="373737"/>
+                </a:solidFill>
+              </a:rPr>
+              <a:t>PPO Algoritması ve Hiperparametreler</a:t>
+            </a:r>
+          </a:p>
+          <a:p>
+            <a:pPr>
+              <a:spcAft>
+                <a:spcPts val="700"/>
+              </a:spcAft>
+            </a:pPr>
+            <a:r>
+              <a:rPr sz="1900">
+                <a:solidFill>
+                  <a:srgbClr val="373737"/>
+                </a:solidFill>
+              </a:rPr>
+              <a:t>Deney Düzeni (5 seed, deterministik eval, baseline)</a:t>
+            </a:r>
+          </a:p>
+          <a:p>
+            <a:pPr>
+              <a:spcAft>
+                <a:spcPts val="700"/>
+              </a:spcAft>
+            </a:pPr>
+            <a:r>
+              <a:rPr sz="1900">
+                <a:solidFill>
+                  <a:srgbClr val="373737"/>
+                </a:solidFill>
+              </a:rPr>
+              <a:t>5 Zorunlu Grafik + Ek Analizler (oda keşfi, çarpışma, iç dinamikler, heatmap)</a:t>
+            </a:r>
+          </a:p>
+          <a:p>
+            <a:pPr>
+              <a:spcAft>
+                <a:spcPts val="700"/>
+              </a:spcAft>
+            </a:pPr>
+            <a:r>
+              <a:rPr sz="1900">
+                <a:solidFill>
+                  <a:srgbClr val="373737"/>
+                </a:solidFill>
+              </a:rPr>
+              <a:t>Hiperparametre Taraması (clip/ent/gamma/lr/vf — yeniden eğitim)</a:t>
+            </a:r>
+          </a:p>
+          <a:p>
+            <a:pPr>
+              <a:spcAft>
+                <a:spcPts val="700"/>
+              </a:spcAft>
+            </a:pPr>
+            <a:r>
+              <a:rPr sz="1900">
+                <a:solidFill>
+                  <a:srgbClr val="373737"/>
+                </a:solidFill>
+              </a:rPr>
+              <a:t>Per-seed Detay Panelleri</a:t>
+            </a:r>
+          </a:p>
+          <a:p>
+            <a:pPr>
+              <a:spcAft>
+                <a:spcPts val="700"/>
+              </a:spcAft>
+            </a:pPr>
+            <a:r>
+              <a:rPr sz="1900">
+                <a:solidFill>
+                  <a:srgbClr val="373737"/>
+                </a:solidFill>
+              </a:rPr>
+              <a:t>PPO vs SAC Karşılaştırması (aynı ortam/seed/protokol)</a:t>
+            </a:r>
+          </a:p>
+          <a:p>
+            <a:pPr>
+              <a:spcAft>
+                <a:spcPts val="700"/>
+              </a:spcAft>
+            </a:pPr>
+            <a:r>
+              <a:rPr sz="1900">
+                <a:solidFill>
+                  <a:srgbClr val="373737"/>
+                </a:solidFill>
+              </a:rPr>
+              <a:t>Savunma Özeti ve Sonuç</a:t>
+            </a:r>
+          </a:p>
+        </p:txBody>
+      </p:sp>
+    </p:spTree>
+  </p:cSld>
+  <p:clrMapOvr>
+    <a:masterClrMapping/>
+  </p:clrMapOvr>
+</p:sld>
+</file>
+
+<file path=ppt/slides/slide20.xml><?xml version="1.0" encoding="utf-8"?>
+<p:sld xmlns:a="http://schemas.openxmlformats.org/drawingml/2006/main" xmlns:p="http://schemas.openxmlformats.org/presentationml/2006/main" xmlns:r="http://schemas.openxmlformats.org/officeDocument/2006/relationships">
+  <p:cSld>
+    <p:bg>
+      <p:bgPr>
+        <a:solidFill>
+          <a:srgbClr val="FFFFFF"/>
+        </a:solidFill>
+        <a:effectLst/>
+      </p:bgPr>
+    </p:bg>
+    <p:spTree>
+      <p:nvGrpSpPr>
+        <p:cNvPr id="1" name=""/>
+        <p:cNvGrpSpPr/>
+        <p:nvPr/>
+      </p:nvGrpSpPr>
+      <p:grpSpPr/>
+      <p:sp>
+        <p:nvSpPr>
+          <p:cNvPr id="2" name="Rectangle 1"/>
+          <p:cNvSpPr/>
+          <p:nvPr/>
+        </p:nvSpPr>
+        <p:spPr>
+          <a:xfrm>
+            <a:off x="0" y="0"/>
+            <a:ext cx="12191695" cy="960120"/>
+          </a:xfrm>
+          <a:prstGeom prst="rect">
+            <a:avLst/>
+          </a:prstGeom>
+          <a:solidFill>
+            <a:srgbClr val="1A237E"/>
+          </a:solidFill>
+          <a:ln>
+            <a:noFill/>
+          </a:ln>
+        </p:spPr>
+        <p:style>
+          <a:lnRef idx="1">
+            <a:schemeClr val="accent1"/>
+          </a:lnRef>
+          <a:fillRef idx="3">
+            <a:schemeClr val="accent1"/>
+          </a:fillRef>
+          <a:effectRef idx="2">
+            <a:schemeClr val="accent1"/>
+          </a:effectRef>
+          <a:fontRef idx="minor">
+            <a:schemeClr val="lt1"/>
+          </a:fontRef>
+        </p:style>
+        <p:txBody>
+          <a:bodyPr rtlCol="0" anchor="ctr"/>
+          <a:lstStyle/>
+          <a:p>
+            <a:pPr algn="ctr"/>
+          </a:p>
+        </p:txBody>
+      </p:sp>
+      <p:sp>
+        <p:nvSpPr>
+          <p:cNvPr id="3" name="TextBox 2"/>
+          <p:cNvSpPr txBox="1"/>
+          <p:nvPr/>
+        </p:nvSpPr>
+        <p:spPr>
+          <a:xfrm>
+            <a:off x="457200" y="164592"/>
+            <a:ext cx="11247120" cy="685800"/>
+          </a:xfrm>
+          <a:prstGeom prst="rect">
+            <a:avLst/>
+          </a:prstGeom>
+          <a:noFill/>
+        </p:spPr>
+        <p:txBody>
+          <a:bodyPr wrap="square">
+            <a:spAutoFit/>
+          </a:bodyPr>
+          <a:lstStyle/>
+          <a:p>
+            <a:r>
+              <a:rPr sz="2200" b="1">
+                <a:solidFill>
+                  <a:srgbClr val="FFFFFF"/>
+                </a:solidFill>
+              </a:rPr>
+              <a:t>Tohum 123 — Detaylı Panel (getiri / eval / kapsama / oda)</a:t>
+            </a:r>
+          </a:p>
+        </p:txBody>
+      </p:sp>
+      <p:pic>
+        <p:nvPicPr>
+          <p:cNvPr id="4" name="Picture 3" descr="per_seed_123.png"/>
+          <p:cNvPicPr>
+            <a:picLocks noChangeAspect="1"/>
+          </p:cNvPicPr>
+          <p:nvPr/>
+        </p:nvPicPr>
+        <p:blipFill>
+          <a:blip r:embed="rId2"/>
+          <a:stretch>
+            <a:fillRect/>
+          </a:stretch>
+        </p:blipFill>
+        <p:spPr>
+          <a:xfrm>
+            <a:off x="1463040" y="1188720"/>
+            <a:ext cx="9235440" cy="5305364"/>
+          </a:xfrm>
+          <a:prstGeom prst="rect">
+            <a:avLst/>
+          </a:prstGeom>
+        </p:spPr>
+      </p:pic>
+    </p:spTree>
+  </p:cSld>
+  <p:clrMapOvr>
+    <a:masterClrMapping/>
+  </p:clrMapOvr>
+</p:sld>
+</file>
+
+<file path=ppt/slides/slide21.xml><?xml version="1.0" encoding="utf-8"?>
+<p:sld xmlns:a="http://schemas.openxmlformats.org/drawingml/2006/main" xmlns:p="http://schemas.openxmlformats.org/presentationml/2006/main" xmlns:r="http://schemas.openxmlformats.org/officeDocument/2006/relationships">
+  <p:cSld>
+    <p:bg>
+      <p:bgPr>
+        <a:solidFill>
+          <a:srgbClr val="FFFFFF"/>
+        </a:solidFill>
+        <a:effectLst/>
+      </p:bgPr>
+    </p:bg>
+    <p:spTree>
+      <p:nvGrpSpPr>
+        <p:cNvPr id="1" name=""/>
+        <p:cNvGrpSpPr/>
+        <p:nvPr/>
+      </p:nvGrpSpPr>
+      <p:grpSpPr/>
+      <p:sp>
+        <p:nvSpPr>
+          <p:cNvPr id="2" name="Rectangle 1"/>
+          <p:cNvSpPr/>
+          <p:nvPr/>
+        </p:nvSpPr>
+        <p:spPr>
+          <a:xfrm>
+            <a:off x="0" y="0"/>
+            <a:ext cx="12191695" cy="960120"/>
+          </a:xfrm>
+          <a:prstGeom prst="rect">
+            <a:avLst/>
+          </a:prstGeom>
+          <a:solidFill>
+            <a:srgbClr val="1A237E"/>
+          </a:solidFill>
+          <a:ln>
+            <a:noFill/>
+          </a:ln>
+        </p:spPr>
+        <p:style>
+          <a:lnRef idx="1">
+            <a:schemeClr val="accent1"/>
+          </a:lnRef>
+          <a:fillRef idx="3">
+            <a:schemeClr val="accent1"/>
+          </a:fillRef>
+          <a:effectRef idx="2">
+            <a:schemeClr val="accent1"/>
+          </a:effectRef>
+          <a:fontRef idx="minor">
+            <a:schemeClr val="lt1"/>
+          </a:fontRef>
+        </p:style>
+        <p:txBody>
+          <a:bodyPr rtlCol="0" anchor="ctr"/>
+          <a:lstStyle/>
+          <a:p>
+            <a:pPr algn="ctr"/>
+          </a:p>
+        </p:txBody>
+      </p:sp>
+      <p:sp>
+        <p:nvSpPr>
+          <p:cNvPr id="3" name="TextBox 2"/>
+          <p:cNvSpPr txBox="1"/>
+          <p:nvPr/>
+        </p:nvSpPr>
+        <p:spPr>
+          <a:xfrm>
+            <a:off x="457200" y="164592"/>
+            <a:ext cx="11247120" cy="685800"/>
+          </a:xfrm>
+          <a:prstGeom prst="rect">
+            <a:avLst/>
+          </a:prstGeom>
+          <a:noFill/>
+        </p:spPr>
+        <p:txBody>
+          <a:bodyPr wrap="square">
+            <a:spAutoFit/>
+          </a:bodyPr>
+          <a:lstStyle/>
+          <a:p>
+            <a:r>
+              <a:rPr sz="2200" b="1">
+                <a:solidFill>
+                  <a:srgbClr val="FFFFFF"/>
+                </a:solidFill>
+              </a:rPr>
+              <a:t>Tohum 42 — Detaylı Panel (getiri / eval / kapsama / oda)</a:t>
+            </a:r>
+          </a:p>
+        </p:txBody>
+      </p:sp>
+      <p:pic>
+        <p:nvPicPr>
+          <p:cNvPr id="4" name="Picture 3" descr="per_seed_42.png"/>
+          <p:cNvPicPr>
+            <a:picLocks noChangeAspect="1"/>
+          </p:cNvPicPr>
+          <p:nvPr/>
+        </p:nvPicPr>
+        <p:blipFill>
+          <a:blip r:embed="rId2"/>
+          <a:stretch>
+            <a:fillRect/>
+          </a:stretch>
+        </p:blipFill>
+        <p:spPr>
+          <a:xfrm>
+            <a:off x="1463040" y="1188720"/>
+            <a:ext cx="9235440" cy="5305364"/>
+          </a:xfrm>
+          <a:prstGeom prst="rect">
+            <a:avLst/>
+          </a:prstGeom>
+        </p:spPr>
+      </p:pic>
+    </p:spTree>
+  </p:cSld>
+  <p:clrMapOvr>
+    <a:masterClrMapping/>
+  </p:clrMapOvr>
+</p:sld>
+</file>
+
+<file path=ppt/slides/slide22.xml><?xml version="1.0" encoding="utf-8"?>
+<p:sld xmlns:a="http://schemas.openxmlformats.org/drawingml/2006/main" xmlns:p="http://schemas.openxmlformats.org/presentationml/2006/main" xmlns:r="http://schemas.openxmlformats.org/officeDocument/2006/relationships">
+  <p:cSld>
+    <p:bg>
+      <p:bgPr>
+        <a:solidFill>
+          <a:srgbClr val="FFFFFF"/>
+        </a:solidFill>
+        <a:effectLst/>
+      </p:bgPr>
+    </p:bg>
+    <p:spTree>
+      <p:nvGrpSpPr>
+        <p:cNvPr id="1" name=""/>
+        <p:cNvGrpSpPr/>
+        <p:nvPr/>
+      </p:nvGrpSpPr>
+      <p:grpSpPr/>
+      <p:sp>
+        <p:nvSpPr>
+          <p:cNvPr id="2" name="Rectangle 1"/>
+          <p:cNvSpPr/>
+          <p:nvPr/>
+        </p:nvSpPr>
+        <p:spPr>
+          <a:xfrm>
+            <a:off x="0" y="0"/>
+            <a:ext cx="12191695" cy="960120"/>
+          </a:xfrm>
+          <a:prstGeom prst="rect">
+            <a:avLst/>
+          </a:prstGeom>
+          <a:solidFill>
+            <a:srgbClr val="1A237E"/>
+          </a:solidFill>
+          <a:ln>
+            <a:noFill/>
+          </a:ln>
+        </p:spPr>
+        <p:style>
+          <a:lnRef idx="1">
+            <a:schemeClr val="accent1"/>
+          </a:lnRef>
+          <a:fillRef idx="3">
+            <a:schemeClr val="accent1"/>
+          </a:fillRef>
+          <a:effectRef idx="2">
+            <a:schemeClr val="accent1"/>
+          </a:effectRef>
+          <a:fontRef idx="minor">
+            <a:schemeClr val="lt1"/>
+          </a:fontRef>
+        </p:style>
+        <p:txBody>
+          <a:bodyPr rtlCol="0" anchor="ctr"/>
+          <a:lstStyle/>
+          <a:p>
+            <a:pPr algn="ctr"/>
+          </a:p>
+        </p:txBody>
+      </p:sp>
+      <p:sp>
+        <p:nvSpPr>
+          <p:cNvPr id="3" name="TextBox 2"/>
+          <p:cNvSpPr txBox="1"/>
+          <p:nvPr/>
+        </p:nvSpPr>
+        <p:spPr>
+          <a:xfrm>
+            <a:off x="457200" y="164592"/>
+            <a:ext cx="11247120" cy="685800"/>
+          </a:xfrm>
+          <a:prstGeom prst="rect">
+            <a:avLst/>
+          </a:prstGeom>
+          <a:noFill/>
+        </p:spPr>
+        <p:txBody>
+          <a:bodyPr wrap="square">
+            <a:spAutoFit/>
+          </a:bodyPr>
+          <a:lstStyle/>
+          <a:p>
+            <a:r>
+              <a:rPr sz="2200" b="1">
+                <a:solidFill>
+                  <a:srgbClr val="FFFFFF"/>
+                </a:solidFill>
+              </a:rPr>
+              <a:t>Tohum 7 — Detaylı Panel (getiri / eval / kapsama / oda)</a:t>
+            </a:r>
+          </a:p>
+        </p:txBody>
+      </p:sp>
+      <p:pic>
+        <p:nvPicPr>
+          <p:cNvPr id="4" name="Picture 3" descr="per_seed_7.png"/>
+          <p:cNvPicPr>
+            <a:picLocks noChangeAspect="1"/>
+          </p:cNvPicPr>
+          <p:nvPr/>
+        </p:nvPicPr>
+        <p:blipFill>
+          <a:blip r:embed="rId2"/>
+          <a:stretch>
+            <a:fillRect/>
+          </a:stretch>
+        </p:blipFill>
+        <p:spPr>
+          <a:xfrm>
+            <a:off x="1463040" y="1188720"/>
+            <a:ext cx="9235440" cy="5305364"/>
+          </a:xfrm>
+          <a:prstGeom prst="rect">
+            <a:avLst/>
+          </a:prstGeom>
+        </p:spPr>
+      </p:pic>
+    </p:spTree>
+  </p:cSld>
+  <p:clrMapOvr>
+    <a:masterClrMapping/>
+  </p:clrMapOvr>
+</p:sld>
+</file>
+
+<file path=ppt/slides/slide23.xml><?xml version="1.0" encoding="utf-8"?>
+<p:sld xmlns:a="http://schemas.openxmlformats.org/drawingml/2006/main" xmlns:p="http://schemas.openxmlformats.org/presentationml/2006/main" xmlns:r="http://schemas.openxmlformats.org/officeDocument/2006/relationships">
+  <p:cSld>
+    <p:bg>
+      <p:bgPr>
+        <a:solidFill>
+          <a:srgbClr val="FFFFFF"/>
+        </a:solidFill>
+        <a:effectLst/>
+      </p:bgPr>
+    </p:bg>
+    <p:spTree>
+      <p:nvGrpSpPr>
+        <p:cNvPr id="1" name=""/>
+        <p:cNvGrpSpPr/>
+        <p:nvPr/>
+      </p:nvGrpSpPr>
+      <p:grpSpPr/>
+      <p:sp>
+        <p:nvSpPr>
+          <p:cNvPr id="2" name="Rectangle 1"/>
+          <p:cNvSpPr/>
+          <p:nvPr/>
+        </p:nvSpPr>
+        <p:spPr>
+          <a:xfrm>
+            <a:off x="0" y="0"/>
+            <a:ext cx="12191695" cy="960120"/>
+          </a:xfrm>
+          <a:prstGeom prst="rect">
+            <a:avLst/>
+          </a:prstGeom>
+          <a:solidFill>
+            <a:srgbClr val="1A237E"/>
+          </a:solidFill>
+          <a:ln>
+            <a:noFill/>
+          </a:ln>
+        </p:spPr>
+        <p:style>
+          <a:lnRef idx="1">
+            <a:schemeClr val="accent1"/>
+          </a:lnRef>
+          <a:fillRef idx="3">
+            <a:schemeClr val="accent1"/>
+          </a:fillRef>
+          <a:effectRef idx="2">
+            <a:schemeClr val="accent1"/>
+          </a:effectRef>
+          <a:fontRef idx="minor">
+            <a:schemeClr val="lt1"/>
+          </a:fontRef>
+        </p:style>
+        <p:txBody>
+          <a:bodyPr rtlCol="0" anchor="ctr"/>
+          <a:lstStyle/>
+          <a:p>
+            <a:pPr algn="ctr"/>
+          </a:p>
+        </p:txBody>
+      </p:sp>
+      <p:sp>
+        <p:nvSpPr>
+          <p:cNvPr id="3" name="TextBox 2"/>
+          <p:cNvSpPr txBox="1"/>
+          <p:nvPr/>
+        </p:nvSpPr>
+        <p:spPr>
+          <a:xfrm>
+            <a:off x="457200" y="164592"/>
+            <a:ext cx="11247120" cy="685800"/>
+          </a:xfrm>
+          <a:prstGeom prst="rect">
+            <a:avLst/>
+          </a:prstGeom>
+          <a:noFill/>
+        </p:spPr>
+        <p:txBody>
+          <a:bodyPr wrap="square">
+            <a:spAutoFit/>
+          </a:bodyPr>
+          <a:lstStyle/>
+          <a:p>
+            <a:r>
+              <a:rPr sz="2200" b="1">
+                <a:solidFill>
+                  <a:srgbClr val="FFFFFF"/>
+                </a:solidFill>
+              </a:rPr>
+              <a:t>Tohum 13 — Detaylı Panel (getiri / eval / kapsama / oda)</a:t>
+            </a:r>
+          </a:p>
+        </p:txBody>
+      </p:sp>
+      <p:pic>
+        <p:nvPicPr>
+          <p:cNvPr id="4" name="Picture 3" descr="per_seed_13.png"/>
+          <p:cNvPicPr>
+            <a:picLocks noChangeAspect="1"/>
+          </p:cNvPicPr>
+          <p:nvPr/>
+        </p:nvPicPr>
+        <p:blipFill>
+          <a:blip r:embed="rId2"/>
+          <a:stretch>
+            <a:fillRect/>
+          </a:stretch>
+        </p:blipFill>
+        <p:spPr>
+          <a:xfrm>
+            <a:off x="1463040" y="1188720"/>
+            <a:ext cx="9235440" cy="5305364"/>
+          </a:xfrm>
+          <a:prstGeom prst="rect">
+            <a:avLst/>
+          </a:prstGeom>
+        </p:spPr>
+      </p:pic>
+    </p:spTree>
+  </p:cSld>
+  <p:clrMapOvr>
+    <a:masterClrMapping/>
+  </p:clrMapOvr>
+</p:sld>
+</file>
+
+<file path=ppt/slides/slide24.xml><?xml version="1.0" encoding="utf-8"?>
+<p:sld xmlns:a="http://schemas.openxmlformats.org/drawingml/2006/main" xmlns:p="http://schemas.openxmlformats.org/presentationml/2006/main" xmlns:r="http://schemas.openxmlformats.org/officeDocument/2006/relationships">
+  <p:cSld>
+    <p:bg>
+      <p:bgPr>
+        <a:solidFill>
+          <a:srgbClr val="FFFFFF"/>
+        </a:solidFill>
+        <a:effectLst/>
+      </p:bgPr>
+    </p:bg>
+    <p:spTree>
+      <p:nvGrpSpPr>
+        <p:cNvPr id="1" name=""/>
+        <p:cNvGrpSpPr/>
+        <p:nvPr/>
+      </p:nvGrpSpPr>
+      <p:grpSpPr/>
+      <p:sp>
+        <p:nvSpPr>
+          <p:cNvPr id="2" name="Rectangle 1"/>
+          <p:cNvSpPr/>
+          <p:nvPr/>
+        </p:nvSpPr>
+        <p:spPr>
+          <a:xfrm>
+            <a:off x="0" y="0"/>
+            <a:ext cx="12191695" cy="960120"/>
+          </a:xfrm>
+          <a:prstGeom prst="rect">
+            <a:avLst/>
+          </a:prstGeom>
+          <a:solidFill>
+            <a:srgbClr val="1A237E"/>
+          </a:solidFill>
+          <a:ln>
+            <a:noFill/>
+          </a:ln>
+        </p:spPr>
+        <p:style>
+          <a:lnRef idx="1">
+            <a:schemeClr val="accent1"/>
+          </a:lnRef>
+          <a:fillRef idx="3">
+            <a:schemeClr val="accent1"/>
+          </a:fillRef>
+          <a:effectRef idx="2">
+            <a:schemeClr val="accent1"/>
+          </a:effectRef>
+          <a:fontRef idx="minor">
+            <a:schemeClr val="lt1"/>
+          </a:fontRef>
+        </p:style>
+        <p:txBody>
+          <a:bodyPr rtlCol="0" anchor="ctr"/>
+          <a:lstStyle/>
+          <a:p>
+            <a:pPr algn="ctr"/>
+          </a:p>
+        </p:txBody>
+      </p:sp>
+      <p:sp>
+        <p:nvSpPr>
+          <p:cNvPr id="3" name="TextBox 2"/>
+          <p:cNvSpPr txBox="1"/>
+          <p:nvPr/>
+        </p:nvSpPr>
+        <p:spPr>
+          <a:xfrm>
+            <a:off x="457200" y="164592"/>
+            <a:ext cx="11247120" cy="685800"/>
+          </a:xfrm>
+          <a:prstGeom prst="rect">
+            <a:avLst/>
+          </a:prstGeom>
+          <a:noFill/>
+        </p:spPr>
+        <p:txBody>
+          <a:bodyPr wrap="square">
+            <a:spAutoFit/>
+          </a:bodyPr>
+          <a:lstStyle/>
+          <a:p>
+            <a:r>
+              <a:rPr sz="2200" b="1">
+                <a:solidFill>
+                  <a:srgbClr val="FFFFFF"/>
+                </a:solidFill>
+              </a:rPr>
+              <a:t>Tohum 2025 — Detaylı Panel (getiri / eval / kapsama / oda)</a:t>
+            </a:r>
+          </a:p>
+        </p:txBody>
+      </p:sp>
+      <p:pic>
+        <p:nvPicPr>
+          <p:cNvPr id="4" name="Picture 3" descr="per_seed_2025.png"/>
+          <p:cNvPicPr>
+            <a:picLocks noChangeAspect="1"/>
+          </p:cNvPicPr>
+          <p:nvPr/>
+        </p:nvPicPr>
+        <p:blipFill>
+          <a:blip r:embed="rId2"/>
+          <a:stretch>
+            <a:fillRect/>
+          </a:stretch>
+        </p:blipFill>
+        <p:spPr>
+          <a:xfrm>
+            <a:off x="1463040" y="1188720"/>
+            <a:ext cx="9235440" cy="5305364"/>
+          </a:xfrm>
+          <a:prstGeom prst="rect">
+            <a:avLst/>
+          </a:prstGeom>
+        </p:spPr>
+      </p:pic>
+    </p:spTree>
+  </p:cSld>
+  <p:clrMapOvr>
+    <a:masterClrMapping/>
+  </p:clrMapOvr>
+</p:sld>
+</file>
+
+<file path=ppt/slides/slide25.xml><?xml version="1.0" encoding="utf-8"?>
+<p:sld xmlns:a="http://schemas.openxmlformats.org/drawingml/2006/main" xmlns:p="http://schemas.openxmlformats.org/presentationml/2006/main" xmlns:r="http://schemas.openxmlformats.org/officeDocument/2006/relationships">
+  <p:cSld>
+    <p:bg>
+      <p:bgPr>
+        <a:solidFill>
+          <a:srgbClr val="FFFFFF"/>
+        </a:solidFill>
+        <a:effectLst/>
+      </p:bgPr>
+    </p:bg>
+    <p:spTree>
+      <p:nvGrpSpPr>
+        <p:cNvPr id="1" name=""/>
+        <p:cNvGrpSpPr/>
+        <p:nvPr/>
+      </p:nvGrpSpPr>
+      <p:grpSpPr/>
+      <p:sp>
+        <p:nvSpPr>
+          <p:cNvPr id="2" name="Rectangle 1"/>
+          <p:cNvSpPr/>
+          <p:nvPr/>
+        </p:nvSpPr>
+        <p:spPr>
+          <a:xfrm>
+            <a:off x="0" y="0"/>
+            <a:ext cx="12191695" cy="960120"/>
+          </a:xfrm>
+          <a:prstGeom prst="rect">
+            <a:avLst/>
+          </a:prstGeom>
+          <a:solidFill>
+            <a:srgbClr val="1A237E"/>
+          </a:solidFill>
+          <a:ln>
+            <a:noFill/>
+          </a:ln>
+        </p:spPr>
+        <p:style>
+          <a:lnRef idx="1">
+            <a:schemeClr val="accent1"/>
+          </a:lnRef>
+          <a:fillRef idx="3">
+            <a:schemeClr val="accent1"/>
+          </a:fillRef>
+          <a:effectRef idx="2">
+            <a:schemeClr val="accent1"/>
+          </a:effectRef>
+          <a:fontRef idx="minor">
+            <a:schemeClr val="lt1"/>
+          </a:fontRef>
+        </p:style>
+        <p:txBody>
+          <a:bodyPr rtlCol="0" anchor="ctr"/>
+          <a:lstStyle/>
+          <a:p>
+            <a:pPr algn="ctr"/>
+          </a:p>
+        </p:txBody>
+      </p:sp>
+      <p:sp>
+        <p:nvSpPr>
+          <p:cNvPr id="3" name="TextBox 2"/>
+          <p:cNvSpPr txBox="1"/>
+          <p:nvPr/>
+        </p:nvSpPr>
+        <p:spPr>
+          <a:xfrm>
+            <a:off x="457200" y="164592"/>
+            <a:ext cx="11247120" cy="685800"/>
+          </a:xfrm>
+          <a:prstGeom prst="rect">
+            <a:avLst/>
+          </a:prstGeom>
+          <a:noFill/>
+        </p:spPr>
+        <p:txBody>
+          <a:bodyPr wrap="square">
+            <a:spAutoFit/>
+          </a:bodyPr>
+          <a:lstStyle/>
+          <a:p>
+            <a:r>
+              <a:rPr sz="2800" b="1">
+                <a:solidFill>
+                  <a:srgbClr val="FFFFFF"/>
+                </a:solidFill>
+              </a:rPr>
+              <a:t>PPO vs SAC — Özet (aynı ortam/seed/protokol)</a:t>
             </a:r>
           </a:p>
         </p:txBody>
       </p:sp>
       <p:graphicFrame>
         <p:nvGraphicFramePr>
-          <p:cNvPr id="3" name="Table 2"/>
+          <p:cNvPr id="4" name="Table 3"/>
           <p:cNvGraphicFramePr>
             <a:graphicFrameLocks noGrp="1"/>
           </p:cNvGraphicFramePr>
           <p:nvPr/>
         </p:nvGraphicFramePr>
         <p:xfrm>
-          <a:off x="1097280" y="1371600"/>
-          <a:ext cx="9966960" cy="4206240"/>
+          <a:off x="1280160" y="1371600"/>
+          <a:ext cx="9601200" cy="3657600"/>
         </p:xfrm>
         <a:graphic>
           <a:graphicData uri="http://schemas.openxmlformats.org/drawingml/2006/table">
@@ -3574,11 +6171,11 @@
                 <a:tableStyleId>{5C22544A-7EE6-4342-B048-85BDC9FD1C3A}</a:tableStyleId>
               </a:tblPr>
               <a:tblGrid>
-                <a:gridCol w="4114800"/>
-                <a:gridCol w="2926080"/>
-                <a:gridCol w="2926080"/>
+                <a:gridCol w="3931920"/>
+                <a:gridCol w="2834640"/>
+                <a:gridCol w="2834640"/>
               </a:tblGrid>
-              <a:tr h="525780">
+              <a:tr h="522514">
                 <a:tc>
                   <a:txBody>
                     <a:bodyPr/>
@@ -3590,7 +6187,7 @@
                             <a:srgbClr val="FFFFFF"/>
                           </a:solidFill>
                         </a:rPr>
-                        <a:t>Olcut</a:t>
+                        <a:t>Ölçüt</a:t>
                       </a:r>
                     </a:p>
                   </a:txBody>
@@ -3611,7 +6208,7 @@
                             <a:srgbClr val="FFFFFF"/>
                           </a:solidFill>
                         </a:rPr>
-                        <a:t>PPO (bu calisma)</a:t>
+                        <a:t>PPO (bu çalışma)</a:t>
                       </a:r>
                     </a:p>
                   </a:txBody>
@@ -3632,7 +6229,7 @@
                             <a:srgbClr val="FFFFFF"/>
                           </a:solidFill>
                         </a:rPr>
-                        <a:t>SAC (algo/td3)</a:t>
+                        <a:t>SAC (aynı ortam)</a:t>
                       </a:r>
                     </a:p>
                   </a:txBody>
@@ -3643,7 +6240,7 @@
                   </a:tcPr>
                 </a:tc>
               </a:tr>
-              <a:tr h="525780">
+              <a:tr h="522514">
                 <a:tc>
                   <a:txBody>
                     <a:bodyPr/>
@@ -3696,7 +6293,7 @@
                   </a:tcPr>
                 </a:tc>
               </a:tr>
-              <a:tr h="525780">
+              <a:tr h="522514">
                 <a:tc>
                   <a:txBody>
                     <a:bodyPr/>
@@ -3749,60 +6346,7 @@
                   </a:tcPr>
                 </a:tc>
               </a:tr>
-              <a:tr h="525780">
-                <a:tc>
-                  <a:txBody>
-                    <a:bodyPr/>
-                    <a:lstStyle/>
-                    <a:p>
-                      <a:r>
-                        <a:rPr sz="1400" b="0"/>
-                        <a:t>Egitim adimi</a:t>
-                      </a:r>
-                    </a:p>
-                  </a:txBody>
-                  <a:tcPr>
-                    <a:solidFill>
-                      <a:srgbClr val="F2F4FB"/>
-                    </a:solidFill>
-                  </a:tcPr>
-                </a:tc>
-                <a:tc>
-                  <a:txBody>
-                    <a:bodyPr/>
-                    <a:lstStyle/>
-                    <a:p>
-                      <a:r>
-                        <a:rPr sz="1400" b="1"/>
-                        <a:t>1.5M</a:t>
-                      </a:r>
-                    </a:p>
-                  </a:txBody>
-                  <a:tcPr>
-                    <a:solidFill>
-                      <a:srgbClr val="F2F4FB"/>
-                    </a:solidFill>
-                  </a:tcPr>
-                </a:tc>
-                <a:tc>
-                  <a:txBody>
-                    <a:bodyPr/>
-                    <a:lstStyle/>
-                    <a:p>
-                      <a:r>
-                        <a:rPr sz="1400" b="0"/>
-                        <a:t>500k</a:t>
-                      </a:r>
-                    </a:p>
-                  </a:txBody>
-                  <a:tcPr>
-                    <a:solidFill>
-                      <a:srgbClr val="F2F4FB"/>
-                    </a:solidFill>
-                  </a:tcPr>
-                </a:tc>
-              </a:tr>
-              <a:tr h="525780">
+              <a:tr h="522514">
                 <a:tc>
                   <a:txBody>
                     <a:bodyPr/>
@@ -3844,7 +6388,7 @@
                     <a:p>
                       <a:r>
                         <a:rPr sz="1400" b="0"/>
-                        <a:t>321.0</a:t>
+                        <a:t>337.0</a:t>
                       </a:r>
                     </a:p>
                   </a:txBody>
@@ -3855,7 +6399,7 @@
                   </a:tcPr>
                 </a:tc>
               </a:tr>
-              <a:tr h="525780">
+              <a:tr h="522514">
                 <a:tc>
                   <a:txBody>
                     <a:bodyPr/>
@@ -3863,7 +6407,7 @@
                     <a:p>
                       <a:r>
                         <a:rPr sz="1400" b="0"/>
-                        <a:t>Basari orani (6 oda)</a:t>
+                        <a:t>Başarı oranı (6 oda)</a:t>
                       </a:r>
                     </a:p>
                   </a:txBody>
@@ -3897,7 +6441,7 @@
                     <a:p>
                       <a:r>
                         <a:rPr sz="1400" b="0"/>
-                        <a:t>0.27</a:t>
+                        <a:t>0.34</a:t>
                       </a:r>
                     </a:p>
                   </a:txBody>
@@ -3908,7 +6452,7 @@
                   </a:tcPr>
                 </a:tc>
               </a:tr>
-              <a:tr h="525780">
+              <a:tr h="522514">
                 <a:tc>
                   <a:txBody>
                     <a:bodyPr/>
@@ -3950,7 +6494,7 @@
                     <a:p>
                       <a:r>
                         <a:rPr sz="1400" b="0"/>
-                        <a:t>92.6</a:t>
+                        <a:t>92.8</a:t>
                       </a:r>
                     </a:p>
                   </a:txBody>
@@ -3961,7 +6505,7 @@
                   </a:tcPr>
                 </a:tc>
               </a:tr>
-              <a:tr h="525780">
+              <a:tr h="522516">
                 <a:tc>
                   <a:txBody>
                     <a:bodyPr/>
@@ -3969,7 +6513,7 @@
                     <a:p>
                       <a:r>
                         <a:rPr sz="1400" b="0"/>
-                        <a:t>Eval carpisma orani</a:t>
+                        <a:t>Eval çarpışma oranı</a:t>
                       </a:r>
                     </a:p>
                   </a:txBody>
@@ -4003,7 +6547,7 @@
                     <a:p>
                       <a:r>
                         <a:rPr sz="1400" b="0"/>
-                        <a:t>0.07</a:t>
+                        <a:t>0.15</a:t>
                       </a:r>
                     </a:p>
                   </a:txBody>
@@ -4020,14 +6564,14 @@
       </p:graphicFrame>
       <p:sp>
         <p:nvSpPr>
-          <p:cNvPr id="4" name="TextBox 3"/>
+          <p:cNvPr id="5" name="TextBox 4"/>
           <p:cNvSpPr txBox="1"/>
           <p:nvPr/>
         </p:nvSpPr>
         <p:spPr>
           <a:xfrm>
-            <a:off x="640080" y="5760720"/>
-            <a:ext cx="10972800" cy="5029200"/>
+            <a:off x="640080" y="5303520"/>
+            <a:ext cx="10972800" cy="5212080"/>
           </a:xfrm>
           <a:prstGeom prst="rect">
             <a:avLst/>
@@ -4042,46 +6586,31 @@
           <a:p>
             <a:pPr>
               <a:spcAft>
-                <a:spcPts val="600"/>
+                <a:spcPts val="700"/>
               </a:spcAft>
             </a:pPr>
             <a:r>
-              <a:rPr sz="1400">
-                <a:solidFill>
-                  <a:srgbClr val="424242"/>
-                </a:solidFill>
-              </a:rPr>
-              <a:t>PPO dort kalite olcutunde de onde; ozellikle 6-oda basarisinda (0.96 vs 0.27).</a:t>
+              <a:rPr sz="1500">
+                <a:solidFill>
+                  <a:srgbClr val="373737"/>
+                </a:solidFill>
+              </a:rPr>
+              <a:t>Ortam, durum/eylem uzayı, seed ve protokol birebir aynı -&gt; fark yalnızca algoritmadan.</a:t>
             </a:r>
           </a:p>
           <a:p>
             <a:pPr>
               <a:spcAft>
-                <a:spcPts val="600"/>
+                <a:spcPts val="700"/>
               </a:spcAft>
             </a:pPr>
             <a:r>
-              <a:rPr sz="1400">
-                <a:solidFill>
-                  <a:srgbClr val="424242"/>
-                </a:solidFill>
-              </a:rPr>
-              <a:t>Bedeli: PPO 1.5M adim, SAC 500k. SAC off-policy =&gt; replay buffer ile adim basina daha ornek-verimli.</a:t>
-            </a:r>
-          </a:p>
-          <a:p>
-            <a:pPr>
-              <a:spcAft>
-                <a:spcPts val="600"/>
-              </a:spcAft>
-            </a:pPr>
-            <a:r>
-              <a:rPr sz="1400">
-                <a:solidFill>
-                  <a:srgbClr val="424242"/>
-                </a:solidFill>
-              </a:rPr>
-              <a:t>Ders ayrimi: SAC az adimda hizli oturur, PPO daha cok adimla daha yuksek nihai basariya cikar.</a:t>
+              <a:rPr sz="1500">
+                <a:solidFill>
+                  <a:srgbClr val="373737"/>
+                </a:solidFill>
+              </a:rPr>
+              <a:t>SAC az adımda hızlı oturur (off-policy, replay buffer); PPO daha çok adımla daha yüksek nihai başarı.</a:t>
             </a:r>
           </a:p>
         </p:txBody>
@@ -4094,9 +6623,17 @@
 </p:sld>
 </file>
 
-<file path=ppt/slides/slide13.xml><?xml version="1.0" encoding="utf-8"?>
+<file path=ppt/slides/slide26.xml><?xml version="1.0" encoding="utf-8"?>
 <p:sld xmlns:a="http://schemas.openxmlformats.org/drawingml/2006/main" xmlns:p="http://schemas.openxmlformats.org/presentationml/2006/main" xmlns:r="http://schemas.openxmlformats.org/officeDocument/2006/relationships">
   <p:cSld>
+    <p:bg>
+      <p:bgPr>
+        <a:solidFill>
+          <a:srgbClr val="FFFFFF"/>
+        </a:solidFill>
+        <a:effectLst/>
+      </p:bgPr>
+    </p:bg>
     <p:spTree>
       <p:nvGrpSpPr>
         <p:cNvPr id="1" name=""/>
@@ -4106,14 +6643,57 @@
       <p:grpSpPr/>
       <p:sp>
         <p:nvSpPr>
-          <p:cNvPr id="2" name="TextBox 1"/>
+          <p:cNvPr id="2" name="Rectangle 1"/>
+          <p:cNvSpPr/>
+          <p:nvPr/>
+        </p:nvSpPr>
+        <p:spPr>
+          <a:xfrm>
+            <a:off x="0" y="0"/>
+            <a:ext cx="12191695" cy="960120"/>
+          </a:xfrm>
+          <a:prstGeom prst="rect">
+            <a:avLst/>
+          </a:prstGeom>
+          <a:solidFill>
+            <a:srgbClr val="1A237E"/>
+          </a:solidFill>
+          <a:ln>
+            <a:noFill/>
+          </a:ln>
+        </p:spPr>
+        <p:style>
+          <a:lnRef idx="1">
+            <a:schemeClr val="accent1"/>
+          </a:lnRef>
+          <a:fillRef idx="3">
+            <a:schemeClr val="accent1"/>
+          </a:fillRef>
+          <a:effectRef idx="2">
+            <a:schemeClr val="accent1"/>
+          </a:effectRef>
+          <a:fontRef idx="minor">
+            <a:schemeClr val="lt1"/>
+          </a:fontRef>
+        </p:style>
+        <p:txBody>
+          <a:bodyPr rtlCol="0" anchor="ctr"/>
+          <a:lstStyle/>
+          <a:p>
+            <a:pPr algn="ctr"/>
+          </a:p>
+        </p:txBody>
+      </p:sp>
+      <p:sp>
+        <p:nvSpPr>
+          <p:cNvPr id="3" name="TextBox 2"/>
           <p:cNvSpPr txBox="1"/>
           <p:nvPr/>
         </p:nvSpPr>
         <p:spPr>
           <a:xfrm>
-            <a:off x="548640" y="274320"/>
-            <a:ext cx="11064240" cy="822960"/>
+            <a:off x="457200" y="164592"/>
+            <a:ext cx="11247120" cy="685800"/>
           </a:xfrm>
           <a:prstGeom prst="rect">
             <a:avLst/>
@@ -4127,26 +6707,50 @@
           <a:lstStyle/>
           <a:p>
             <a:r>
-              <a:rPr sz="3000" b="1">
-                <a:solidFill>
-                  <a:srgbClr val="1A237E"/>
-                </a:solidFill>
-              </a:rPr>
-              <a:t>Savunma Ozeti (4 Kavram Alani)</a:t>
-            </a:r>
-          </a:p>
-        </p:txBody>
-      </p:sp>
-      <p:sp>
-        <p:nvSpPr>
-          <p:cNvPr id="3" name="TextBox 2"/>
+              <a:rPr sz="2300" b="1">
+                <a:solidFill>
+                  <a:srgbClr val="FFFFFF"/>
+                </a:solidFill>
+              </a:rPr>
+              <a:t>PPO vs SAC — Öğrenme Eğrisi</a:t>
+            </a:r>
+          </a:p>
+        </p:txBody>
+      </p:sp>
+      <p:pic>
+        <p:nvPicPr>
+          <p:cNvPr id="4" name="Picture 3" descr="C1_ogrenme_ppo_vs_sac.png"/>
+          <p:cNvPicPr>
+            <a:picLocks noChangeAspect="1"/>
+          </p:cNvPicPr>
+          <p:nvPr/>
+        </p:nvPicPr>
+        <p:blipFill>
+          <a:blip r:embed="rId2"/>
+          <a:stretch>
+            <a:fillRect/>
+          </a:stretch>
+        </p:blipFill>
+        <p:spPr>
+          <a:xfrm>
+            <a:off x="320040" y="1143000"/>
+            <a:ext cx="8487536" cy="5029200"/>
+          </a:xfrm>
+          <a:prstGeom prst="rect">
+            <a:avLst/>
+          </a:prstGeom>
+        </p:spPr>
+      </p:pic>
+      <p:sp>
+        <p:nvSpPr>
+          <p:cNvPr id="5" name="TextBox 4"/>
           <p:cNvSpPr txBox="1"/>
           <p:nvPr/>
         </p:nvSpPr>
         <p:spPr>
           <a:xfrm>
-            <a:off x="640080" y="1280160"/>
-            <a:ext cx="10972800" cy="5029200"/>
+            <a:off x="7955279" y="1188720"/>
+            <a:ext cx="4023360" cy="5212080"/>
           </a:xfrm>
           <a:prstGeom prst="rect">
             <a:avLst/>
@@ -4159,63 +6763,73 @@
           </a:bodyPr>
           <a:lstStyle/>
           <a:p>
+            <a:r>
+              <a:rPr sz="1600" b="1">
+                <a:solidFill>
+                  <a:srgbClr val="1565C0"/>
+                </a:solidFill>
+              </a:rPr>
+              <a:t>Yorum</a:t>
+            </a:r>
+          </a:p>
+          <a:p>
             <a:pPr>
               <a:spcAft>
-                <a:spcPts val="600"/>
+                <a:spcPts val="500"/>
               </a:spcAft>
             </a:pPr>
             <a:r>
-              <a:rPr sz="1600">
-                <a:solidFill>
-                  <a:srgbClr val="424242"/>
-                </a:solidFill>
-              </a:rPr>
-              <a:t>Stokastik mi? EVET. Kanit kod satiri: ruzgar (step), lidar (_compute_lidar), odom (_make_obs) gurultusu =&gt; p(s'|s,a) dejenere degil.</a:t>
+              <a:rPr sz="1250">
+                <a:solidFill>
+                  <a:srgbClr val="373737"/>
+                </a:solidFill>
+              </a:rPr>
+              <a:t>Gözlem: SAC ilk birkaç yüz bin adımda PPO'dan hızlı yükselir; PPO daha çok adımla daha yüksek/kararlı platoya ulaşır.</a:t>
             </a:r>
           </a:p>
           <a:p>
             <a:pPr>
               <a:spcAft>
-                <a:spcPts val="600"/>
+                <a:spcPts val="500"/>
               </a:spcAft>
             </a:pPr>
             <a:r>
-              <a:rPr sz="1600">
-                <a:solidFill>
-                  <a:srgbClr val="424242"/>
-                </a:solidFill>
-              </a:rPr>
-              <a:t>On/Off-policy? ON-POLICY. Davranis = hedef politika; replay buffer yok; veri kullanilip atilir.</a:t>
+              <a:rPr sz="1250">
+                <a:solidFill>
+                  <a:srgbClr val="373737"/>
+                </a:solidFill>
+              </a:rPr>
+              <a:t>Karşılaştırma: Tam ufukta PPO platosu daha yüksek.</a:t>
             </a:r>
           </a:p>
           <a:p>
             <a:pPr>
               <a:spcAft>
-                <a:spcPts val="600"/>
+                <a:spcPts val="500"/>
               </a:spcAft>
             </a:pPr>
             <a:r>
-              <a:rPr sz="1600">
-                <a:solidFill>
-                  <a:srgbClr val="424242"/>
-                </a:solidFill>
-              </a:rPr>
-              <a:t>Markov? Yaklasik saglanir: lidar + hiz (onceki eylem) + adim-deterministik engeller. Gurultu/sinirli gorus ile yalnizca yaklasik.</a:t>
+              <a:rPr sz="1250">
+                <a:solidFill>
+                  <a:srgbClr val="373737"/>
+                </a:solidFill>
+              </a:rPr>
+              <a:t>Açıklama: SAC off-policy (replay buffer =&gt; adım başına verimli); PPO on-policy (rollout bir kez kullanılır).</a:t>
             </a:r>
           </a:p>
           <a:p>
             <a:pPr>
               <a:spcAft>
-                <a:spcPts val="600"/>
+                <a:spcPts val="500"/>
               </a:spcAft>
             </a:pPr>
             <a:r>
-              <a:rPr sz="1600">
-                <a:solidFill>
-                  <a:srgbClr val="424242"/>
-                </a:solidFill>
-              </a:rPr>
-              <a:t>POMDP mi? EVET. Gercek durum != gozlem: odom gurultusu, gorus-disi duvarlar, engelin gelecek konumu gozlemde yok.</a:t>
+              <a:rPr sz="1250">
+                <a:solidFill>
+                  <a:srgbClr val="373737"/>
+                </a:solidFill>
+              </a:rPr>
+              <a:t>Sonuç: Off-policy az adımda hızlı, on-policy çok adımla yüksek nihai başarı.</a:t>
             </a:r>
           </a:p>
         </p:txBody>
@@ -4228,9 +6842,17 @@
 </p:sld>
 </file>
 
-<file path=ppt/slides/slide14.xml><?xml version="1.0" encoding="utf-8"?>
+<file path=ppt/slides/slide27.xml><?xml version="1.0" encoding="utf-8"?>
 <p:sld xmlns:a="http://schemas.openxmlformats.org/drawingml/2006/main" xmlns:p="http://schemas.openxmlformats.org/presentationml/2006/main" xmlns:r="http://schemas.openxmlformats.org/officeDocument/2006/relationships">
   <p:cSld>
+    <p:bg>
+      <p:bgPr>
+        <a:solidFill>
+          <a:srgbClr val="FFFFFF"/>
+        </a:solidFill>
+        <a:effectLst/>
+      </p:bgPr>
+    </p:bg>
     <p:spTree>
       <p:nvGrpSpPr>
         <p:cNvPr id="1" name=""/>
@@ -4240,14 +6862,57 @@
       <p:grpSpPr/>
       <p:sp>
         <p:nvSpPr>
-          <p:cNvPr id="2" name="TextBox 1"/>
+          <p:cNvPr id="2" name="Rectangle 1"/>
+          <p:cNvSpPr/>
+          <p:nvPr/>
+        </p:nvSpPr>
+        <p:spPr>
+          <a:xfrm>
+            <a:off x="0" y="0"/>
+            <a:ext cx="12191695" cy="960120"/>
+          </a:xfrm>
+          <a:prstGeom prst="rect">
+            <a:avLst/>
+          </a:prstGeom>
+          <a:solidFill>
+            <a:srgbClr val="1A237E"/>
+          </a:solidFill>
+          <a:ln>
+            <a:noFill/>
+          </a:ln>
+        </p:spPr>
+        <p:style>
+          <a:lnRef idx="1">
+            <a:schemeClr val="accent1"/>
+          </a:lnRef>
+          <a:fillRef idx="3">
+            <a:schemeClr val="accent1"/>
+          </a:fillRef>
+          <a:effectRef idx="2">
+            <a:schemeClr val="accent1"/>
+          </a:effectRef>
+          <a:fontRef idx="minor">
+            <a:schemeClr val="lt1"/>
+          </a:fontRef>
+        </p:style>
+        <p:txBody>
+          <a:bodyPr rtlCol="0" anchor="ctr"/>
+          <a:lstStyle/>
+          <a:p>
+            <a:pPr algn="ctr"/>
+          </a:p>
+        </p:txBody>
+      </p:sp>
+      <p:sp>
+        <p:nvSpPr>
+          <p:cNvPr id="3" name="TextBox 2"/>
           <p:cNvSpPr txBox="1"/>
           <p:nvPr/>
         </p:nvSpPr>
         <p:spPr>
           <a:xfrm>
-            <a:off x="548640" y="274320"/>
-            <a:ext cx="11064240" cy="822960"/>
+            <a:off x="457200" y="164592"/>
+            <a:ext cx="11247120" cy="685800"/>
           </a:xfrm>
           <a:prstGeom prst="rect">
             <a:avLst/>
@@ -4261,26 +6926,50 @@
           <a:lstStyle/>
           <a:p>
             <a:r>
-              <a:rPr sz="3000" b="1">
-                <a:solidFill>
-                  <a:srgbClr val="1A237E"/>
-                </a:solidFill>
-              </a:rPr>
-              <a:t>Sonuc</a:t>
-            </a:r>
-          </a:p>
-        </p:txBody>
-      </p:sp>
-      <p:sp>
-        <p:nvSpPr>
-          <p:cNvPr id="3" name="TextBox 2"/>
+              <a:rPr sz="2300" b="1">
+                <a:solidFill>
+                  <a:srgbClr val="FFFFFF"/>
+                </a:solidFill>
+              </a:rPr>
+              <a:t>PPO vs SAC — Örnek Verimliliği</a:t>
+            </a:r>
+          </a:p>
+        </p:txBody>
+      </p:sp>
+      <p:pic>
+        <p:nvPicPr>
+          <p:cNvPr id="4" name="Picture 3" descr="C2_ornek_verimliligi.png"/>
+          <p:cNvPicPr>
+            <a:picLocks noChangeAspect="1"/>
+          </p:cNvPicPr>
+          <p:nvPr/>
+        </p:nvPicPr>
+        <p:blipFill>
+          <a:blip r:embed="rId2"/>
+          <a:stretch>
+            <a:fillRect/>
+          </a:stretch>
+        </p:blipFill>
+        <p:spPr>
+          <a:xfrm>
+            <a:off x="320040" y="1143000"/>
+            <a:ext cx="8487536" cy="5029200"/>
+          </a:xfrm>
+          <a:prstGeom prst="rect">
+            <a:avLst/>
+          </a:prstGeom>
+        </p:spPr>
+      </p:pic>
+      <p:sp>
+        <p:nvSpPr>
+          <p:cNvPr id="5" name="TextBox 4"/>
           <p:cNvSpPr txBox="1"/>
           <p:nvPr/>
         </p:nvSpPr>
         <p:spPr>
           <a:xfrm>
-            <a:off x="640080" y="1280160"/>
-            <a:ext cx="10972800" cy="5029200"/>
+            <a:off x="7955279" y="1188720"/>
+            <a:ext cx="4023360" cy="5212080"/>
           </a:xfrm>
           <a:prstGeom prst="rect">
             <a:avLst/>
@@ -4293,63 +6982,73 @@
           </a:bodyPr>
           <a:lstStyle/>
           <a:p>
+            <a:r>
+              <a:rPr sz="1600" b="1">
+                <a:solidFill>
+                  <a:srgbClr val="1565C0"/>
+                </a:solidFill>
+              </a:rPr>
+              <a:t>Yorum</a:t>
+            </a:r>
+          </a:p>
+          <a:p>
             <a:pPr>
               <a:spcAft>
-                <a:spcPts val="600"/>
+                <a:spcPts val="500"/>
               </a:spcAft>
             </a:pPr>
             <a:r>
-              <a:rPr sz="1800">
-                <a:solidFill>
-                  <a:srgbClr val="424242"/>
-                </a:solidFill>
-              </a:rPr>
-              <a:t>PPO, on-policy ve replay buffer'siz olmasina ragmen rastgele ve sezgisel taban politikalarini belirgin gecti.</a:t>
+              <a:rPr sz="1250">
+                <a:solidFill>
+                  <a:srgbClr val="373737"/>
+                </a:solidFill>
+              </a:rPr>
+              <a:t>Gözlem: Aynı env-adım penceresinde SAC üstte başlar.</a:t>
             </a:r>
           </a:p>
           <a:p>
             <a:pPr>
               <a:spcAft>
-                <a:spcPts val="600"/>
+                <a:spcPts val="500"/>
               </a:spcAft>
             </a:pPr>
             <a:r>
-              <a:rPr sz="1800">
-                <a:solidFill>
-                  <a:srgbClr val="424242"/>
-                </a:solidFill>
-              </a:rPr>
-              <a:t>Paralel toplama + uzun egitim ile yuksek oda kapsamasi elde edildi.</a:t>
+              <a:rPr sz="1250">
+                <a:solidFill>
+                  <a:srgbClr val="373737"/>
+                </a:solidFill>
+              </a:rPr>
+              <a:t>Karşılaştırma: SAC erken avantajlı; PPO sonradan yakalar/geçer.</a:t>
             </a:r>
           </a:p>
           <a:p>
             <a:pPr>
               <a:spcAft>
-                <a:spcPts val="600"/>
+                <a:spcPts val="500"/>
               </a:spcAft>
             </a:pPr>
             <a:r>
-              <a:rPr sz="1800">
-                <a:solidFill>
-                  <a:srgbClr val="424242"/>
-                </a:solidFill>
-              </a:rPr>
-              <a:t>Ayni ortam/seed/protokol SAC ile korundugundan sonuclar dogrudan karsilastirilabilir.</a:t>
+              <a:rPr sz="1250">
+                <a:solidFill>
+                  <a:srgbClr val="373737"/>
+                </a:solidFill>
+              </a:rPr>
+              <a:t>Açıklama: Replay buffer her deneyimi defalarca kullandığından SAC aynı adımda daha çok öğrenir.</a:t>
             </a:r>
           </a:p>
           <a:p>
             <a:pPr>
               <a:spcAft>
-                <a:spcPts val="600"/>
+                <a:spcPts val="500"/>
               </a:spcAft>
             </a:pPr>
             <a:r>
-              <a:rPr sz="1800">
-                <a:solidFill>
-                  <a:srgbClr val="424242"/>
-                </a:solidFill>
-              </a:rPr>
-              <a:t>Tum grafikler sonuclar/loglar/ altindaki ham loglardan yeniden uretilebilir.</a:t>
+              <a:rPr sz="1250">
+                <a:solidFill>
+                  <a:srgbClr val="373737"/>
+                </a:solidFill>
+              </a:rPr>
+              <a:t>Sonuç: Örnek-bütçesi kısıtlı senaryolar için SAC, bütçe bolca ise PPO avantajlı.</a:t>
             </a:r>
           </a:p>
         </p:txBody>
@@ -4362,9 +7061,17 @@
 </p:sld>
 </file>
 
-<file path=ppt/slides/slide2.xml><?xml version="1.0" encoding="utf-8"?>
+<file path=ppt/slides/slide28.xml><?xml version="1.0" encoding="utf-8"?>
 <p:sld xmlns:a="http://schemas.openxmlformats.org/drawingml/2006/main" xmlns:p="http://schemas.openxmlformats.org/presentationml/2006/main" xmlns:r="http://schemas.openxmlformats.org/officeDocument/2006/relationships">
   <p:cSld>
+    <p:bg>
+      <p:bgPr>
+        <a:solidFill>
+          <a:srgbClr val="FFFFFF"/>
+        </a:solidFill>
+        <a:effectLst/>
+      </p:bgPr>
+    </p:bg>
     <p:spTree>
       <p:nvGrpSpPr>
         <p:cNvPr id="1" name=""/>
@@ -4374,14 +7081,57 @@
       <p:grpSpPr/>
       <p:sp>
         <p:nvSpPr>
-          <p:cNvPr id="2" name="TextBox 1"/>
+          <p:cNvPr id="2" name="Rectangle 1"/>
+          <p:cNvSpPr/>
+          <p:nvPr/>
+        </p:nvSpPr>
+        <p:spPr>
+          <a:xfrm>
+            <a:off x="0" y="0"/>
+            <a:ext cx="12191695" cy="960120"/>
+          </a:xfrm>
+          <a:prstGeom prst="rect">
+            <a:avLst/>
+          </a:prstGeom>
+          <a:solidFill>
+            <a:srgbClr val="1A237E"/>
+          </a:solidFill>
+          <a:ln>
+            <a:noFill/>
+          </a:ln>
+        </p:spPr>
+        <p:style>
+          <a:lnRef idx="1">
+            <a:schemeClr val="accent1"/>
+          </a:lnRef>
+          <a:fillRef idx="3">
+            <a:schemeClr val="accent1"/>
+          </a:fillRef>
+          <a:effectRef idx="2">
+            <a:schemeClr val="accent1"/>
+          </a:effectRef>
+          <a:fontRef idx="minor">
+            <a:schemeClr val="lt1"/>
+          </a:fontRef>
+        </p:style>
+        <p:txBody>
+          <a:bodyPr rtlCol="0" anchor="ctr"/>
+          <a:lstStyle/>
+          <a:p>
+            <a:pPr algn="ctr"/>
+          </a:p>
+        </p:txBody>
+      </p:sp>
+      <p:sp>
+        <p:nvSpPr>
+          <p:cNvPr id="3" name="TextBox 2"/>
           <p:cNvSpPr txBox="1"/>
           <p:nvPr/>
         </p:nvSpPr>
         <p:spPr>
           <a:xfrm>
-            <a:off x="548640" y="274320"/>
-            <a:ext cx="11064240" cy="822960"/>
+            <a:off x="457200" y="164592"/>
+            <a:ext cx="11247120" cy="685800"/>
           </a:xfrm>
           <a:prstGeom prst="rect">
             <a:avLst/>
@@ -4395,26 +7145,50 @@
           <a:lstStyle/>
           <a:p>
             <a:r>
-              <a:rPr sz="3000" b="1">
-                <a:solidFill>
-                  <a:srgbClr val="1A237E"/>
-                </a:solidFill>
-              </a:rPr>
-              <a:t>Problem ve Neden Pekistirmeli Ogrenme?</a:t>
-            </a:r>
-          </a:p>
-        </p:txBody>
-      </p:sp>
-      <p:sp>
-        <p:nvSpPr>
-          <p:cNvPr id="3" name="TextBox 2"/>
+              <a:rPr sz="2300" b="1">
+                <a:solidFill>
+                  <a:srgbClr val="FFFFFF"/>
+                </a:solidFill>
+              </a:rPr>
+              <a:t>PPO vs SAC — Deterministik Eval</a:t>
+            </a:r>
+          </a:p>
+        </p:txBody>
+      </p:sp>
+      <p:pic>
+        <p:nvPicPr>
+          <p:cNvPr id="4" name="Picture 3" descr="C3_eval_ppo_vs_sac.png"/>
+          <p:cNvPicPr>
+            <a:picLocks noChangeAspect="1"/>
+          </p:cNvPicPr>
+          <p:nvPr/>
+        </p:nvPicPr>
+        <p:blipFill>
+          <a:blip r:embed="rId2"/>
+          <a:stretch>
+            <a:fillRect/>
+          </a:stretch>
+        </p:blipFill>
+        <p:spPr>
+          <a:xfrm>
+            <a:off x="320040" y="1143000"/>
+            <a:ext cx="8528838" cy="5029200"/>
+          </a:xfrm>
+          <a:prstGeom prst="rect">
+            <a:avLst/>
+          </a:prstGeom>
+        </p:spPr>
+      </p:pic>
+      <p:sp>
+        <p:nvSpPr>
+          <p:cNvPr id="5" name="TextBox 4"/>
           <p:cNvSpPr txBox="1"/>
           <p:nvPr/>
         </p:nvSpPr>
         <p:spPr>
           <a:xfrm>
-            <a:off x="640080" y="1280160"/>
-            <a:ext cx="10972800" cy="5029200"/>
+            <a:off x="7955279" y="1188720"/>
+            <a:ext cx="4023360" cy="5212080"/>
           </a:xfrm>
           <a:prstGeom prst="rect">
             <a:avLst/>
@@ -4427,93 +7201,292 @@
           </a:bodyPr>
           <a:lstStyle/>
           <a:p>
+            <a:r>
+              <a:rPr sz="1600" b="1">
+                <a:solidFill>
+                  <a:srgbClr val="1565C0"/>
+                </a:solidFill>
+              </a:rPr>
+              <a:t>Yorum</a:t>
+            </a:r>
+          </a:p>
+          <a:p>
             <a:pPr>
               <a:spcAft>
-                <a:spcPts val="600"/>
+                <a:spcPts val="500"/>
               </a:spcAft>
             </a:pPr>
             <a:r>
-              <a:rPr sz="1800">
-                <a:solidFill>
-                  <a:srgbClr val="424242"/>
-                </a:solidFill>
-              </a:rPr>
-              <a:t>Gorev: GPS'siz kapali binada, sadece lidar + gurultulu odometri ile carpmadan en cok alani kesfet.</a:t>
+              <a:rPr sz="1250">
+                <a:solidFill>
+                  <a:srgbClr val="373737"/>
+                </a:solidFill>
+              </a:rPr>
+              <a:t>Gözlem: Greedy eval eğrisinde PPO platosu SAC'ın üzerinde.</a:t>
             </a:r>
           </a:p>
           <a:p>
             <a:pPr>
               <a:spcAft>
-                <a:spcPts val="600"/>
+                <a:spcPts val="500"/>
               </a:spcAft>
             </a:pPr>
             <a:r>
-              <a:rPr sz="1800">
-                <a:solidFill>
-                  <a:srgbClr val="424242"/>
-                </a:solidFill>
-              </a:rPr>
-              <a:t>Neden RL? (rehber dort olcutu de saglanir)</a:t>
-            </a:r>
-          </a:p>
-          <a:p>
-            <a:pPr lvl="1">
+              <a:rPr sz="1250">
+                <a:solidFill>
+                  <a:srgbClr val="373737"/>
+                </a:solidFill>
+              </a:rPr>
+              <a:t>Karşılaştırma: İkisi de stokastik eğitimle tutarlı; fark nihai seviyede.</a:t>
+            </a:r>
+          </a:p>
+          <a:p>
+            <a:pPr>
               <a:spcAft>
-                <a:spcPts val="600"/>
+                <a:spcPts val="500"/>
               </a:spcAft>
             </a:pPr>
             <a:r>
-              <a:rPr sz="1500">
-                <a:solidFill>
-                  <a:srgbClr val="424242"/>
-                </a:solidFill>
-              </a:rPr>
-              <a:t>Ardisiklik: bir adimdaki donus, sonraki adimlarin kesif potansiyelini belirler.</a:t>
-            </a:r>
-          </a:p>
-          <a:p>
-            <a:pPr lvl="1">
+              <a:rPr sz="1250">
+                <a:solidFill>
+                  <a:srgbClr val="373737"/>
+                </a:solidFill>
+              </a:rPr>
+              <a:t>Açıklama: PPO'nun klips'i kararlı/yüksek-tavanlı politika öğrenir.</a:t>
+            </a:r>
+          </a:p>
+          <a:p>
+            <a:pPr>
               <a:spcAft>
-                <a:spcPts val="600"/>
+                <a:spcPts val="500"/>
               </a:spcAft>
             </a:pPr>
             <a:r>
-              <a:rPr sz="1500">
-                <a:solidFill>
-                  <a:srgbClr val="424242"/>
-                </a:solidFill>
-              </a:rPr>
-              <a:t>Gecikmeli odul: yeni oda / 6-oda bonusu ancak ileride toplanir.</a:t>
-            </a:r>
-          </a:p>
-          <a:p>
-            <a:pPr lvl="1">
+              <a:rPr sz="1250">
+                <a:solidFill>
+                  <a:srgbClr val="373737"/>
+                </a:solidFill>
+              </a:rPr>
+              <a:t>Sonuç: Bu ortamda PPO nihai görev başarısında önde.</a:t>
+            </a:r>
+          </a:p>
+        </p:txBody>
+      </p:sp>
+    </p:spTree>
+  </p:cSld>
+  <p:clrMapOvr>
+    <a:masterClrMapping/>
+  </p:clrMapOvr>
+</p:sld>
+</file>
+
+<file path=ppt/slides/slide29.xml><?xml version="1.0" encoding="utf-8"?>
+<p:sld xmlns:a="http://schemas.openxmlformats.org/drawingml/2006/main" xmlns:p="http://schemas.openxmlformats.org/presentationml/2006/main" xmlns:r="http://schemas.openxmlformats.org/officeDocument/2006/relationships">
+  <p:cSld>
+    <p:bg>
+      <p:bgPr>
+        <a:solidFill>
+          <a:srgbClr val="FFFFFF"/>
+        </a:solidFill>
+        <a:effectLst/>
+      </p:bgPr>
+    </p:bg>
+    <p:spTree>
+      <p:nvGrpSpPr>
+        <p:cNvPr id="1" name=""/>
+        <p:cNvGrpSpPr/>
+        <p:nvPr/>
+      </p:nvGrpSpPr>
+      <p:grpSpPr/>
+      <p:sp>
+        <p:nvSpPr>
+          <p:cNvPr id="2" name="Rectangle 1"/>
+          <p:cNvSpPr/>
+          <p:nvPr/>
+        </p:nvSpPr>
+        <p:spPr>
+          <a:xfrm>
+            <a:off x="0" y="0"/>
+            <a:ext cx="12191695" cy="960120"/>
+          </a:xfrm>
+          <a:prstGeom prst="rect">
+            <a:avLst/>
+          </a:prstGeom>
+          <a:solidFill>
+            <a:srgbClr val="1A237E"/>
+          </a:solidFill>
+          <a:ln>
+            <a:noFill/>
+          </a:ln>
+        </p:spPr>
+        <p:style>
+          <a:lnRef idx="1">
+            <a:schemeClr val="accent1"/>
+          </a:lnRef>
+          <a:fillRef idx="3">
+            <a:schemeClr val="accent1"/>
+          </a:fillRef>
+          <a:effectRef idx="2">
+            <a:schemeClr val="accent1"/>
+          </a:effectRef>
+          <a:fontRef idx="minor">
+            <a:schemeClr val="lt1"/>
+          </a:fontRef>
+        </p:style>
+        <p:txBody>
+          <a:bodyPr rtlCol="0" anchor="ctr"/>
+          <a:lstStyle/>
+          <a:p>
+            <a:pPr algn="ctr"/>
+          </a:p>
+        </p:txBody>
+      </p:sp>
+      <p:sp>
+        <p:nvSpPr>
+          <p:cNvPr id="3" name="TextBox 2"/>
+          <p:cNvSpPr txBox="1"/>
+          <p:nvPr/>
+        </p:nvSpPr>
+        <p:spPr>
+          <a:xfrm>
+            <a:off x="457200" y="164592"/>
+            <a:ext cx="11247120" cy="685800"/>
+          </a:xfrm>
+          <a:prstGeom prst="rect">
+            <a:avLst/>
+          </a:prstGeom>
+          <a:noFill/>
+        </p:spPr>
+        <p:txBody>
+          <a:bodyPr wrap="square">
+            <a:spAutoFit/>
+          </a:bodyPr>
+          <a:lstStyle/>
+          <a:p>
+            <a:r>
+              <a:rPr sz="2300" b="1">
+                <a:solidFill>
+                  <a:srgbClr val="FFFFFF"/>
+                </a:solidFill>
+              </a:rPr>
+              <a:t>PPO vs SAC — Oda Keşif Süreci</a:t>
+            </a:r>
+          </a:p>
+        </p:txBody>
+      </p:sp>
+      <p:pic>
+        <p:nvPicPr>
+          <p:cNvPr id="4" name="Picture 3" descr="C5_oda_ppo_vs_sac.png"/>
+          <p:cNvPicPr>
+            <a:picLocks noChangeAspect="1"/>
+          </p:cNvPicPr>
+          <p:nvPr/>
+        </p:nvPicPr>
+        <p:blipFill>
+          <a:blip r:embed="rId2"/>
+          <a:stretch>
+            <a:fillRect/>
+          </a:stretch>
+        </p:blipFill>
+        <p:spPr>
+          <a:xfrm>
+            <a:off x="320040" y="1143000"/>
+            <a:ext cx="8379958" cy="5029200"/>
+          </a:xfrm>
+          <a:prstGeom prst="rect">
+            <a:avLst/>
+          </a:prstGeom>
+        </p:spPr>
+      </p:pic>
+      <p:sp>
+        <p:nvSpPr>
+          <p:cNvPr id="5" name="TextBox 4"/>
+          <p:cNvSpPr txBox="1"/>
+          <p:nvPr/>
+        </p:nvSpPr>
+        <p:spPr>
+          <a:xfrm>
+            <a:off x="7955279" y="1188720"/>
+            <a:ext cx="4023360" cy="5212080"/>
+          </a:xfrm>
+          <a:prstGeom prst="rect">
+            <a:avLst/>
+          </a:prstGeom>
+          <a:noFill/>
+        </p:spPr>
+        <p:txBody>
+          <a:bodyPr wrap="square">
+            <a:spAutoFit/>
+          </a:bodyPr>
+          <a:lstStyle/>
+          <a:p>
+            <a:r>
+              <a:rPr sz="1600" b="1">
+                <a:solidFill>
+                  <a:srgbClr val="1565C0"/>
+                </a:solidFill>
+              </a:rPr>
+              <a:t>Yorum</a:t>
+            </a:r>
+          </a:p>
+          <a:p>
+            <a:pPr>
               <a:spcAft>
-                <a:spcPts val="600"/>
+                <a:spcPts val="500"/>
               </a:spcAft>
             </a:pPr>
             <a:r>
-              <a:rPr sz="1500">
-                <a:solidFill>
-                  <a:srgbClr val="424242"/>
-                </a:solidFill>
-              </a:rPr>
-              <a:t>Buyuk, bilinmeyen, stokastik durum uzayi (75-D surekli; lidar/odom/ruzgar gurultusu).</a:t>
-            </a:r>
-          </a:p>
-          <a:p>
-            <a:pPr lvl="1">
+              <a:rPr sz="1250">
+                <a:solidFill>
+                  <a:srgbClr val="373737"/>
+                </a:solidFill>
+              </a:rPr>
+              <a:t>Gözlem: PPO ortalama oda sayısında 6'ya daha çok yaklaşır.</a:t>
+            </a:r>
+          </a:p>
+          <a:p>
+            <a:pPr>
               <a:spcAft>
-                <a:spcPts val="600"/>
+                <a:spcPts val="500"/>
               </a:spcAft>
             </a:pPr>
             <a:r>
-              <a:rPr sz="1500">
-                <a:solidFill>
-                  <a:srgbClr val="424242"/>
-                </a:solidFill>
-              </a:rPr>
-              <a:t>A*/BFS uygulanamaz: harita onceden bilinmez, hareketli engeller var, tek hedef yok (amac kapsama).</a:t>
+              <a:rPr sz="1250">
+                <a:solidFill>
+                  <a:srgbClr val="373737"/>
+                </a:solidFill>
+              </a:rPr>
+              <a:t>Karşılaştırma: SAC hızlı başlar ama nihai oda kapsaması PPO'nun gerisinde.</a:t>
+            </a:r>
+          </a:p>
+          <a:p>
+            <a:pPr>
+              <a:spcAft>
+                <a:spcPts val="500"/>
+              </a:spcAft>
+            </a:pPr>
+            <a:r>
+              <a:rPr sz="1250">
+                <a:solidFill>
+                  <a:srgbClr val="373737"/>
+                </a:solidFill>
+              </a:rPr>
+              <a:t>Açıklama: PPO'nun yüksek-tavanlı politikası sistematik oda-oda keşfi daha iyi yapar.</a:t>
+            </a:r>
+          </a:p>
+          <a:p>
+            <a:pPr>
+              <a:spcAft>
+                <a:spcPts val="500"/>
+              </a:spcAft>
+            </a:pPr>
+            <a:r>
+              <a:rPr sz="1250">
+                <a:solidFill>
+                  <a:srgbClr val="373737"/>
+                </a:solidFill>
+              </a:rPr>
+              <a:t>Sonuç: Görev metriğinde (oda) PPO üstün.</a:t>
             </a:r>
           </a:p>
         </p:txBody>
@@ -4529,6 +7502,14 @@
 <file path=ppt/slides/slide3.xml><?xml version="1.0" encoding="utf-8"?>
 <p:sld xmlns:a="http://schemas.openxmlformats.org/drawingml/2006/main" xmlns:p="http://schemas.openxmlformats.org/presentationml/2006/main" xmlns:r="http://schemas.openxmlformats.org/officeDocument/2006/relationships">
   <p:cSld>
+    <p:bg>
+      <p:bgPr>
+        <a:solidFill>
+          <a:srgbClr val="FFFFFF"/>
+        </a:solidFill>
+        <a:effectLst/>
+      </p:bgPr>
+    </p:bg>
     <p:spTree>
       <p:nvGrpSpPr>
         <p:cNvPr id="1" name=""/>
@@ -4538,14 +7519,57 @@
       <p:grpSpPr/>
       <p:sp>
         <p:nvSpPr>
-          <p:cNvPr id="2" name="TextBox 1"/>
+          <p:cNvPr id="2" name="Rectangle 1"/>
+          <p:cNvSpPr/>
+          <p:nvPr/>
+        </p:nvSpPr>
+        <p:spPr>
+          <a:xfrm>
+            <a:off x="0" y="0"/>
+            <a:ext cx="12191695" cy="960120"/>
+          </a:xfrm>
+          <a:prstGeom prst="rect">
+            <a:avLst/>
+          </a:prstGeom>
+          <a:solidFill>
+            <a:srgbClr val="1A237E"/>
+          </a:solidFill>
+          <a:ln>
+            <a:noFill/>
+          </a:ln>
+        </p:spPr>
+        <p:style>
+          <a:lnRef idx="1">
+            <a:schemeClr val="accent1"/>
+          </a:lnRef>
+          <a:fillRef idx="3">
+            <a:schemeClr val="accent1"/>
+          </a:fillRef>
+          <a:effectRef idx="2">
+            <a:schemeClr val="accent1"/>
+          </a:effectRef>
+          <a:fontRef idx="minor">
+            <a:schemeClr val="lt1"/>
+          </a:fontRef>
+        </p:style>
+        <p:txBody>
+          <a:bodyPr rtlCol="0" anchor="ctr"/>
+          <a:lstStyle/>
+          <a:p>
+            <a:pPr algn="ctr"/>
+          </a:p>
+        </p:txBody>
+      </p:sp>
+      <p:sp>
+        <p:nvSpPr>
+          <p:cNvPr id="3" name="TextBox 2"/>
           <p:cNvSpPr txBox="1"/>
           <p:nvPr/>
         </p:nvSpPr>
         <p:spPr>
           <a:xfrm>
-            <a:off x="548640" y="274320"/>
-            <a:ext cx="11064240" cy="822960"/>
+            <a:off x="457200" y="164592"/>
+            <a:ext cx="11247120" cy="685800"/>
           </a:xfrm>
           <a:prstGeom prst="rect">
             <a:avLst/>
@@ -4559,26 +7583,26 @@
           <a:lstStyle/>
           <a:p>
             <a:r>
-              <a:rPr sz="3000" b="1">
-                <a:solidFill>
-                  <a:srgbClr val="1A237E"/>
-                </a:solidFill>
-              </a:rPr>
-              <a:t>Ortam ve MDP: Durum / Eylem / Odul</a:t>
-            </a:r>
-          </a:p>
-        </p:txBody>
-      </p:sp>
-      <p:sp>
-        <p:nvSpPr>
-          <p:cNvPr id="3" name="TextBox 2"/>
+              <a:rPr sz="2800" b="1">
+                <a:solidFill>
+                  <a:srgbClr val="FFFFFF"/>
+                </a:solidFill>
+              </a:rPr>
+              <a:t>Problem ve Neden Pekiştirmeli Öğrenme?</a:t>
+            </a:r>
+          </a:p>
+        </p:txBody>
+      </p:sp>
+      <p:sp>
+        <p:nvSpPr>
+          <p:cNvPr id="4" name="TextBox 3"/>
           <p:cNvSpPr txBox="1"/>
           <p:nvPr/>
         </p:nvSpPr>
         <p:spPr>
           <a:xfrm>
-            <a:off x="640080" y="1280160"/>
-            <a:ext cx="10972800" cy="5029200"/>
+            <a:off x="640080" y="1234440"/>
+            <a:ext cx="10972800" cy="5212080"/>
           </a:xfrm>
           <a:prstGeom prst="rect">
             <a:avLst/>
@@ -4593,76 +7617,620 @@
           <a:p>
             <a:pPr>
               <a:spcAft>
-                <a:spcPts val="600"/>
+                <a:spcPts val="700"/>
               </a:spcAft>
             </a:pPr>
             <a:r>
-              <a:rPr sz="1700">
-                <a:solidFill>
-                  <a:srgbClr val="424242"/>
-                </a:solidFill>
-              </a:rPr>
-              <a:t>Ortam: 8 m yaricapli, 6 odali bina; 64 isinli lidar; 3 hareketli engel. SAC teslimiyle bayt-bayt ayni ortam.</a:t>
+              <a:rPr sz="1800">
+                <a:solidFill>
+                  <a:srgbClr val="373737"/>
+                </a:solidFill>
+              </a:rPr>
+              <a:t>Görev: GPS'siz kapalı binada, sadece lidar + gürültülü odometri ile çarpmadan en çok alanı keşfet.</a:t>
             </a:r>
           </a:p>
           <a:p>
             <a:pPr>
               <a:spcAft>
-                <a:spcPts val="600"/>
+                <a:spcPts val="700"/>
               </a:spcAft>
             </a:pPr>
             <a:r>
-              <a:rPr sz="1700">
-                <a:solidFill>
-                  <a:srgbClr val="424242"/>
-                </a:solidFill>
-              </a:rPr>
-              <a:t>Durum (75-D, [0,1]): 64 lidar + yaw cos/sin + onceki eylem(3) + ilerleme/oda(2) + min_lidar/idle(2) + kapi/duvar(2).</a:t>
-            </a:r>
-          </a:p>
+              <a:rPr sz="1800">
+                <a:solidFill>
+                  <a:srgbClr val="373737"/>
+                </a:solidFill>
+              </a:rPr>
+              <a:t>Neden RL? (rehber dört ölçütü de sağlanır)</a:t>
+            </a:r>
+          </a:p>
+          <a:p>
+            <a:pPr lvl="1">
+              <a:spcAft>
+                <a:spcPts val="700"/>
+              </a:spcAft>
+            </a:pPr>
+            <a:r>
+              <a:rPr sz="1600">
+                <a:solidFill>
+                  <a:srgbClr val="373737"/>
+                </a:solidFill>
+              </a:rPr>
+              <a:t>• Ardışıklık: bir adımdaki dönüş, sonraki adımların keşif potansiyelini belirler.</a:t>
+            </a:r>
+          </a:p>
+          <a:p>
+            <a:pPr lvl="1">
+              <a:spcAft>
+                <a:spcPts val="700"/>
+              </a:spcAft>
+            </a:pPr>
+            <a:r>
+              <a:rPr sz="1600">
+                <a:solidFill>
+                  <a:srgbClr val="373737"/>
+                </a:solidFill>
+              </a:rPr>
+              <a:t>• Gecikmeli ödül: yeni oda / 6-oda bonusu ancak ileride toplanır.</a:t>
+            </a:r>
+          </a:p>
+          <a:p>
+            <a:pPr lvl="1">
+              <a:spcAft>
+                <a:spcPts val="700"/>
+              </a:spcAft>
+            </a:pPr>
+            <a:r>
+              <a:rPr sz="1600">
+                <a:solidFill>
+                  <a:srgbClr val="373737"/>
+                </a:solidFill>
+              </a:rPr>
+              <a:t>• Büyük, bilinmeyen, stokastik durum uzayı (75-D sürekli; lidar/odom/rüzgar gürültüsü).</a:t>
+            </a:r>
+          </a:p>
+          <a:p>
+            <a:pPr lvl="1">
+              <a:spcAft>
+                <a:spcPts val="700"/>
+              </a:spcAft>
+            </a:pPr>
+            <a:r>
+              <a:rPr sz="1600">
+                <a:solidFill>
+                  <a:srgbClr val="373737"/>
+                </a:solidFill>
+              </a:rPr>
+              <a:t>• A*/BFS uygulanamaz: harita önceden bilinmez, hareketli engeller var, tek hedef yok (amaç kapsama).</a:t>
+            </a:r>
+          </a:p>
+        </p:txBody>
+      </p:sp>
+    </p:spTree>
+  </p:cSld>
+  <p:clrMapOvr>
+    <a:masterClrMapping/>
+  </p:clrMapOvr>
+</p:sld>
+</file>
+
+<file path=ppt/slides/slide30.xml><?xml version="1.0" encoding="utf-8"?>
+<p:sld xmlns:a="http://schemas.openxmlformats.org/drawingml/2006/main" xmlns:p="http://schemas.openxmlformats.org/presentationml/2006/main" xmlns:r="http://schemas.openxmlformats.org/officeDocument/2006/relationships">
+  <p:cSld>
+    <p:bg>
+      <p:bgPr>
+        <a:solidFill>
+          <a:srgbClr val="FFFFFF"/>
+        </a:solidFill>
+        <a:effectLst/>
+      </p:bgPr>
+    </p:bg>
+    <p:spTree>
+      <p:nvGrpSpPr>
+        <p:cNvPr id="1" name=""/>
+        <p:cNvGrpSpPr/>
+        <p:nvPr/>
+      </p:nvGrpSpPr>
+      <p:grpSpPr/>
+      <p:sp>
+        <p:nvSpPr>
+          <p:cNvPr id="2" name="Rectangle 1"/>
+          <p:cNvSpPr/>
+          <p:nvPr/>
+        </p:nvSpPr>
+        <p:spPr>
+          <a:xfrm>
+            <a:off x="0" y="0"/>
+            <a:ext cx="12191695" cy="960120"/>
+          </a:xfrm>
+          <a:prstGeom prst="rect">
+            <a:avLst/>
+          </a:prstGeom>
+          <a:solidFill>
+            <a:srgbClr val="1A237E"/>
+          </a:solidFill>
+          <a:ln>
+            <a:noFill/>
+          </a:ln>
+        </p:spPr>
+        <p:style>
+          <a:lnRef idx="1">
+            <a:schemeClr val="accent1"/>
+          </a:lnRef>
+          <a:fillRef idx="3">
+            <a:schemeClr val="accent1"/>
+          </a:fillRef>
+          <a:effectRef idx="2">
+            <a:schemeClr val="accent1"/>
+          </a:effectRef>
+          <a:fontRef idx="minor">
+            <a:schemeClr val="lt1"/>
+          </a:fontRef>
+        </p:style>
+        <p:txBody>
+          <a:bodyPr rtlCol="0" anchor="ctr"/>
+          <a:lstStyle/>
+          <a:p>
+            <a:pPr algn="ctr"/>
+          </a:p>
+        </p:txBody>
+      </p:sp>
+      <p:sp>
+        <p:nvSpPr>
+          <p:cNvPr id="3" name="TextBox 2"/>
+          <p:cNvSpPr txBox="1"/>
+          <p:nvPr/>
+        </p:nvSpPr>
+        <p:spPr>
+          <a:xfrm>
+            <a:off x="457200" y="164592"/>
+            <a:ext cx="11247120" cy="685800"/>
+          </a:xfrm>
+          <a:prstGeom prst="rect">
+            <a:avLst/>
+          </a:prstGeom>
+          <a:noFill/>
+        </p:spPr>
+        <p:txBody>
+          <a:bodyPr wrap="square">
+            <a:spAutoFit/>
+          </a:bodyPr>
+          <a:lstStyle/>
+          <a:p>
+            <a:r>
+              <a:rPr sz="2300" b="1">
+                <a:solidFill>
+                  <a:srgbClr val="FFFFFF"/>
+                </a:solidFill>
+              </a:rPr>
+              <a:t>PPO vs SAC — Final Metrik Barları</a:t>
+            </a:r>
+          </a:p>
+        </p:txBody>
+      </p:sp>
+      <p:pic>
+        <p:nvPicPr>
+          <p:cNvPr id="4" name="Picture 3" descr="C4_final_metrik_bar.png"/>
+          <p:cNvPicPr>
+            <a:picLocks noChangeAspect="1"/>
+          </p:cNvPicPr>
+          <p:nvPr/>
+        </p:nvPicPr>
+        <p:blipFill>
+          <a:blip r:embed="rId2"/>
+          <a:stretch>
+            <a:fillRect/>
+          </a:stretch>
+        </p:blipFill>
+        <p:spPr>
+          <a:xfrm>
+            <a:off x="548640" y="1188720"/>
+            <a:ext cx="11064240" cy="2690856"/>
+          </a:xfrm>
+          <a:prstGeom prst="rect">
+            <a:avLst/>
+          </a:prstGeom>
+        </p:spPr>
+      </p:pic>
+      <p:sp>
+        <p:nvSpPr>
+          <p:cNvPr id="5" name="TextBox 4"/>
+          <p:cNvSpPr txBox="1"/>
+          <p:nvPr/>
+        </p:nvSpPr>
+        <p:spPr>
+          <a:xfrm>
+            <a:off x="548640" y="5806440"/>
+            <a:ext cx="11064240" cy="914400"/>
+          </a:xfrm>
+          <a:prstGeom prst="rect">
+            <a:avLst/>
+          </a:prstGeom>
+          <a:noFill/>
+        </p:spPr>
+        <p:txBody>
+          <a:bodyPr wrap="square">
+            <a:spAutoFit/>
+          </a:bodyPr>
+          <a:lstStyle/>
+          <a:p>
+            <a:r>
+              <a:rPr sz="1100">
+                <a:solidFill>
+                  <a:srgbClr val="373737"/>
+                </a:solidFill>
+              </a:rPr>
+              <a:t>Gözlem: Getiri, oda, kapsama, başarı PPO'da yüksek; çarpışma PPO'da düşük.  Karşılaştırma: Dört kalite ölçütünde PPO önde, güvenlikte (çarpışma) de daha iyi.  Açıklama: Aynı ortam/seed/protokolde fark yalnızca algoritmadan gelir.  Sonuç: Bu çok-odalı keşif görevinde PPO nihai başarı/güvenlikte üstün.</a:t>
+            </a:r>
+          </a:p>
+        </p:txBody>
+      </p:sp>
+    </p:spTree>
+  </p:cSld>
+  <p:clrMapOvr>
+    <a:masterClrMapping/>
+  </p:clrMapOvr>
+</p:sld>
+</file>
+
+<file path=ppt/slides/slide31.xml><?xml version="1.0" encoding="utf-8"?>
+<p:sld xmlns:a="http://schemas.openxmlformats.org/drawingml/2006/main" xmlns:p="http://schemas.openxmlformats.org/presentationml/2006/main" xmlns:r="http://schemas.openxmlformats.org/officeDocument/2006/relationships">
+  <p:cSld>
+    <p:bg>
+      <p:bgPr>
+        <a:solidFill>
+          <a:srgbClr val="FFFFFF"/>
+        </a:solidFill>
+        <a:effectLst/>
+      </p:bgPr>
+    </p:bg>
+    <p:spTree>
+      <p:nvGrpSpPr>
+        <p:cNvPr id="1" name=""/>
+        <p:cNvGrpSpPr/>
+        <p:nvPr/>
+      </p:nvGrpSpPr>
+      <p:grpSpPr/>
+      <p:sp>
+        <p:nvSpPr>
+          <p:cNvPr id="2" name="Rectangle 1"/>
+          <p:cNvSpPr/>
+          <p:nvPr/>
+        </p:nvSpPr>
+        <p:spPr>
+          <a:xfrm>
+            <a:off x="0" y="0"/>
+            <a:ext cx="12191695" cy="960120"/>
+          </a:xfrm>
+          <a:prstGeom prst="rect">
+            <a:avLst/>
+          </a:prstGeom>
+          <a:solidFill>
+            <a:srgbClr val="1A237E"/>
+          </a:solidFill>
+          <a:ln>
+            <a:noFill/>
+          </a:ln>
+        </p:spPr>
+        <p:style>
+          <a:lnRef idx="1">
+            <a:schemeClr val="accent1"/>
+          </a:lnRef>
+          <a:fillRef idx="3">
+            <a:schemeClr val="accent1"/>
+          </a:fillRef>
+          <a:effectRef idx="2">
+            <a:schemeClr val="accent1"/>
+          </a:effectRef>
+          <a:fontRef idx="minor">
+            <a:schemeClr val="lt1"/>
+          </a:fontRef>
+        </p:style>
+        <p:txBody>
+          <a:bodyPr rtlCol="0" anchor="ctr"/>
+          <a:lstStyle/>
+          <a:p>
+            <a:pPr algn="ctr"/>
+          </a:p>
+        </p:txBody>
+      </p:sp>
+      <p:sp>
+        <p:nvSpPr>
+          <p:cNvPr id="3" name="TextBox 2"/>
+          <p:cNvSpPr txBox="1"/>
+          <p:nvPr/>
+        </p:nvSpPr>
+        <p:spPr>
+          <a:xfrm>
+            <a:off x="457200" y="164592"/>
+            <a:ext cx="11247120" cy="685800"/>
+          </a:xfrm>
+          <a:prstGeom prst="rect">
+            <a:avLst/>
+          </a:prstGeom>
+          <a:noFill/>
+        </p:spPr>
+        <p:txBody>
+          <a:bodyPr wrap="square">
+            <a:spAutoFit/>
+          </a:bodyPr>
+          <a:lstStyle/>
+          <a:p>
+            <a:r>
+              <a:rPr sz="2800" b="1">
+                <a:solidFill>
+                  <a:srgbClr val="FFFFFF"/>
+                </a:solidFill>
+              </a:rPr>
+              <a:t>Savunma Özeti (4 Kavram Alanı)</a:t>
+            </a:r>
+          </a:p>
+        </p:txBody>
+      </p:sp>
+      <p:sp>
+        <p:nvSpPr>
+          <p:cNvPr id="4" name="TextBox 3"/>
+          <p:cNvSpPr txBox="1"/>
+          <p:nvPr/>
+        </p:nvSpPr>
+        <p:spPr>
+          <a:xfrm>
+            <a:off x="640080" y="1234440"/>
+            <a:ext cx="10972800" cy="5212080"/>
+          </a:xfrm>
+          <a:prstGeom prst="rect">
+            <a:avLst/>
+          </a:prstGeom>
+          <a:noFill/>
+        </p:spPr>
+        <p:txBody>
+          <a:bodyPr wrap="square">
+            <a:spAutoFit/>
+          </a:bodyPr>
+          <a:lstStyle/>
           <a:p>
             <a:pPr>
               <a:spcAft>
-                <a:spcPts val="600"/>
+                <a:spcPts val="700"/>
               </a:spcAft>
             </a:pPr>
             <a:r>
-              <a:rPr sz="1700">
-                <a:solidFill>
-                  <a:srgbClr val="424242"/>
-                </a:solidFill>
-              </a:rPr>
-              <a:t>Eylem (3-D surekli, Box[-1,1]): ileri/geri hiz, yanal hiz, donus hizi.</a:t>
+              <a:rPr sz="1600">
+                <a:solidFill>
+                  <a:srgbClr val="373737"/>
+                </a:solidFill>
+              </a:rPr>
+              <a:t>Stokastik mi? EVET. Kanıt kod satırı: rüzgar (step), lidar (_compute_lidar), odom (_make_obs) gürültüsü =&gt; p(s'|s,a) dejenere değil.</a:t>
             </a:r>
           </a:p>
           <a:p>
             <a:pPr>
               <a:spcAft>
-                <a:spcPts val="600"/>
+                <a:spcPts val="700"/>
               </a:spcAft>
             </a:pPr>
             <a:r>
-              <a:rPr sz="1700">
-                <a:solidFill>
-                  <a:srgbClr val="424242"/>
-                </a:solidFill>
-              </a:rPr>
-              <a:t>Odul (kod step() ile birebir): +3 yeni voxel, +20 yeni oda, -40 carpisma, +60 tum odalar, kucuk zaman/tekrar/idle cezalari.</a:t>
+              <a:rPr sz="1600">
+                <a:solidFill>
+                  <a:srgbClr val="373737"/>
+                </a:solidFill>
+              </a:rPr>
+              <a:t>On/Off-policy? ON-POLICY. Davranış = hedef politika; replay buffer yok; veri kullanılıp atılır.</a:t>
             </a:r>
           </a:p>
           <a:p>
             <a:pPr>
               <a:spcAft>
-                <a:spcPts val="600"/>
+                <a:spcPts val="700"/>
               </a:spcAft>
             </a:pPr>
             <a:r>
-              <a:rPr sz="1700">
-                <a:solidFill>
-                  <a:srgbClr val="424242"/>
-                </a:solidFill>
-              </a:rPr>
-              <a:t>Toplam getiri ~ kesfedilen alan; carpisma agir cezali. Bolum: carpisma/6-oda ile biter, 600 adimda kesilir.</a:t>
+              <a:rPr sz="1600">
+                <a:solidFill>
+                  <a:srgbClr val="373737"/>
+                </a:solidFill>
+              </a:rPr>
+              <a:t>Markov? Yaklaşık sağlanır: lidar + hız (önceki eylem) + adım-deterministik engeller; gürültü/sınırlı görüş ile yalnızca yaklaşık.</a:t>
+            </a:r>
+          </a:p>
+          <a:p>
+            <a:pPr>
+              <a:spcAft>
+                <a:spcPts val="700"/>
+              </a:spcAft>
+            </a:pPr>
+            <a:r>
+              <a:rPr sz="1600">
+                <a:solidFill>
+                  <a:srgbClr val="373737"/>
+                </a:solidFill>
+              </a:rPr>
+              <a:t>POMDP mi? EVET. Gerçek durum != gözlem: odom gürültüsü, görüş-dışı duvarlar, engelin gelecek konumu gözlemde yok.</a:t>
+            </a:r>
+          </a:p>
+        </p:txBody>
+      </p:sp>
+    </p:spTree>
+  </p:cSld>
+  <p:clrMapOvr>
+    <a:masterClrMapping/>
+  </p:clrMapOvr>
+</p:sld>
+</file>
+
+<file path=ppt/slides/slide32.xml><?xml version="1.0" encoding="utf-8"?>
+<p:sld xmlns:a="http://schemas.openxmlformats.org/drawingml/2006/main" xmlns:p="http://schemas.openxmlformats.org/presentationml/2006/main" xmlns:r="http://schemas.openxmlformats.org/officeDocument/2006/relationships">
+  <p:cSld>
+    <p:bg>
+      <p:bgPr>
+        <a:solidFill>
+          <a:srgbClr val="FFFFFF"/>
+        </a:solidFill>
+        <a:effectLst/>
+      </p:bgPr>
+    </p:bg>
+    <p:spTree>
+      <p:nvGrpSpPr>
+        <p:cNvPr id="1" name=""/>
+        <p:cNvGrpSpPr/>
+        <p:nvPr/>
+      </p:nvGrpSpPr>
+      <p:grpSpPr/>
+      <p:sp>
+        <p:nvSpPr>
+          <p:cNvPr id="2" name="Rectangle 1"/>
+          <p:cNvSpPr/>
+          <p:nvPr/>
+        </p:nvSpPr>
+        <p:spPr>
+          <a:xfrm>
+            <a:off x="0" y="0"/>
+            <a:ext cx="12191695" cy="960120"/>
+          </a:xfrm>
+          <a:prstGeom prst="rect">
+            <a:avLst/>
+          </a:prstGeom>
+          <a:solidFill>
+            <a:srgbClr val="1A237E"/>
+          </a:solidFill>
+          <a:ln>
+            <a:noFill/>
+          </a:ln>
+        </p:spPr>
+        <p:style>
+          <a:lnRef idx="1">
+            <a:schemeClr val="accent1"/>
+          </a:lnRef>
+          <a:fillRef idx="3">
+            <a:schemeClr val="accent1"/>
+          </a:fillRef>
+          <a:effectRef idx="2">
+            <a:schemeClr val="accent1"/>
+          </a:effectRef>
+          <a:fontRef idx="minor">
+            <a:schemeClr val="lt1"/>
+          </a:fontRef>
+        </p:style>
+        <p:txBody>
+          <a:bodyPr rtlCol="0" anchor="ctr"/>
+          <a:lstStyle/>
+          <a:p>
+            <a:pPr algn="ctr"/>
+          </a:p>
+        </p:txBody>
+      </p:sp>
+      <p:sp>
+        <p:nvSpPr>
+          <p:cNvPr id="3" name="TextBox 2"/>
+          <p:cNvSpPr txBox="1"/>
+          <p:nvPr/>
+        </p:nvSpPr>
+        <p:spPr>
+          <a:xfrm>
+            <a:off x="457200" y="164592"/>
+            <a:ext cx="11247120" cy="685800"/>
+          </a:xfrm>
+          <a:prstGeom prst="rect">
+            <a:avLst/>
+          </a:prstGeom>
+          <a:noFill/>
+        </p:spPr>
+        <p:txBody>
+          <a:bodyPr wrap="square">
+            <a:spAutoFit/>
+          </a:bodyPr>
+          <a:lstStyle/>
+          <a:p>
+            <a:r>
+              <a:rPr sz="2800" b="1">
+                <a:solidFill>
+                  <a:srgbClr val="FFFFFF"/>
+                </a:solidFill>
+              </a:rPr>
+              <a:t>Sonuç</a:t>
+            </a:r>
+          </a:p>
+        </p:txBody>
+      </p:sp>
+      <p:sp>
+        <p:nvSpPr>
+          <p:cNvPr id="4" name="TextBox 3"/>
+          <p:cNvSpPr txBox="1"/>
+          <p:nvPr/>
+        </p:nvSpPr>
+        <p:spPr>
+          <a:xfrm>
+            <a:off x="640080" y="1234440"/>
+            <a:ext cx="10972800" cy="5212080"/>
+          </a:xfrm>
+          <a:prstGeom prst="rect">
+            <a:avLst/>
+          </a:prstGeom>
+          <a:noFill/>
+        </p:spPr>
+        <p:txBody>
+          <a:bodyPr wrap="square">
+            <a:spAutoFit/>
+          </a:bodyPr>
+          <a:lstStyle/>
+          <a:p>
+            <a:pPr>
+              <a:spcAft>
+                <a:spcPts val="700"/>
+              </a:spcAft>
+            </a:pPr>
+            <a:r>
+              <a:rPr sz="1800">
+                <a:solidFill>
+                  <a:srgbClr val="373737"/>
+                </a:solidFill>
+              </a:rPr>
+              <a:t>PPO, on-policy ve replay buffer'sız olmasına rağmen rastgele ve sezgisel taban politikalarını belirgin geçti.</a:t>
+            </a:r>
+          </a:p>
+          <a:p>
+            <a:pPr>
+              <a:spcAft>
+                <a:spcPts val="700"/>
+              </a:spcAft>
+            </a:pPr>
+            <a:r>
+              <a:rPr sz="1800">
+                <a:solidFill>
+                  <a:srgbClr val="373737"/>
+                </a:solidFill>
+              </a:rPr>
+              <a:t>5 hiperparametre (clip/ent/gamma/lr/vf) yeniden eğitilerek tarandı; seçilen taban değerler gürbüz orta nokta.</a:t>
+            </a:r>
+          </a:p>
+          <a:p>
+            <a:pPr>
+              <a:spcAft>
+                <a:spcPts val="700"/>
+              </a:spcAft>
+            </a:pPr>
+            <a:r>
+              <a:rPr sz="1800">
+                <a:solidFill>
+                  <a:srgbClr val="373737"/>
+                </a:solidFill>
+              </a:rPr>
+              <a:t>Aynı ortamda eğitilen SAC ile kıyas, on-policy/off-policy ayrımını gerçek eğrilerle gösterdi.</a:t>
+            </a:r>
+          </a:p>
+          <a:p>
+            <a:pPr>
+              <a:spcAft>
+                <a:spcPts val="700"/>
+              </a:spcAft>
+            </a:pPr>
+            <a:r>
+              <a:rPr sz="1800">
+                <a:solidFill>
+                  <a:srgbClr val="373737"/>
+                </a:solidFill>
+              </a:rPr>
+              <a:t>Tüm grafikler sonuclar/loglar/ altındaki ham loglardan yeniden üretilebilir.</a:t>
             </a:r>
           </a:p>
         </p:txBody>
@@ -4678,6 +8246,14 @@
 <file path=ppt/slides/slide4.xml><?xml version="1.0" encoding="utf-8"?>
 <p:sld xmlns:a="http://schemas.openxmlformats.org/drawingml/2006/main" xmlns:p="http://schemas.openxmlformats.org/presentationml/2006/main" xmlns:r="http://schemas.openxmlformats.org/officeDocument/2006/relationships">
   <p:cSld>
+    <p:bg>
+      <p:bgPr>
+        <a:solidFill>
+          <a:srgbClr val="FFFFFF"/>
+        </a:solidFill>
+        <a:effectLst/>
+      </p:bgPr>
+    </p:bg>
     <p:spTree>
       <p:nvGrpSpPr>
         <p:cNvPr id="1" name=""/>
@@ -4687,14 +8263,57 @@
       <p:grpSpPr/>
       <p:sp>
         <p:nvSpPr>
-          <p:cNvPr id="2" name="TextBox 1"/>
+          <p:cNvPr id="2" name="Rectangle 1"/>
+          <p:cNvSpPr/>
+          <p:nvPr/>
+        </p:nvSpPr>
+        <p:spPr>
+          <a:xfrm>
+            <a:off x="0" y="0"/>
+            <a:ext cx="12191695" cy="960120"/>
+          </a:xfrm>
+          <a:prstGeom prst="rect">
+            <a:avLst/>
+          </a:prstGeom>
+          <a:solidFill>
+            <a:srgbClr val="1A237E"/>
+          </a:solidFill>
+          <a:ln>
+            <a:noFill/>
+          </a:ln>
+        </p:spPr>
+        <p:style>
+          <a:lnRef idx="1">
+            <a:schemeClr val="accent1"/>
+          </a:lnRef>
+          <a:fillRef idx="3">
+            <a:schemeClr val="accent1"/>
+          </a:fillRef>
+          <a:effectRef idx="2">
+            <a:schemeClr val="accent1"/>
+          </a:effectRef>
+          <a:fontRef idx="minor">
+            <a:schemeClr val="lt1"/>
+          </a:fontRef>
+        </p:style>
+        <p:txBody>
+          <a:bodyPr rtlCol="0" anchor="ctr"/>
+          <a:lstStyle/>
+          <a:p>
+            <a:pPr algn="ctr"/>
+          </a:p>
+        </p:txBody>
+      </p:sp>
+      <p:sp>
+        <p:nvSpPr>
+          <p:cNvPr id="3" name="TextBox 2"/>
           <p:cNvSpPr txBox="1"/>
           <p:nvPr/>
         </p:nvSpPr>
         <p:spPr>
           <a:xfrm>
-            <a:off x="548640" y="274320"/>
-            <a:ext cx="11064240" cy="822960"/>
+            <a:off x="457200" y="164592"/>
+            <a:ext cx="11247120" cy="685800"/>
           </a:xfrm>
           <a:prstGeom prst="rect">
             <a:avLst/>
@@ -4708,26 +8327,26 @@
           <a:lstStyle/>
           <a:p>
             <a:r>
-              <a:rPr sz="3000" b="1">
-                <a:solidFill>
-                  <a:srgbClr val="1A237E"/>
-                </a:solidFill>
-              </a:rPr>
-              <a:t>PPO Algoritmasi</a:t>
-            </a:r>
-          </a:p>
-        </p:txBody>
-      </p:sp>
-      <p:sp>
-        <p:nvSpPr>
-          <p:cNvPr id="3" name="TextBox 2"/>
+              <a:rPr sz="2800" b="1">
+                <a:solidFill>
+                  <a:srgbClr val="FFFFFF"/>
+                </a:solidFill>
+              </a:rPr>
+              <a:t>Ortam ve MDP: Durum / Eylem / Ödül</a:t>
+            </a:r>
+          </a:p>
+        </p:txBody>
+      </p:sp>
+      <p:sp>
+        <p:nvSpPr>
+          <p:cNvPr id="4" name="TextBox 3"/>
           <p:cNvSpPr txBox="1"/>
           <p:nvPr/>
         </p:nvSpPr>
         <p:spPr>
           <a:xfrm>
-            <a:off x="640080" y="1280160"/>
-            <a:ext cx="10972800" cy="5029200"/>
+            <a:off x="640080" y="1234440"/>
+            <a:ext cx="10972800" cy="5212080"/>
           </a:xfrm>
           <a:prstGeom prst="rect">
             <a:avLst/>
@@ -4742,91 +8361,91 @@
           <a:p>
             <a:pPr>
               <a:spcAft>
-                <a:spcPts val="600"/>
+                <a:spcPts val="700"/>
               </a:spcAft>
             </a:pPr>
             <a:r>
               <a:rPr sz="1700">
                 <a:solidFill>
-                  <a:srgbClr val="424242"/>
-                </a:solidFill>
-              </a:rPr>
-              <a:t>Aktor-kritik, ON-POLICY politika gradyani. Aktor surekli eylemde Gauss dagilimi uretir; kritik durum degerini tahmin eder.</a:t>
+                  <a:srgbClr val="373737"/>
+                </a:solidFill>
+              </a:rPr>
+              <a:t>Ortam: 8 m yarıçaplı, 6 odalı bina; 64 ışınlı lidar; 3 hareketli engel.</a:t>
             </a:r>
           </a:p>
           <a:p>
             <a:pPr>
               <a:spcAft>
-                <a:spcPts val="600"/>
+                <a:spcPts val="700"/>
               </a:spcAft>
             </a:pPr>
             <a:r>
               <a:rPr sz="1700">
                 <a:solidFill>
-                  <a:srgbClr val="424242"/>
-                </a:solidFill>
-              </a:rPr>
-              <a:t>Clipped surrogate: yeni/eski politika orani 1 +/- 0.2 ile kirpilir =&gt; kararli, asiri sapmasiz guncelleme.</a:t>
+                  <a:srgbClr val="373737"/>
+                </a:solidFill>
+              </a:rPr>
+              <a:t>◆ SAC teslimiyle BAYT-BAYT aynı ortam (MD5 61ec1d6a); state Box(75), action Box(-1,1)³ birebir aynı.</a:t>
             </a:r>
           </a:p>
           <a:p>
             <a:pPr>
               <a:spcAft>
-                <a:spcPts val="600"/>
+                <a:spcPts val="700"/>
               </a:spcAft>
             </a:pPr>
             <a:r>
               <a:rPr sz="1700">
                 <a:solidFill>
-                  <a:srgbClr val="424242"/>
-                </a:solidFill>
-              </a:rPr>
-              <a:t>GAE (lambda=0.95) ile avantaj tahmini.</a:t>
+                  <a:srgbClr val="373737"/>
+                </a:solidFill>
+              </a:rPr>
+              <a:t>Durum (75-D, [0,1]): 64 lidar + yaw cos/sin + önceki eylem(3) + ilerleme/oda(2) + min_lidar/idle(2) + kapı/duvar(2).</a:t>
             </a:r>
           </a:p>
           <a:p>
             <a:pPr>
               <a:spcAft>
-                <a:spcPts val="600"/>
+                <a:spcPts val="700"/>
               </a:spcAft>
             </a:pPr>
             <a:r>
               <a:rPr sz="1700">
                 <a:solidFill>
-                  <a:srgbClr val="424242"/>
-                </a:solidFill>
-              </a:rPr>
-              <a:t>Replay buffer YOK: her rollout verisi birkac epoch kullanilip atilir =&gt; off-policy SAC/DQN'e gore daha az ornek-verimli.</a:t>
+                  <a:srgbClr val="373737"/>
+                </a:solidFill>
+              </a:rPr>
+              <a:t>Eylem (3-D sürekli): ileri/geri hız, yanal hız, dönüş hızı.</a:t>
             </a:r>
           </a:p>
           <a:p>
             <a:pPr>
               <a:spcAft>
-                <a:spcPts val="600"/>
+                <a:spcPts val="700"/>
               </a:spcAft>
             </a:pPr>
             <a:r>
               <a:rPr sz="1700">
                 <a:solidFill>
-                  <a:srgbClr val="424242"/>
-                </a:solidFill>
-              </a:rPr>
-              <a:t>Telafi: 8 paralel ortam + daha uzun egitim (1.5M adim/seed).</a:t>
+                  <a:srgbClr val="373737"/>
+                </a:solidFill>
+              </a:rPr>
+              <a:t>Ödül (kod step() ile birebir): +3 yeni voxel, +20 yeni oda, -40 çarpışma, +60 tüm odalar, küçük zaman/idle cezaları.</a:t>
             </a:r>
           </a:p>
           <a:p>
             <a:pPr>
               <a:spcAft>
-                <a:spcPts val="600"/>
+                <a:spcPts val="700"/>
               </a:spcAft>
             </a:pPr>
             <a:r>
               <a:rPr sz="1700">
                 <a:solidFill>
-                  <a:srgbClr val="424242"/>
-                </a:solidFill>
-              </a:rPr>
-              <a:t>Adil karsilastirma: learning_rate, gamma, ag mimarisi, num_envs SAC teslimiyle AYNI.</a:t>
+                  <a:srgbClr val="373737"/>
+                </a:solidFill>
+              </a:rPr>
+              <a:t>Bölüm: çarpışma veya 6-oda ile biter, 600 adımda kesilir.</a:t>
             </a:r>
           </a:p>
         </p:txBody>
@@ -4842,6 +8461,14 @@
 <file path=ppt/slides/slide5.xml><?xml version="1.0" encoding="utf-8"?>
 <p:sld xmlns:a="http://schemas.openxmlformats.org/drawingml/2006/main" xmlns:p="http://schemas.openxmlformats.org/presentationml/2006/main" xmlns:r="http://schemas.openxmlformats.org/officeDocument/2006/relationships">
   <p:cSld>
+    <p:bg>
+      <p:bgPr>
+        <a:solidFill>
+          <a:srgbClr val="FFFFFF"/>
+        </a:solidFill>
+        <a:effectLst/>
+      </p:bgPr>
+    </p:bg>
     <p:spTree>
       <p:nvGrpSpPr>
         <p:cNvPr id="1" name=""/>
@@ -4851,14 +8478,57 @@
       <p:grpSpPr/>
       <p:sp>
         <p:nvSpPr>
-          <p:cNvPr id="2" name="TextBox 1"/>
+          <p:cNvPr id="2" name="Rectangle 1"/>
+          <p:cNvSpPr/>
+          <p:nvPr/>
+        </p:nvSpPr>
+        <p:spPr>
+          <a:xfrm>
+            <a:off x="0" y="0"/>
+            <a:ext cx="12191695" cy="960120"/>
+          </a:xfrm>
+          <a:prstGeom prst="rect">
+            <a:avLst/>
+          </a:prstGeom>
+          <a:solidFill>
+            <a:srgbClr val="1A237E"/>
+          </a:solidFill>
+          <a:ln>
+            <a:noFill/>
+          </a:ln>
+        </p:spPr>
+        <p:style>
+          <a:lnRef idx="1">
+            <a:schemeClr val="accent1"/>
+          </a:lnRef>
+          <a:fillRef idx="3">
+            <a:schemeClr val="accent1"/>
+          </a:fillRef>
+          <a:effectRef idx="2">
+            <a:schemeClr val="accent1"/>
+          </a:effectRef>
+          <a:fontRef idx="minor">
+            <a:schemeClr val="lt1"/>
+          </a:fontRef>
+        </p:style>
+        <p:txBody>
+          <a:bodyPr rtlCol="0" anchor="ctr"/>
+          <a:lstStyle/>
+          <a:p>
+            <a:pPr algn="ctr"/>
+          </a:p>
+        </p:txBody>
+      </p:sp>
+      <p:sp>
+        <p:nvSpPr>
+          <p:cNvPr id="3" name="TextBox 2"/>
           <p:cNvSpPr txBox="1"/>
           <p:nvPr/>
         </p:nvSpPr>
         <p:spPr>
           <a:xfrm>
-            <a:off x="548640" y="274320"/>
-            <a:ext cx="11064240" cy="822960"/>
+            <a:off x="457200" y="164592"/>
+            <a:ext cx="11247120" cy="685800"/>
           </a:xfrm>
           <a:prstGeom prst="rect">
             <a:avLst/>
@@ -4872,26 +8542,26 @@
           <a:lstStyle/>
           <a:p>
             <a:r>
-              <a:rPr sz="3000" b="1">
-                <a:solidFill>
-                  <a:srgbClr val="1A237E"/>
-                </a:solidFill>
-              </a:rPr>
-              <a:t>Hiperparametreler (config.yaml)</a:t>
-            </a:r>
-          </a:p>
-        </p:txBody>
-      </p:sp>
-      <p:sp>
-        <p:nvSpPr>
-          <p:cNvPr id="3" name="TextBox 2"/>
+              <a:rPr sz="2800" b="1">
+                <a:solidFill>
+                  <a:srgbClr val="FFFFFF"/>
+                </a:solidFill>
+              </a:rPr>
+              <a:t>PPO Algoritması</a:t>
+            </a:r>
+          </a:p>
+        </p:txBody>
+      </p:sp>
+      <p:sp>
+        <p:nvSpPr>
+          <p:cNvPr id="4" name="TextBox 3"/>
           <p:cNvSpPr txBox="1"/>
           <p:nvPr/>
         </p:nvSpPr>
         <p:spPr>
           <a:xfrm>
-            <a:off x="640080" y="1280160"/>
-            <a:ext cx="10972800" cy="5029200"/>
+            <a:off x="640080" y="1234440"/>
+            <a:ext cx="10972800" cy="5212080"/>
           </a:xfrm>
           <a:prstGeom prst="rect">
             <a:avLst/>
@@ -4906,91 +8576,91 @@
           <a:p>
             <a:pPr>
               <a:spcAft>
-                <a:spcPts val="600"/>
+                <a:spcPts val="700"/>
               </a:spcAft>
             </a:pPr>
             <a:r>
               <a:rPr sz="1700">
                 <a:solidFill>
-                  <a:srgbClr val="424242"/>
-                </a:solidFill>
-              </a:rPr>
-              <a:t>learning_rate = 3e-4 (SAC ile ayni)   |   gamma = 0.98 (SAC ile ayni)   |   net_arch = [256,256]</a:t>
+                  <a:srgbClr val="373737"/>
+                </a:solidFill>
+              </a:rPr>
+              <a:t>Aktör-kritik, ON-POLICY politika gradyanı. Aktör sürekli eylemde Gauss dağılımı; kritik durum değeri.</a:t>
             </a:r>
           </a:p>
           <a:p>
             <a:pPr>
               <a:spcAft>
-                <a:spcPts val="600"/>
+                <a:spcPts val="700"/>
               </a:spcAft>
             </a:pPr>
             <a:r>
               <a:rPr sz="1700">
                 <a:solidFill>
-                  <a:srgbClr val="424242"/>
-                </a:solidFill>
-              </a:rPr>
-              <a:t>n_steps = 1024   |   batch_size = 512   |   n_epochs = 10   (rollout = 8x1024 = 8192)</a:t>
+                  <a:srgbClr val="373737"/>
+                </a:solidFill>
+              </a:rPr>
+              <a:t>Clipped surrogate: yeni/eski politika oranı 1 ± 0.2 ile kırpılır =&gt; kararlı, aşırı sapmasız güncelleme.</a:t>
             </a:r>
           </a:p>
           <a:p>
             <a:pPr>
               <a:spcAft>
-                <a:spcPts val="600"/>
+                <a:spcPts val="700"/>
               </a:spcAft>
             </a:pPr>
             <a:r>
               <a:rPr sz="1700">
                 <a:solidFill>
-                  <a:srgbClr val="424242"/>
-                </a:solidFill>
-              </a:rPr>
-              <a:t>clip_range = 0.2 (politika klipsi)   |   gae_lambda = 0.95 (avantaj yumusatma)</a:t>
+                  <a:srgbClr val="373737"/>
+                </a:solidFill>
+              </a:rPr>
+              <a:t>GAE (lambda=0.95) ile avantaj tahmini.</a:t>
             </a:r>
           </a:p>
           <a:p>
             <a:pPr>
               <a:spcAft>
-                <a:spcPts val="600"/>
+                <a:spcPts val="700"/>
               </a:spcAft>
             </a:pPr>
             <a:r>
               <a:rPr sz="1700">
                 <a:solidFill>
-                  <a:srgbClr val="424242"/>
-                </a:solidFill>
-              </a:rPr>
-              <a:t>ent_coef = 0.005 (entropi/kesif bonusu)   |   vf_coef = 0.5   |   max_grad_norm = 0.5</a:t>
+                  <a:srgbClr val="373737"/>
+                </a:solidFill>
+              </a:rPr>
+              <a:t>Replay buffer YOK: rollout verisi birkaç epoch kullanılıp atılır =&gt; off-policy'ye göre daha az örnek-verimli.</a:t>
             </a:r>
           </a:p>
           <a:p>
             <a:pPr>
               <a:spcAft>
-                <a:spcPts val="600"/>
+                <a:spcPts val="700"/>
               </a:spcAft>
             </a:pPr>
             <a:r>
               <a:rPr sz="1700">
                 <a:solidFill>
-                  <a:srgbClr val="424242"/>
-                </a:solidFill>
-              </a:rPr>
-              <a:t>num_envs = 8 (paralel toplama)   |   total_timesteps = 1.5M/seed   |   device = cpu (MLP icin onerilir)</a:t>
+                  <a:srgbClr val="373737"/>
+                </a:solidFill>
+              </a:rPr>
+              <a:t>Telafi: 8 paralel ortam + daha uzun eğitim (1.5M adım/seed).</a:t>
             </a:r>
           </a:p>
           <a:p>
             <a:pPr>
               <a:spcAft>
-                <a:spcPts val="600"/>
+                <a:spcPts val="700"/>
               </a:spcAft>
             </a:pPr>
             <a:r>
               <a:rPr sz="1700">
                 <a:solidFill>
-                  <a:srgbClr val="424242"/>
-                </a:solidFill>
-              </a:rPr>
-              <a:t>Sweep'te taranan: learning_rate {1e-4, 3e-4, 1e-3} ve ent_coef {0.0, 0.01, 0.05}.</a:t>
+                  <a:srgbClr val="373737"/>
+                </a:solidFill>
+              </a:rPr>
+              <a:t>Adil karşılaştırma: learning_rate, gamma, ağ mimarisi, num_envs SAC teslimiyle AYNI.</a:t>
             </a:r>
           </a:p>
         </p:txBody>
@@ -5006,6 +8676,14 @@
 <file path=ppt/slides/slide6.xml><?xml version="1.0" encoding="utf-8"?>
 <p:sld xmlns:a="http://schemas.openxmlformats.org/drawingml/2006/main" xmlns:p="http://schemas.openxmlformats.org/presentationml/2006/main" xmlns:r="http://schemas.openxmlformats.org/officeDocument/2006/relationships">
   <p:cSld>
+    <p:bg>
+      <p:bgPr>
+        <a:solidFill>
+          <a:srgbClr val="FFFFFF"/>
+        </a:solidFill>
+        <a:effectLst/>
+      </p:bgPr>
+    </p:bg>
     <p:spTree>
       <p:nvGrpSpPr>
         <p:cNvPr id="1" name=""/>
@@ -5015,14 +8693,57 @@
       <p:grpSpPr/>
       <p:sp>
         <p:nvSpPr>
-          <p:cNvPr id="2" name="TextBox 1"/>
+          <p:cNvPr id="2" name="Rectangle 1"/>
+          <p:cNvSpPr/>
+          <p:nvPr/>
+        </p:nvSpPr>
+        <p:spPr>
+          <a:xfrm>
+            <a:off x="0" y="0"/>
+            <a:ext cx="12191695" cy="960120"/>
+          </a:xfrm>
+          <a:prstGeom prst="rect">
+            <a:avLst/>
+          </a:prstGeom>
+          <a:solidFill>
+            <a:srgbClr val="1A237E"/>
+          </a:solidFill>
+          <a:ln>
+            <a:noFill/>
+          </a:ln>
+        </p:spPr>
+        <p:style>
+          <a:lnRef idx="1">
+            <a:schemeClr val="accent1"/>
+          </a:lnRef>
+          <a:fillRef idx="3">
+            <a:schemeClr val="accent1"/>
+          </a:fillRef>
+          <a:effectRef idx="2">
+            <a:schemeClr val="accent1"/>
+          </a:effectRef>
+          <a:fontRef idx="minor">
+            <a:schemeClr val="lt1"/>
+          </a:fontRef>
+        </p:style>
+        <p:txBody>
+          <a:bodyPr rtlCol="0" anchor="ctr"/>
+          <a:lstStyle/>
+          <a:p>
+            <a:pPr algn="ctr"/>
+          </a:p>
+        </p:txBody>
+      </p:sp>
+      <p:sp>
+        <p:nvSpPr>
+          <p:cNvPr id="3" name="TextBox 2"/>
           <p:cNvSpPr txBox="1"/>
           <p:nvPr/>
         </p:nvSpPr>
         <p:spPr>
           <a:xfrm>
-            <a:off x="548640" y="274320"/>
-            <a:ext cx="11064240" cy="822960"/>
+            <a:off x="457200" y="164592"/>
+            <a:ext cx="11247120" cy="685800"/>
           </a:xfrm>
           <a:prstGeom prst="rect">
             <a:avLst/>
@@ -5036,26 +8757,26 @@
           <a:lstStyle/>
           <a:p>
             <a:r>
-              <a:rPr sz="3000" b="1">
-                <a:solidFill>
-                  <a:srgbClr val="1A237E"/>
-                </a:solidFill>
-              </a:rPr>
-              <a:t>Deney Duzeni</a:t>
-            </a:r>
-          </a:p>
-        </p:txBody>
-      </p:sp>
-      <p:sp>
-        <p:nvSpPr>
-          <p:cNvPr id="3" name="TextBox 2"/>
+              <a:rPr sz="2800" b="1">
+                <a:solidFill>
+                  <a:srgbClr val="FFFFFF"/>
+                </a:solidFill>
+              </a:rPr>
+              <a:t>Hiperparametreler ve Deney Düzeni</a:t>
+            </a:r>
+          </a:p>
+        </p:txBody>
+      </p:sp>
+      <p:sp>
+        <p:nvSpPr>
+          <p:cNvPr id="4" name="TextBox 3"/>
           <p:cNvSpPr txBox="1"/>
           <p:nvPr/>
         </p:nvSpPr>
         <p:spPr>
           <a:xfrm>
-            <a:off x="640080" y="1280160"/>
-            <a:ext cx="10972800" cy="5029200"/>
+            <a:off x="640080" y="1234440"/>
+            <a:ext cx="10972800" cy="5212080"/>
           </a:xfrm>
           <a:prstGeom prst="rect">
             <a:avLst/>
@@ -5070,76 +8791,91 @@
           <a:p>
             <a:pPr>
               <a:spcAft>
-                <a:spcPts val="600"/>
+                <a:spcPts val="700"/>
               </a:spcAft>
             </a:pPr>
             <a:r>
-              <a:rPr sz="1800">
-                <a:solidFill>
-                  <a:srgbClr val="424242"/>
-                </a:solidFill>
-              </a:rPr>
-              <a:t>5 seed: 7, 13, 42, 123, 2025 (&gt;=5 zorunlu). Her seed ayri politika.</a:t>
+              <a:rPr sz="1600">
+                <a:solidFill>
+                  <a:srgbClr val="373737"/>
+                </a:solidFill>
+              </a:rPr>
+              <a:t>config.yaml: lr=3e-4, gamma=0.98, net=[256,256], n_steps=1024, batch=512, n_epochs=10, clip=0.2, gae=0.95, ent=0.005, vf=0.5.</a:t>
             </a:r>
           </a:p>
           <a:p>
             <a:pPr>
               <a:spcAft>
-                <a:spcPts val="600"/>
+                <a:spcPts val="700"/>
               </a:spcAft>
             </a:pPr>
             <a:r>
-              <a:rPr sz="1800">
-                <a:solidFill>
-                  <a:srgbClr val="424242"/>
-                </a:solidFill>
-              </a:rPr>
-              <a:t>Egitim sirasinda her 10k adimda deterministik eval; en iyi model saklanir.</a:t>
+              <a:rPr sz="1600">
+                <a:solidFill>
+                  <a:srgbClr val="373737"/>
+                </a:solidFill>
+              </a:rPr>
+              <a:t>5 seed: 7,13,42,123,2025 (&gt;=5 zorunlu). Her seed ayrı politika; her 10k adımda deterministik eval.</a:t>
             </a:r>
           </a:p>
           <a:p>
             <a:pPr>
               <a:spcAft>
-                <a:spcPts val="600"/>
+                <a:spcPts val="700"/>
               </a:spcAft>
             </a:pPr>
             <a:r>
-              <a:rPr sz="1800">
-                <a:solidFill>
-                  <a:srgbClr val="424242"/>
-                </a:solidFill>
-              </a:rPr>
-              <a:t>Final degerlendirme: 20 bolum DETERMINISTIK (greedy) koSu (egitim egrisi tek basina kanit degil).</a:t>
+              <a:rPr sz="1600">
+                <a:solidFill>
+                  <a:srgbClr val="373737"/>
+                </a:solidFill>
+              </a:rPr>
+              <a:t>Final: 20 bölüm DETERMİNİSTİK (greedy) koşu (eğitim eğrisi tek başına kanıt değil).</a:t>
             </a:r>
           </a:p>
           <a:p>
             <a:pPr>
               <a:spcAft>
-                <a:spcPts val="600"/>
+                <a:spcPts val="700"/>
               </a:spcAft>
             </a:pPr>
             <a:r>
-              <a:rPr sz="1800">
-                <a:solidFill>
-                  <a:srgbClr val="424242"/>
-                </a:solidFill>
-              </a:rPr>
-              <a:t>Baseline: rastgele + sezgisel politika, ayni ortamda 20'ser bolum.</a:t>
+              <a:rPr sz="1600">
+                <a:solidFill>
+                  <a:srgbClr val="373737"/>
+                </a:solidFill>
+              </a:rPr>
+              <a:t>Baseline: rastgele + sezgisel politika, aynı ortamda.</a:t>
             </a:r>
           </a:p>
           <a:p>
             <a:pPr>
               <a:spcAft>
-                <a:spcPts val="600"/>
+                <a:spcPts val="700"/>
               </a:spcAft>
             </a:pPr>
             <a:r>
-              <a:rPr sz="1800">
-                <a:solidFill>
-                  <a:srgbClr val="424242"/>
-                </a:solidFill>
-              </a:rPr>
-              <a:t>Tum rastgelelik numpy.random.default_rng ile; import gym / np.random.seed YOK.</a:t>
+              <a:rPr sz="1600">
+                <a:solidFill>
+                  <a:srgbClr val="373737"/>
+                </a:solidFill>
+              </a:rPr>
+              <a:t>HP taraması (yeniden eğitim): clip_range, ent_coef, gamma, learning_rate, vf_coef -&gt; her biri &gt;=3 değer × 5 seed.</a:t>
+            </a:r>
+          </a:p>
+          <a:p>
+            <a:pPr>
+              <a:spcAft>
+                <a:spcPts val="700"/>
+              </a:spcAft>
+            </a:pPr>
+            <a:r>
+              <a:rPr sz="1600">
+                <a:solidFill>
+                  <a:srgbClr val="373737"/>
+                </a:solidFill>
+              </a:rPr>
+              <a:t>Tüm rastgelelik numpy.random.default_rng; import gym / np.random.seed YOK.</a:t>
             </a:r>
           </a:p>
         </p:txBody>
@@ -5155,6 +8891,14 @@
 <file path=ppt/slides/slide7.xml><?xml version="1.0" encoding="utf-8"?>
 <p:sld xmlns:a="http://schemas.openxmlformats.org/drawingml/2006/main" xmlns:p="http://schemas.openxmlformats.org/presentationml/2006/main" xmlns:r="http://schemas.openxmlformats.org/officeDocument/2006/relationships">
   <p:cSld>
+    <p:bg>
+      <p:bgPr>
+        <a:solidFill>
+          <a:srgbClr val="FFFFFF"/>
+        </a:solidFill>
+        <a:effectLst/>
+      </p:bgPr>
+    </p:bg>
     <p:spTree>
       <p:nvGrpSpPr>
         <p:cNvPr id="1" name=""/>
@@ -5164,14 +8908,57 @@
       <p:grpSpPr/>
       <p:sp>
         <p:nvSpPr>
-          <p:cNvPr id="2" name="TextBox 1"/>
+          <p:cNvPr id="2" name="Rectangle 1"/>
+          <p:cNvSpPr/>
+          <p:nvPr/>
+        </p:nvSpPr>
+        <p:spPr>
+          <a:xfrm>
+            <a:off x="0" y="0"/>
+            <a:ext cx="12191695" cy="960120"/>
+          </a:xfrm>
+          <a:prstGeom prst="rect">
+            <a:avLst/>
+          </a:prstGeom>
+          <a:solidFill>
+            <a:srgbClr val="1A237E"/>
+          </a:solidFill>
+          <a:ln>
+            <a:noFill/>
+          </a:ln>
+        </p:spPr>
+        <p:style>
+          <a:lnRef idx="1">
+            <a:schemeClr val="accent1"/>
+          </a:lnRef>
+          <a:fillRef idx="3">
+            <a:schemeClr val="accent1"/>
+          </a:fillRef>
+          <a:effectRef idx="2">
+            <a:schemeClr val="accent1"/>
+          </a:effectRef>
+          <a:fontRef idx="minor">
+            <a:schemeClr val="lt1"/>
+          </a:fontRef>
+        </p:style>
+        <p:txBody>
+          <a:bodyPr rtlCol="0" anchor="ctr"/>
+          <a:lstStyle/>
+          <a:p>
+            <a:pPr algn="ctr"/>
+          </a:p>
+        </p:txBody>
+      </p:sp>
+      <p:sp>
+        <p:nvSpPr>
+          <p:cNvPr id="3" name="TextBox 2"/>
           <p:cNvSpPr txBox="1"/>
           <p:nvPr/>
         </p:nvSpPr>
         <p:spPr>
           <a:xfrm>
-            <a:off x="548640" y="274320"/>
-            <a:ext cx="11064240" cy="822960"/>
+            <a:off x="457200" y="164592"/>
+            <a:ext cx="11247120" cy="685800"/>
           </a:xfrm>
           <a:prstGeom prst="rect">
             <a:avLst/>
@@ -5185,19 +8972,19 @@
           <a:lstStyle/>
           <a:p>
             <a:r>
-              <a:rPr sz="2600" b="1">
-                <a:solidFill>
-                  <a:srgbClr val="1A237E"/>
-                </a:solidFill>
-              </a:rPr>
-              <a:t>Grafik 1 - Ogrenme Egrisi (PPO egitim)</a:t>
+              <a:rPr sz="2300" b="1">
+                <a:solidFill>
+                  <a:srgbClr val="FFFFFF"/>
+                </a:solidFill>
+              </a:rPr>
+              <a:t>Grafik 1 — Öğrenme Eğrisi (PPO eğitim)</a:t>
             </a:r>
           </a:p>
         </p:txBody>
       </p:sp>
       <p:pic>
         <p:nvPicPr>
-          <p:cNvPr id="3" name="Picture 2" descr="1_ogrenme_egrisi.png"/>
+          <p:cNvPr id="4" name="Picture 3" descr="1_ogrenme_egrisi.png"/>
           <p:cNvPicPr>
             <a:picLocks noChangeAspect="1"/>
           </p:cNvPicPr>
@@ -5211,8 +8998,8 @@
         </p:blipFill>
         <p:spPr>
           <a:xfrm>
-            <a:off x="365760" y="1188720"/>
-            <a:ext cx="8406884" cy="4937760"/>
+            <a:off x="320040" y="1143000"/>
+            <a:ext cx="8487536" cy="5029200"/>
           </a:xfrm>
           <a:prstGeom prst="rect">
             <a:avLst/>
@@ -5221,14 +9008,14 @@
       </p:pic>
       <p:sp>
         <p:nvSpPr>
-          <p:cNvPr id="4" name="TextBox 3"/>
+          <p:cNvPr id="5" name="TextBox 4"/>
           <p:cNvSpPr txBox="1"/>
           <p:nvPr/>
         </p:nvSpPr>
         <p:spPr>
           <a:xfrm>
-            <a:off x="7863840" y="1280160"/>
-            <a:ext cx="4023360" cy="4937760"/>
+            <a:off x="7955279" y="1188720"/>
+            <a:ext cx="4023360" cy="5212080"/>
           </a:xfrm>
           <a:prstGeom prst="rect">
             <a:avLst/>
@@ -5244,23 +9031,70 @@
             <a:r>
               <a:rPr sz="1600" b="1">
                 <a:solidFill>
-                  <a:srgbClr val="1A237E"/>
+                  <a:srgbClr val="1565C0"/>
                 </a:solidFill>
               </a:rPr>
               <a:t>Yorum</a:t>
             </a:r>
           </a:p>
           <a:p>
-            <a:r>
-              <a:rPr sz="1400">
-                <a:solidFill>
-                  <a:srgbClr val="424242"/>
-                </a:solidFill>
-              </a:rPr>
-              <a:t>Gozlem: Getiri ~290'dan ~0.5M'de ~470'e cikip 0.6M sonrasi ~480'de plato; std bandi daralir.
-Karsilastirma: 5 tohum ayni seyirde, sonda fark cok kucuk (tohuma kararli).
-Aciklama: Clipped surrogate sinirli adimlarla guncelledigi icin getiri sicramasiz artar; plato 6 odayi gezme tavanidir.
-Sonuc: 1.5M adim yakinsamaya fazlasiyla yeter; daha fazlasi getiriyi artirmaz.</a:t>
+            <a:pPr>
+              <a:spcAft>
+                <a:spcPts val="500"/>
+              </a:spcAft>
+            </a:pPr>
+            <a:r>
+              <a:rPr sz="1250">
+                <a:solidFill>
+                  <a:srgbClr val="373737"/>
+                </a:solidFill>
+              </a:rPr>
+              <a:t>Gözlem: Getiri ~290'dan ~0.5M'de ~470'e çıkıp 0.6M sonrası ~480'de plato; std bandı daralır.</a:t>
+            </a:r>
+          </a:p>
+          <a:p>
+            <a:pPr>
+              <a:spcAft>
+                <a:spcPts val="500"/>
+              </a:spcAft>
+            </a:pPr>
+            <a:r>
+              <a:rPr sz="1250">
+                <a:solidFill>
+                  <a:srgbClr val="373737"/>
+                </a:solidFill>
+              </a:rPr>
+              <a:t>Karşılaştırma: 5 tohum aynı seyirde; sonda fark çok küçük (tohuma kararlı).</a:t>
+            </a:r>
+          </a:p>
+          <a:p>
+            <a:pPr>
+              <a:spcAft>
+                <a:spcPts val="500"/>
+              </a:spcAft>
+            </a:pPr>
+            <a:r>
+              <a:rPr sz="1250">
+                <a:solidFill>
+                  <a:srgbClr val="373737"/>
+                </a:solidFill>
+              </a:rPr>
+              <a:t>Açıklama: Clipped surrogate sınırlı adımlarla güncellediği için getiri sıçramasız artar; plato 6 odayı gezme tavanıdır.</a:t>
+            </a:r>
+          </a:p>
+          <a:p>
+            <a:pPr>
+              <a:spcAft>
+                <a:spcPts val="500"/>
+              </a:spcAft>
+            </a:pPr>
+            <a:r>
+              <a:rPr sz="1250">
+                <a:solidFill>
+                  <a:srgbClr val="373737"/>
+                </a:solidFill>
+              </a:rPr>
+              <a:t>Sonuç: 1.5M adım yakınsamaya fazlasıyla yeter (bkz. uzun-ufuk grafiği).</a:t>
             </a:r>
           </a:p>
         </p:txBody>
@@ -5276,6 +9110,14 @@
 <file path=ppt/slides/slide8.xml><?xml version="1.0" encoding="utf-8"?>
 <p:sld xmlns:a="http://schemas.openxmlformats.org/drawingml/2006/main" xmlns:p="http://schemas.openxmlformats.org/presentationml/2006/main" xmlns:r="http://schemas.openxmlformats.org/officeDocument/2006/relationships">
   <p:cSld>
+    <p:bg>
+      <p:bgPr>
+        <a:solidFill>
+          <a:srgbClr val="FFFFFF"/>
+        </a:solidFill>
+        <a:effectLst/>
+      </p:bgPr>
+    </p:bg>
     <p:spTree>
       <p:nvGrpSpPr>
         <p:cNvPr id="1" name=""/>
@@ -5285,14 +9127,57 @@
       <p:grpSpPr/>
       <p:sp>
         <p:nvSpPr>
-          <p:cNvPr id="2" name="TextBox 1"/>
+          <p:cNvPr id="2" name="Rectangle 1"/>
+          <p:cNvSpPr/>
+          <p:nvPr/>
+        </p:nvSpPr>
+        <p:spPr>
+          <a:xfrm>
+            <a:off x="0" y="0"/>
+            <a:ext cx="12191695" cy="960120"/>
+          </a:xfrm>
+          <a:prstGeom prst="rect">
+            <a:avLst/>
+          </a:prstGeom>
+          <a:solidFill>
+            <a:srgbClr val="1A237E"/>
+          </a:solidFill>
+          <a:ln>
+            <a:noFill/>
+          </a:ln>
+        </p:spPr>
+        <p:style>
+          <a:lnRef idx="1">
+            <a:schemeClr val="accent1"/>
+          </a:lnRef>
+          <a:fillRef idx="3">
+            <a:schemeClr val="accent1"/>
+          </a:fillRef>
+          <a:effectRef idx="2">
+            <a:schemeClr val="accent1"/>
+          </a:effectRef>
+          <a:fontRef idx="minor">
+            <a:schemeClr val="lt1"/>
+          </a:fontRef>
+        </p:style>
+        <p:txBody>
+          <a:bodyPr rtlCol="0" anchor="ctr"/>
+          <a:lstStyle/>
+          <a:p>
+            <a:pPr algn="ctr"/>
+          </a:p>
+        </p:txBody>
+      </p:sp>
+      <p:sp>
+        <p:nvSpPr>
+          <p:cNvPr id="3" name="TextBox 2"/>
           <p:cNvSpPr txBox="1"/>
           <p:nvPr/>
         </p:nvSpPr>
         <p:spPr>
           <a:xfrm>
-            <a:off x="548640" y="274320"/>
-            <a:ext cx="11064240" cy="822960"/>
+            <a:off x="457200" y="164592"/>
+            <a:ext cx="11247120" cy="685800"/>
           </a:xfrm>
           <a:prstGeom prst="rect">
             <a:avLst/>
@@ -5306,19 +9191,19 @@
           <a:lstStyle/>
           <a:p>
             <a:r>
-              <a:rPr sz="2600" b="1">
-                <a:solidFill>
-                  <a:srgbClr val="1A237E"/>
-                </a:solidFill>
-              </a:rPr>
-              <a:t>Grafik 2 - Test (Eval) Egrisi</a:t>
+              <a:rPr sz="2300" b="1">
+                <a:solidFill>
+                  <a:srgbClr val="FFFFFF"/>
+                </a:solidFill>
+              </a:rPr>
+              <a:t>Grafik 1b — Öğrenme Eğrisi (x = Episode sayısı)</a:t>
             </a:r>
           </a:p>
         </p:txBody>
       </p:sp>
       <p:pic>
         <p:nvPicPr>
-          <p:cNvPr id="3" name="Picture 2" descr="2_eval_egrisi.png"/>
+          <p:cNvPr id="4" name="Picture 3" descr="1b_ogrenme_egrisi_episode.png"/>
           <p:cNvPicPr>
             <a:picLocks noChangeAspect="1"/>
           </p:cNvPicPr>
@@ -5332,8 +9217,8 @@
         </p:blipFill>
         <p:spPr>
           <a:xfrm>
-            <a:off x="365760" y="1188720"/>
-            <a:ext cx="8406884" cy="4937760"/>
+            <a:off x="320040" y="1143000"/>
+            <a:ext cx="8487536" cy="5029200"/>
           </a:xfrm>
           <a:prstGeom prst="rect">
             <a:avLst/>
@@ -5342,14 +9227,14 @@
       </p:pic>
       <p:sp>
         <p:nvSpPr>
-          <p:cNvPr id="4" name="TextBox 3"/>
+          <p:cNvPr id="5" name="TextBox 4"/>
           <p:cNvSpPr txBox="1"/>
           <p:nvPr/>
         </p:nvSpPr>
         <p:spPr>
           <a:xfrm>
-            <a:off x="7863840" y="1280160"/>
-            <a:ext cx="4023360" cy="4937760"/>
+            <a:off x="7955279" y="1188720"/>
+            <a:ext cx="4023360" cy="5212080"/>
           </a:xfrm>
           <a:prstGeom prst="rect">
             <a:avLst/>
@@ -5365,23 +9250,70 @@
             <a:r>
               <a:rPr sz="1600" b="1">
                 <a:solidFill>
-                  <a:srgbClr val="1A237E"/>
+                  <a:srgbClr val="1565C0"/>
                 </a:solidFill>
               </a:rPr>
               <a:t>Yorum</a:t>
             </a:r>
           </a:p>
           <a:p>
-            <a:r>
-              <a:rPr sz="1400">
-                <a:solidFill>
-                  <a:srgbClr val="424242"/>
-                </a:solidFill>
-              </a:rPr>
-              <a:t>Gozlem: Deterministik eval ~200'den ~0.4M'de ~470'e cikip egitim platosuna oturur.
-Karsilastirma: Greedy eval ile stokastik egitim ayni seviyede; fark ihmal edilebilir.
-Aciklama: Yuksek getiri rastgele kesiften degil ogrenilen politikadan gelir; greedy'de de basari korunur.
-Sonuc: Politika genellesmistir; egitim egrisi degil ayri eval ile dogrulandi (B2).</a:t>
+            <a:pPr>
+              <a:spcAft>
+                <a:spcPts val="500"/>
+              </a:spcAft>
+            </a:pPr>
+            <a:r>
+              <a:rPr sz="1250">
+                <a:solidFill>
+                  <a:srgbClr val="373737"/>
+                </a:solidFill>
+              </a:rPr>
+              <a:t>Gözlem: Episode ekseninde de getiri ilk birkaç bin bölümde yükselip platoya oturur.</a:t>
+            </a:r>
+          </a:p>
+          <a:p>
+            <a:pPr>
+              <a:spcAft>
+                <a:spcPts val="500"/>
+              </a:spcAft>
+            </a:pPr>
+            <a:r>
+              <a:rPr sz="1250">
+                <a:solidFill>
+                  <a:srgbClr val="373737"/>
+                </a:solidFill>
+              </a:rPr>
+              <a:t>Karşılaştırma: Adım-ekseni eğrisiyle aynı hikâye; sadece x birimi farklı (hoca: episode-bazlı eğri).</a:t>
+            </a:r>
+          </a:p>
+          <a:p>
+            <a:pPr>
+              <a:spcAft>
+                <a:spcPts val="500"/>
+              </a:spcAft>
+            </a:pPr>
+            <a:r>
+              <a:rPr sz="1250">
+                <a:solidFill>
+                  <a:srgbClr val="373737"/>
+                </a:solidFill>
+              </a:rPr>
+              <a:t>Açıklama: Bölüm uzunluğu öğrendikçe uzar (çarpışma azalır), bu yüzden episode ve adım eksenleri hafif farklı ölçeklenir.</a:t>
+            </a:r>
+          </a:p>
+          <a:p>
+            <a:pPr>
+              <a:spcAft>
+                <a:spcPts val="500"/>
+              </a:spcAft>
+            </a:pPr>
+            <a:r>
+              <a:rPr sz="1250">
+                <a:solidFill>
+                  <a:srgbClr val="373737"/>
+                </a:solidFill>
+              </a:rPr>
+              <a:t>Sonuç: Yakınsama hem adım hem episode bazında doğrulanır.</a:t>
             </a:r>
           </a:p>
         </p:txBody>
@@ -5397,6 +9329,14 @@
 <file path=ppt/slides/slide9.xml><?xml version="1.0" encoding="utf-8"?>
 <p:sld xmlns:a="http://schemas.openxmlformats.org/drawingml/2006/main" xmlns:p="http://schemas.openxmlformats.org/presentationml/2006/main" xmlns:r="http://schemas.openxmlformats.org/officeDocument/2006/relationships">
   <p:cSld>
+    <p:bg>
+      <p:bgPr>
+        <a:solidFill>
+          <a:srgbClr val="FFFFFF"/>
+        </a:solidFill>
+        <a:effectLst/>
+      </p:bgPr>
+    </p:bg>
     <p:spTree>
       <p:nvGrpSpPr>
         <p:cNvPr id="1" name=""/>
@@ -5406,14 +9346,57 @@
       <p:grpSpPr/>
       <p:sp>
         <p:nvSpPr>
-          <p:cNvPr id="2" name="TextBox 1"/>
+          <p:cNvPr id="2" name="Rectangle 1"/>
+          <p:cNvSpPr/>
+          <p:nvPr/>
+        </p:nvSpPr>
+        <p:spPr>
+          <a:xfrm>
+            <a:off x="0" y="0"/>
+            <a:ext cx="12191695" cy="960120"/>
+          </a:xfrm>
+          <a:prstGeom prst="rect">
+            <a:avLst/>
+          </a:prstGeom>
+          <a:solidFill>
+            <a:srgbClr val="1A237E"/>
+          </a:solidFill>
+          <a:ln>
+            <a:noFill/>
+          </a:ln>
+        </p:spPr>
+        <p:style>
+          <a:lnRef idx="1">
+            <a:schemeClr val="accent1"/>
+          </a:lnRef>
+          <a:fillRef idx="3">
+            <a:schemeClr val="accent1"/>
+          </a:fillRef>
+          <a:effectRef idx="2">
+            <a:schemeClr val="accent1"/>
+          </a:effectRef>
+          <a:fontRef idx="minor">
+            <a:schemeClr val="lt1"/>
+          </a:fontRef>
+        </p:style>
+        <p:txBody>
+          <a:bodyPr rtlCol="0" anchor="ctr"/>
+          <a:lstStyle/>
+          <a:p>
+            <a:pPr algn="ctr"/>
+          </a:p>
+        </p:txBody>
+      </p:sp>
+      <p:sp>
+        <p:nvSpPr>
+          <p:cNvPr id="3" name="TextBox 2"/>
           <p:cNvSpPr txBox="1"/>
           <p:nvPr/>
         </p:nvSpPr>
         <p:spPr>
           <a:xfrm>
-            <a:off x="548640" y="274320"/>
-            <a:ext cx="11064240" cy="822960"/>
+            <a:off x="457200" y="164592"/>
+            <a:ext cx="11247120" cy="685800"/>
           </a:xfrm>
           <a:prstGeom prst="rect">
             <a:avLst/>
@@ -5427,19 +9410,19 @@
           <a:lstStyle/>
           <a:p>
             <a:r>
-              <a:rPr sz="2600" b="1">
-                <a:solidFill>
-                  <a:srgbClr val="1A237E"/>
-                </a:solidFill>
-              </a:rPr>
-              <a:t>Grafik 3 - Loss Egrisi (policy gradient &amp; value)</a:t>
+              <a:rPr sz="2300" b="1">
+                <a:solidFill>
+                  <a:srgbClr val="FFFFFF"/>
+                </a:solidFill>
+              </a:rPr>
+              <a:t>Grafik 2 — Test (Eval) Eğrisi</a:t>
             </a:r>
           </a:p>
         </p:txBody>
       </p:sp>
       <p:pic>
         <p:nvPicPr>
-          <p:cNvPr id="3" name="Picture 2" descr="3_loss_egrisi.png"/>
+          <p:cNvPr id="4" name="Picture 3" descr="2_eval_egrisi.png"/>
           <p:cNvPicPr>
             <a:picLocks noChangeAspect="1"/>
           </p:cNvPicPr>
@@ -5453,8 +9436,8 @@
         </p:blipFill>
         <p:spPr>
           <a:xfrm>
-            <a:off x="365760" y="1188720"/>
-            <a:ext cx="9132136" cy="4937760"/>
+            <a:off x="320040" y="1143000"/>
+            <a:ext cx="8528838" cy="5029200"/>
           </a:xfrm>
           <a:prstGeom prst="rect">
             <a:avLst/>
@@ -5463,14 +9446,14 @@
       </p:pic>
       <p:sp>
         <p:nvSpPr>
-          <p:cNvPr id="4" name="TextBox 3"/>
+          <p:cNvPr id="5" name="TextBox 4"/>
           <p:cNvSpPr txBox="1"/>
           <p:nvPr/>
         </p:nvSpPr>
         <p:spPr>
           <a:xfrm>
-            <a:off x="7863840" y="1280160"/>
-            <a:ext cx="4023360" cy="4937760"/>
+            <a:off x="7955279" y="1188720"/>
+            <a:ext cx="4023360" cy="5212080"/>
           </a:xfrm>
           <a:prstGeom prst="rect">
             <a:avLst/>
@@ -5486,23 +9469,70 @@
             <a:r>
               <a:rPr sz="1600" b="1">
                 <a:solidFill>
-                  <a:srgbClr val="1A237E"/>
+                  <a:srgbClr val="1565C0"/>
                 </a:solidFill>
               </a:rPr>
               <a:t>Yorum</a:t>
             </a:r>
           </a:p>
           <a:p>
-            <a:r>
-              <a:rPr sz="1400">
-                <a:solidFill>
-                  <a:srgbClr val="424242"/>
-                </a:solidFill>
-              </a:rPr>
-              <a:t>Gozlem: Critic (value) loss ~0.3M'de ~140 tepe yapip ~30'a duser; actor loss kucuk (-0.0065..-0.004) ve yatay.
-Karsilastirma: Critic tepesi getirinin en hizli yukseldigi doneme denk gelir.
-Aciklama: Buyuk odullar kesfedilince deger hedefleri buyur (critic zorlanir), politika oturunca duser; actor kucuk cunku klips guncellemeyi sinirlar.
-Sonuc: Critic loss dususu saglikli yakinsama, actor loss yataylik kararliligi gosterir.</a:t>
+            <a:pPr>
+              <a:spcAft>
+                <a:spcPts val="500"/>
+              </a:spcAft>
+            </a:pPr>
+            <a:r>
+              <a:rPr sz="1250">
+                <a:solidFill>
+                  <a:srgbClr val="373737"/>
+                </a:solidFill>
+              </a:rPr>
+              <a:t>Gözlem: Deterministik eval ~200'den ~0.4M'de ~470'e çıkıp eğitim platosuna oturur.</a:t>
+            </a:r>
+          </a:p>
+          <a:p>
+            <a:pPr>
+              <a:spcAft>
+                <a:spcPts val="500"/>
+              </a:spcAft>
+            </a:pPr>
+            <a:r>
+              <a:rPr sz="1250">
+                <a:solidFill>
+                  <a:srgbClr val="373737"/>
+                </a:solidFill>
+              </a:rPr>
+              <a:t>Karşılaştırma: Greedy eval ile stokastik eğitim aynı seviyede; fark ihmal edilebilir.</a:t>
+            </a:r>
+          </a:p>
+          <a:p>
+            <a:pPr>
+              <a:spcAft>
+                <a:spcPts val="500"/>
+              </a:spcAft>
+            </a:pPr>
+            <a:r>
+              <a:rPr sz="1250">
+                <a:solidFill>
+                  <a:srgbClr val="373737"/>
+                </a:solidFill>
+              </a:rPr>
+              <a:t>Açıklama: Yüksek getiri rastgele keşiften değil öğrenilen politikadan gelir; greedy'de de başarı korunur.</a:t>
+            </a:r>
+          </a:p>
+          <a:p>
+            <a:pPr>
+              <a:spcAft>
+                <a:spcPts val="500"/>
+              </a:spcAft>
+            </a:pPr>
+            <a:r>
+              <a:rPr sz="1250">
+                <a:solidFill>
+                  <a:srgbClr val="373737"/>
+                </a:solidFill>
+              </a:rPr>
+              <a:t>Sonuç: Politika genelleşmiştir; ayrı deterministik koşu ile doğrulandı (rehber B2).</a:t>
             </a:r>
           </a:p>
         </p:txBody>

--- a/deliverables/sunum/220202046_sunum.pptx
+++ b/deliverables/sunum/220202046_sunum.pptx
@@ -37,6 +37,7 @@
     <p:sldId id="285" r:id="rId36"/>
     <p:sldId id="286" r:id="rId37"/>
     <p:sldId id="287" r:id="rId38"/>
+    <p:sldId id="288" r:id="rId39"/>
   </p:sldIdLst>
   <p:sldSz cx="12191695" cy="6858000" type="screen4x3"/>
   <p:notesSz cx="6858000" cy="9144000"/>
@@ -6229,7 +6230,7 @@
                             <a:srgbClr val="FFFFFF"/>
                           </a:solidFill>
                         </a:rPr>
-                        <a:t>SAC (aynı ortam)</a:t>
+                        <a:t>SAC (M.A. Albayrak, 220202082)</a:t>
                       </a:r>
                     </a:p>
                   </a:txBody>
@@ -6354,7 +6355,7 @@
                     <a:p>
                       <a:r>
                         <a:rPr sz="1400" b="0"/>
-                        <a:t>Ort. eval getirisi</a:t>
+                        <a:t>Ort. getiri (5 tohum)</a:t>
                       </a:r>
                     </a:p>
                   </a:txBody>
@@ -6388,7 +6389,7 @@
                     <a:p>
                       <a:r>
                         <a:rPr sz="1400" b="0"/>
-                        <a:t>337.0</a:t>
+                        <a:t>314.6</a:t>
                       </a:r>
                     </a:p>
                   </a:txBody>
@@ -6407,7 +6408,60 @@
                     <a:p>
                       <a:r>
                         <a:rPr sz="1400" b="0"/>
-                        <a:t>Başarı oranı (6 oda)</a:t>
+                        <a:t>Ort. oda (/6)</a:t>
+                      </a:r>
+                    </a:p>
+                  </a:txBody>
+                  <a:tcPr>
+                    <a:solidFill>
+                      <a:srgbClr val="F2F4FB"/>
+                    </a:solidFill>
+                  </a:tcPr>
+                </a:tc>
+                <a:tc>
+                  <a:txBody>
+                    <a:bodyPr/>
+                    <a:lstStyle/>
+                    <a:p>
+                      <a:r>
+                        <a:rPr sz="1400" b="1"/>
+                        <a:t>5.80</a:t>
+                      </a:r>
+                    </a:p>
+                  </a:txBody>
+                  <a:tcPr>
+                    <a:solidFill>
+                      <a:srgbClr val="F2F4FB"/>
+                    </a:solidFill>
+                  </a:tcPr>
+                </a:tc>
+                <a:tc>
+                  <a:txBody>
+                    <a:bodyPr/>
+                    <a:lstStyle/>
+                    <a:p>
+                      <a:r>
+                        <a:rPr sz="1400" b="0"/>
+                        <a:t>4.83</a:t>
+                      </a:r>
+                    </a:p>
+                  </a:txBody>
+                  <a:tcPr>
+                    <a:solidFill>
+                      <a:srgbClr val="F2F4FB"/>
+                    </a:solidFill>
+                  </a:tcPr>
+                </a:tc>
+              </a:tr>
+              <a:tr h="522514">
+                <a:tc>
+                  <a:txBody>
+                    <a:bodyPr/>
+                    <a:lstStyle/>
+                    <a:p>
+                      <a:r>
+                        <a:rPr sz="1400" b="0"/>
+                        <a:t>Tam-keşif başarı oranı</a:t>
                       </a:r>
                     </a:p>
                   </a:txBody>
@@ -6452,7 +6506,7 @@
                   </a:tcPr>
                 </a:tc>
               </a:tr>
-              <a:tr h="522514">
+              <a:tr h="522516">
                 <a:tc>
                   <a:txBody>
                     <a:bodyPr/>
@@ -6460,7 +6514,7 @@
                     <a:p>
                       <a:r>
                         <a:rPr sz="1400" b="0"/>
-                        <a:t>Ort. kapsama %</a:t>
+                        <a:t>En iyi tohum getirisi</a:t>
                       </a:r>
                     </a:p>
                   </a:txBody>
@@ -6477,7 +6531,7 @@
                     <a:p>
                       <a:r>
                         <a:rPr sz="1400" b="1"/>
-                        <a:t>96.7</a:t>
+                        <a:t>474.6</a:t>
                       </a:r>
                     </a:p>
                   </a:txBody>
@@ -6494,60 +6548,7 @@
                     <a:p>
                       <a:r>
                         <a:rPr sz="1400" b="0"/>
-                        <a:t>92.8</a:t>
-                      </a:r>
-                    </a:p>
-                  </a:txBody>
-                  <a:tcPr>
-                    <a:solidFill>
-                      <a:srgbClr val="F2F4FB"/>
-                    </a:solidFill>
-                  </a:tcPr>
-                </a:tc>
-              </a:tr>
-              <a:tr h="522516">
-                <a:tc>
-                  <a:txBody>
-                    <a:bodyPr/>
-                    <a:lstStyle/>
-                    <a:p>
-                      <a:r>
-                        <a:rPr sz="1400" b="0"/>
-                        <a:t>Eval çarpışma oranı</a:t>
-                      </a:r>
-                    </a:p>
-                  </a:txBody>
-                  <a:tcPr>
-                    <a:solidFill>
-                      <a:srgbClr val="F2F4FB"/>
-                    </a:solidFill>
-                  </a:tcPr>
-                </a:tc>
-                <a:tc>
-                  <a:txBody>
-                    <a:bodyPr/>
-                    <a:lstStyle/>
-                    <a:p>
-                      <a:r>
-                        <a:rPr sz="1400" b="1"/>
-                        <a:t>0.04</a:t>
-                      </a:r>
-                    </a:p>
-                  </a:txBody>
-                  <a:tcPr>
-                    <a:solidFill>
-                      <a:srgbClr val="F2F4FB"/>
-                    </a:solidFill>
-                  </a:tcPr>
-                </a:tc>
-                <a:tc>
-                  <a:txBody>
-                    <a:bodyPr/>
-                    <a:lstStyle/>
-                    <a:p>
-                      <a:r>
-                        <a:rPr sz="1400" b="0"/>
-                        <a:t>0.15</a:t>
+                        <a:t>393.7</a:t>
                       </a:r>
                     </a:p>
                   </a:txBody>
@@ -6712,14 +6713,14 @@
                   <a:srgbClr val="FFFFFF"/>
                 </a:solidFill>
               </a:rPr>
-              <a:t>PPO vs SAC — Öğrenme Eğrisi</a:t>
+              <a:t>PPO ↔ SAC — Öğrenme Eğrisi</a:t>
             </a:r>
           </a:p>
         </p:txBody>
       </p:sp>
       <p:pic>
         <p:nvPicPr>
-          <p:cNvPr id="4" name="Picture 3" descr="C1_ogrenme_ppo_vs_sac.png"/>
+          <p:cNvPr id="4" name="Picture 3" descr="KIYAS_1_ogrenme.png"/>
           <p:cNvPicPr>
             <a:picLocks noChangeAspect="1"/>
           </p:cNvPicPr>
@@ -6733,8 +6734,8 @@
         </p:blipFill>
         <p:spPr>
           <a:xfrm>
-            <a:off x="320040" y="1143000"/>
-            <a:ext cx="8487536" cy="5029200"/>
+            <a:off x="548640" y="1188720"/>
+            <a:ext cx="11064240" cy="5918748"/>
           </a:xfrm>
           <a:prstGeom prst="rect">
             <a:avLst/>
@@ -6749,8 +6750,8 @@
         </p:nvSpPr>
         <p:spPr>
           <a:xfrm>
-            <a:off x="7955279" y="1188720"/>
-            <a:ext cx="4023360" cy="5212080"/>
+            <a:off x="548640" y="5806440"/>
+            <a:ext cx="11064240" cy="914400"/>
           </a:xfrm>
           <a:prstGeom prst="rect">
             <a:avLst/>
@@ -6764,72 +6765,12 @@
           <a:lstStyle/>
           <a:p>
             <a:r>
-              <a:rPr sz="1600" b="1">
-                <a:solidFill>
-                  <a:srgbClr val="1565C0"/>
-                </a:solidFill>
-              </a:rPr>
-              <a:t>Yorum</a:t>
-            </a:r>
-          </a:p>
-          <a:p>
-            <a:pPr>
-              <a:spcAft>
-                <a:spcPts val="500"/>
-              </a:spcAft>
-            </a:pPr>
-            <a:r>
-              <a:rPr sz="1250">
+              <a:rPr sz="1100">
                 <a:solidFill>
                   <a:srgbClr val="373737"/>
                 </a:solidFill>
               </a:rPr>
-              <a:t>Gözlem: SAC ilk birkaç yüz bin adımda PPO'dan hızlı yükselir; PPO daha çok adımla daha yüksek/kararlı platoya ulaşır.</a:t>
-            </a:r>
-          </a:p>
-          <a:p>
-            <a:pPr>
-              <a:spcAft>
-                <a:spcPts val="500"/>
-              </a:spcAft>
-            </a:pPr>
-            <a:r>
-              <a:rPr sz="1250">
-                <a:solidFill>
-                  <a:srgbClr val="373737"/>
-                </a:solidFill>
-              </a:rPr>
-              <a:t>Karşılaştırma: Tam ufukta PPO platosu daha yüksek.</a:t>
-            </a:r>
-          </a:p>
-          <a:p>
-            <a:pPr>
-              <a:spcAft>
-                <a:spcPts val="500"/>
-              </a:spcAft>
-            </a:pPr>
-            <a:r>
-              <a:rPr sz="1250">
-                <a:solidFill>
-                  <a:srgbClr val="373737"/>
-                </a:solidFill>
-              </a:rPr>
-              <a:t>Açıklama: SAC off-policy (replay buffer =&gt; adım başına verimli); PPO on-policy (rollout bir kez kullanılır).</a:t>
-            </a:r>
-          </a:p>
-          <a:p>
-            <a:pPr>
-              <a:spcAft>
-                <a:spcPts val="500"/>
-              </a:spcAft>
-            </a:pPr>
-            <a:r>
-              <a:rPr sz="1250">
-                <a:solidFill>
-                  <a:srgbClr val="373737"/>
-                </a:solidFill>
-              </a:rPr>
-              <a:t>Sonuç: Off-policy az adımda hızlı, on-policy çok adımla yüksek nihai başarı.</a:t>
+              <a:t>Sol PPO (bu çalışma), sağ SAC (M.A. Albayrak). PPO platosu (~480) SAC'ın (~390) üzerinde ve daha kararlı; SAC off-policy olduğu için daha az adımda yakınsar (örnek-verimli).</a:t>
             </a:r>
           </a:p>
         </p:txBody>
@@ -6931,14 +6872,14 @@
                   <a:srgbClr val="FFFFFF"/>
                 </a:solidFill>
               </a:rPr>
-              <a:t>PPO vs SAC — Örnek Verimliliği</a:t>
+              <a:t>PPO ↔ SAC — Tohum 123 Detay Paneli</a:t>
             </a:r>
           </a:p>
         </p:txBody>
       </p:sp>
       <p:pic>
         <p:nvPicPr>
-          <p:cNvPr id="4" name="Picture 3" descr="C2_ornek_verimliligi.png"/>
+          <p:cNvPr id="4" name="Picture 3" descr="KIYAS_3_perseed.png"/>
           <p:cNvPicPr>
             <a:picLocks noChangeAspect="1"/>
           </p:cNvPicPr>
@@ -6952,8 +6893,8 @@
         </p:blipFill>
         <p:spPr>
           <a:xfrm>
-            <a:off x="320040" y="1143000"/>
-            <a:ext cx="8487536" cy="5029200"/>
+            <a:off x="548640" y="1188720"/>
+            <a:ext cx="11064240" cy="5799575"/>
           </a:xfrm>
           <a:prstGeom prst="rect">
             <a:avLst/>
@@ -6968,8 +6909,8 @@
         </p:nvSpPr>
         <p:spPr>
           <a:xfrm>
-            <a:off x="7955279" y="1188720"/>
-            <a:ext cx="4023360" cy="5212080"/>
+            <a:off x="548640" y="5806440"/>
+            <a:ext cx="11064240" cy="914400"/>
           </a:xfrm>
           <a:prstGeom prst="rect">
             <a:avLst/>
@@ -6983,72 +6924,12 @@
           <a:lstStyle/>
           <a:p>
             <a:r>
-              <a:rPr sz="1600" b="1">
-                <a:solidFill>
-                  <a:srgbClr val="1565C0"/>
-                </a:solidFill>
-              </a:rPr>
-              <a:t>Yorum</a:t>
-            </a:r>
-          </a:p>
-          <a:p>
-            <a:pPr>
-              <a:spcAft>
-                <a:spcPts val="500"/>
-              </a:spcAft>
-            </a:pPr>
-            <a:r>
-              <a:rPr sz="1250">
+              <a:rPr sz="1100">
                 <a:solidFill>
                   <a:srgbClr val="373737"/>
                 </a:solidFill>
               </a:rPr>
-              <a:t>Gözlem: Aynı env-adım penceresinde SAC üstte başlar.</a:t>
-            </a:r>
-          </a:p>
-          <a:p>
-            <a:pPr>
-              <a:spcAft>
-                <a:spcPts val="500"/>
-              </a:spcAft>
-            </a:pPr>
-            <a:r>
-              <a:rPr sz="1250">
-                <a:solidFill>
-                  <a:srgbClr val="373737"/>
-                </a:solidFill>
-              </a:rPr>
-              <a:t>Karşılaştırma: SAC erken avantajlı; PPO sonradan yakalar/geçer.</a:t>
-            </a:r>
-          </a:p>
-          <a:p>
-            <a:pPr>
-              <a:spcAft>
-                <a:spcPts val="500"/>
-              </a:spcAft>
-            </a:pPr>
-            <a:r>
-              <a:rPr sz="1250">
-                <a:solidFill>
-                  <a:srgbClr val="373737"/>
-                </a:solidFill>
-              </a:rPr>
-              <a:t>Açıklama: Replay buffer her deneyimi defalarca kullandığından SAC aynı adımda daha çok öğrenir.</a:t>
-            </a:r>
-          </a:p>
-          <a:p>
-            <a:pPr>
-              <a:spcAft>
-                <a:spcPts val="500"/>
-              </a:spcAft>
-            </a:pPr>
-            <a:r>
-              <a:rPr sz="1250">
-                <a:solidFill>
-                  <a:srgbClr val="373737"/>
-                </a:solidFill>
-              </a:rPr>
-              <a:t>Sonuç: Örnek-bütçesi kısıtlı senaryolar için SAC, bütçe bolca ise PPO avantajlı.</a:t>
+              <a:t>Dört panelde de (getiri/eval/kapsama/oda) PPO eğrileri daha yüksek ve daha az dalgalı; ikisi de coverage'ı %90+ ve odayı 5-6'ya taşır. İki algoritma da görevi çözer, PPO daha yüksek tavanla.</a:t>
             </a:r>
           </a:p>
         </p:txBody>
@@ -7150,14 +7031,14 @@
                   <a:srgbClr val="FFFFFF"/>
                 </a:solidFill>
               </a:rPr>
-              <a:t>PPO vs SAC — Deterministik Eval</a:t>
+              <a:t>PPO ↔ SAC — Baseline (görev metrikleri)</a:t>
             </a:r>
           </a:p>
         </p:txBody>
       </p:sp>
       <p:pic>
         <p:nvPicPr>
-          <p:cNvPr id="4" name="Picture 3" descr="C3_eval_ppo_vs_sac.png"/>
+          <p:cNvPr id="4" name="Picture 3" descr="KIYAS_5_baseline.png"/>
           <p:cNvPicPr>
             <a:picLocks noChangeAspect="1"/>
           </p:cNvPicPr>
@@ -7171,8 +7052,8 @@
         </p:blipFill>
         <p:spPr>
           <a:xfrm>
-            <a:off x="320040" y="1143000"/>
-            <a:ext cx="8528838" cy="5029200"/>
+            <a:off x="548640" y="1188720"/>
+            <a:ext cx="11064240" cy="2665456"/>
           </a:xfrm>
           <a:prstGeom prst="rect">
             <a:avLst/>
@@ -7187,8 +7068,8 @@
         </p:nvSpPr>
         <p:spPr>
           <a:xfrm>
-            <a:off x="7955279" y="1188720"/>
-            <a:ext cx="4023360" cy="5212080"/>
+            <a:off x="548640" y="5806440"/>
+            <a:ext cx="11064240" cy="914400"/>
           </a:xfrm>
           <a:prstGeom prst="rect">
             <a:avLst/>
@@ -7202,72 +7083,12 @@
           <a:lstStyle/>
           <a:p>
             <a:r>
-              <a:rPr sz="1600" b="1">
-                <a:solidFill>
-                  <a:srgbClr val="1565C0"/>
-                </a:solidFill>
-              </a:rPr>
-              <a:t>Yorum</a:t>
-            </a:r>
-          </a:p>
-          <a:p>
-            <a:pPr>
-              <a:spcAft>
-                <a:spcPts val="500"/>
-              </a:spcAft>
-            </a:pPr>
-            <a:r>
-              <a:rPr sz="1250">
+              <a:rPr sz="1100">
                 <a:solidFill>
                   <a:srgbClr val="373737"/>
                 </a:solidFill>
               </a:rPr>
-              <a:t>Gözlem: Greedy eval eğrisinde PPO platosu SAC'ın üzerinde.</a:t>
-            </a:r>
-          </a:p>
-          <a:p>
-            <a:pPr>
-              <a:spcAft>
-                <a:spcPts val="500"/>
-              </a:spcAft>
-            </a:pPr>
-            <a:r>
-              <a:rPr sz="1250">
-                <a:solidFill>
-                  <a:srgbClr val="373737"/>
-                </a:solidFill>
-              </a:rPr>
-              <a:t>Karşılaştırma: İkisi de stokastik eğitimle tutarlı; fark nihai seviyede.</a:t>
-            </a:r>
-          </a:p>
-          <a:p>
-            <a:pPr>
-              <a:spcAft>
-                <a:spcPts val="500"/>
-              </a:spcAft>
-            </a:pPr>
-            <a:r>
-              <a:rPr sz="1250">
-                <a:solidFill>
-                  <a:srgbClr val="373737"/>
-                </a:solidFill>
-              </a:rPr>
-              <a:t>Açıklama: PPO'nun klips'i kararlı/yüksek-tavanlı politika öğrenir.</a:t>
-            </a:r>
-          </a:p>
-          <a:p>
-            <a:pPr>
-              <a:spcAft>
-                <a:spcPts val="500"/>
-              </a:spcAft>
-            </a:pPr>
-            <a:r>
-              <a:rPr sz="1250">
-                <a:solidFill>
-                  <a:srgbClr val="373737"/>
-                </a:solidFill>
-              </a:rPr>
-              <a:t>Sonuç: Bu ortamda PPO nihai görev başarısında önde.</a:t>
+              <a:t>Her ikisi de rastgele/sezgiseli geçer; tam-keşif başarısında PPO (~%96) SAC'ın (~%60 en iyi, %34 ort.) belirgin önünde.</a:t>
             </a:r>
           </a:p>
         </p:txBody>
@@ -7369,14 +7190,14 @@
                   <a:srgbClr val="FFFFFF"/>
                 </a:solidFill>
               </a:rPr>
-              <a:t>PPO vs SAC — Oda Keşif Süreci</a:t>
+              <a:t>PPO ↔ SAC — Hiperparametre Duyarlılığı</a:t>
             </a:r>
           </a:p>
         </p:txBody>
       </p:sp>
       <p:pic>
         <p:nvPicPr>
-          <p:cNvPr id="4" name="Picture 3" descr="C5_oda_ppo_vs_sac.png"/>
+          <p:cNvPr id="4" name="Picture 3" descr="KIYAS_4_hiperparametre.png"/>
           <p:cNvPicPr>
             <a:picLocks noChangeAspect="1"/>
           </p:cNvPicPr>
@@ -7390,8 +7211,8 @@
         </p:blipFill>
         <p:spPr>
           <a:xfrm>
-            <a:off x="320040" y="1143000"/>
-            <a:ext cx="8379958" cy="5029200"/>
+            <a:off x="548640" y="1188720"/>
+            <a:ext cx="11064240" cy="3236264"/>
           </a:xfrm>
           <a:prstGeom prst="rect">
             <a:avLst/>
@@ -7406,8 +7227,8 @@
         </p:nvSpPr>
         <p:spPr>
           <a:xfrm>
-            <a:off x="7955279" y="1188720"/>
-            <a:ext cx="4023360" cy="5212080"/>
+            <a:off x="548640" y="5806440"/>
+            <a:ext cx="11064240" cy="914400"/>
           </a:xfrm>
           <a:prstGeom prst="rect">
             <a:avLst/>
@@ -7421,72 +7242,12 @@
           <a:lstStyle/>
           <a:p>
             <a:r>
-              <a:rPr sz="1600" b="1">
-                <a:solidFill>
-                  <a:srgbClr val="1565C0"/>
-                </a:solidFill>
-              </a:rPr>
-              <a:t>Yorum</a:t>
-            </a:r>
-          </a:p>
-          <a:p>
-            <a:pPr>
-              <a:spcAft>
-                <a:spcPts val="500"/>
-              </a:spcAft>
-            </a:pPr>
-            <a:r>
-              <a:rPr sz="1250">
+              <a:rPr sz="1100">
                 <a:solidFill>
                   <a:srgbClr val="373737"/>
                 </a:solidFill>
               </a:rPr>
-              <a:t>Gözlem: PPO ortalama oda sayısında 6'ya daha çok yaklaşır.</a:t>
-            </a:r>
-          </a:p>
-          <a:p>
-            <a:pPr>
-              <a:spcAft>
-                <a:spcPts val="500"/>
-              </a:spcAft>
-            </a:pPr>
-            <a:r>
-              <a:rPr sz="1250">
-                <a:solidFill>
-                  <a:srgbClr val="373737"/>
-                </a:solidFill>
-              </a:rPr>
-              <a:t>Karşılaştırma: SAC hızlı başlar ama nihai oda kapsaması PPO'nun gerisinde.</a:t>
-            </a:r>
-          </a:p>
-          <a:p>
-            <a:pPr>
-              <a:spcAft>
-                <a:spcPts val="500"/>
-              </a:spcAft>
-            </a:pPr>
-            <a:r>
-              <a:rPr sz="1250">
-                <a:solidFill>
-                  <a:srgbClr val="373737"/>
-                </a:solidFill>
-              </a:rPr>
-              <a:t>Açıklama: PPO'nun yüksek-tavanlı politikası sistematik oda-oda keşfi daha iyi yapar.</a:t>
-            </a:r>
-          </a:p>
-          <a:p>
-            <a:pPr>
-              <a:spcAft>
-                <a:spcPts val="500"/>
-              </a:spcAft>
-            </a:pPr>
-            <a:r>
-              <a:rPr sz="1250">
-                <a:solidFill>
-                  <a:srgbClr val="373737"/>
-                </a:solidFill>
-              </a:rPr>
-              <a:t>Sonuç: Görev metriğinde (oda) PPO üstün.</a:t>
+              <a:t>İki algoritmada da orta hiperparametre değerleri en iyi (keşif-sömürü dengesi); sonuç ince ayara aşırı duyarlı değil.</a:t>
             </a:r>
           </a:p>
         </p:txBody>
@@ -7803,14 +7564,14 @@
                   <a:srgbClr val="FFFFFF"/>
                 </a:solidFill>
               </a:rPr>
-              <a:t>PPO vs SAC — Final Metrik Barları</a:t>
+              <a:t>PPO ↔ SAC — Loss Eğrileri</a:t>
             </a:r>
           </a:p>
         </p:txBody>
       </p:sp>
       <p:pic>
         <p:nvPicPr>
-          <p:cNvPr id="4" name="Picture 3" descr="C4_final_metrik_bar.png"/>
+          <p:cNvPr id="4" name="Picture 3" descr="KIYAS_2_loss.png"/>
           <p:cNvPicPr>
             <a:picLocks noChangeAspect="1"/>
           </p:cNvPicPr>
@@ -7825,7 +7586,7 @@
         <p:spPr>
           <a:xfrm>
             <a:off x="548640" y="1188720"/>
-            <a:ext cx="11064240" cy="2690856"/>
+            <a:ext cx="11064240" cy="5509830"/>
           </a:xfrm>
           <a:prstGeom prst="rect">
             <a:avLst/>
@@ -7860,7 +7621,7 @@
                   <a:srgbClr val="373737"/>
                 </a:solidFill>
               </a:rPr>
-              <a:t>Gözlem: Getiri, oda, kapsama, başarı PPO'da yüksek; çarpışma PPO'da düşük.  Karşılaştırma: Dört kalite ölçütünde PPO önde, güvenlikte (çarpışma) de daha iyi.  Açıklama: Aynı ortam/seed/protokolde fark yalnızca algoritmadan gelir.  Sonuç: Bu çok-odalı keşif görevinde PPO nihai başarı/güvenlikte üstün.</a:t>
+              <a:t>PPO'da klips güncellemeleri sıkı sınırlar (actor loss küçük/yatay); SAC'ta entropi+replay ile loss daha geniş salınır. İkisi de kararlı.</a:t>
             </a:r>
           </a:p>
         </p:txBody>
@@ -7957,26 +7718,50 @@
           <a:lstStyle/>
           <a:p>
             <a:r>
-              <a:rPr sz="2800" b="1">
+              <a:rPr sz="2300" b="1">
                 <a:solidFill>
                   <a:srgbClr val="FFFFFF"/>
                 </a:solidFill>
               </a:rPr>
-              <a:t>Savunma Özeti (4 Kavram Alanı)</a:t>
-            </a:r>
-          </a:p>
-        </p:txBody>
-      </p:sp>
-      <p:sp>
-        <p:nvSpPr>
-          <p:cNvPr id="4" name="TextBox 3"/>
+              <a:t>PPO ↔ SAC — γ × lr Araması</a:t>
+            </a:r>
+          </a:p>
+        </p:txBody>
+      </p:sp>
+      <p:pic>
+        <p:nvPicPr>
+          <p:cNvPr id="4" name="Picture 3" descr="KIYAS_6_heatmap.png"/>
+          <p:cNvPicPr>
+            <a:picLocks noChangeAspect="1"/>
+          </p:cNvPicPr>
+          <p:nvPr/>
+        </p:nvPicPr>
+        <p:blipFill>
+          <a:blip r:embed="rId2"/>
+          <a:stretch>
+            <a:fillRect/>
+          </a:stretch>
+        </p:blipFill>
+        <p:spPr>
+          <a:xfrm>
+            <a:off x="548640" y="1188720"/>
+            <a:ext cx="11064240" cy="4271988"/>
+          </a:xfrm>
+          <a:prstGeom prst="rect">
+            <a:avLst/>
+          </a:prstGeom>
+        </p:spPr>
+      </p:pic>
+      <p:sp>
+        <p:nvSpPr>
+          <p:cNvPr id="5" name="TextBox 4"/>
           <p:cNvSpPr txBox="1"/>
           <p:nvPr/>
         </p:nvSpPr>
         <p:spPr>
           <a:xfrm>
-            <a:off x="640080" y="1234440"/>
-            <a:ext cx="10972800" cy="5212080"/>
+            <a:off x="548640" y="5806440"/>
+            <a:ext cx="11064240" cy="914400"/>
           </a:xfrm>
           <a:prstGeom prst="rect">
             <a:avLst/>
@@ -7989,63 +7774,13 @@
           </a:bodyPr>
           <a:lstStyle/>
           <a:p>
-            <a:pPr>
-              <a:spcAft>
-                <a:spcPts val="700"/>
-              </a:spcAft>
-            </a:pPr>
-            <a:r>
-              <a:rPr sz="1600">
+            <a:r>
+              <a:rPr sz="1100">
                 <a:solidFill>
                   <a:srgbClr val="373737"/>
                 </a:solidFill>
               </a:rPr>
-              <a:t>Stokastik mi? EVET. Kanıt kod satırı: rüzgar (step), lidar (_compute_lidar), odom (_make_obs) gürültüsü =&gt; p(s'|s,a) dejenere değil.</a:t>
-            </a:r>
-          </a:p>
-          <a:p>
-            <a:pPr>
-              <a:spcAft>
-                <a:spcPts val="700"/>
-              </a:spcAft>
-            </a:pPr>
-            <a:r>
-              <a:rPr sz="1600">
-                <a:solidFill>
-                  <a:srgbClr val="373737"/>
-                </a:solidFill>
-              </a:rPr>
-              <a:t>On/Off-policy? ON-POLICY. Davranış = hedef politika; replay buffer yok; veri kullanılıp atılır.</a:t>
-            </a:r>
-          </a:p>
-          <a:p>
-            <a:pPr>
-              <a:spcAft>
-                <a:spcPts val="700"/>
-              </a:spcAft>
-            </a:pPr>
-            <a:r>
-              <a:rPr sz="1600">
-                <a:solidFill>
-                  <a:srgbClr val="373737"/>
-                </a:solidFill>
-              </a:rPr>
-              <a:t>Markov? Yaklaşık sağlanır: lidar + hız (önceki eylem) + adım-deterministik engeller; gürültü/sınırlı görüş ile yalnızca yaklaşık.</a:t>
-            </a:r>
-          </a:p>
-          <a:p>
-            <a:pPr>
-              <a:spcAft>
-                <a:spcPts val="700"/>
-              </a:spcAft>
-            </a:pPr>
-            <a:r>
-              <a:rPr sz="1600">
-                <a:solidFill>
-                  <a:srgbClr val="373737"/>
-                </a:solidFill>
-              </a:rPr>
-              <a:t>POMDP mi? EVET. Gerçek durum != gözlem: odom gürültüsü, görüş-dışı duvarlar, engelin gelecek konumu gözlemde yok.</a:t>
+              <a:t>Her ikisinde de en iyi bölge orta-yüksek γ + düşük-orta lr köşesi; ortamın paylaşılan yapısını (gecikmeli oda ödülü) yansıtır.</a:t>
             </a:r>
           </a:p>
         </p:txBody>
@@ -8147,7 +7882,7 @@
                   <a:srgbClr val="FFFFFF"/>
                 </a:solidFill>
               </a:rPr>
-              <a:t>Sonuç</a:t>
+              <a:t>Savunma Özeti (4 Kavram Alanı)</a:t>
             </a:r>
           </a:p>
         </p:txBody>
@@ -8180,12 +7915,12 @@
               </a:spcAft>
             </a:pPr>
             <a:r>
-              <a:rPr sz="1800">
+              <a:rPr sz="1600">
                 <a:solidFill>
                   <a:srgbClr val="373737"/>
                 </a:solidFill>
               </a:rPr>
-              <a:t>PPO, on-policy ve replay buffer'sız olmasına rağmen rastgele ve sezgisel taban politikalarını belirgin geçti.</a:t>
+              <a:t>Stokastik mi? EVET. Kanıt kod satırı: rüzgar (step), lidar (_compute_lidar), odom (_make_obs) gürültüsü =&gt; p(s'|s,a) dejenere değil.</a:t>
             </a:r>
           </a:p>
           <a:p>
@@ -8195,12 +7930,12 @@
               </a:spcAft>
             </a:pPr>
             <a:r>
-              <a:rPr sz="1800">
+              <a:rPr sz="1600">
                 <a:solidFill>
                   <a:srgbClr val="373737"/>
                 </a:solidFill>
               </a:rPr>
-              <a:t>5 hiperparametre (clip/ent/gamma/lr/vf) yeniden eğitilerek tarandı; seçilen taban değerler gürbüz orta nokta.</a:t>
+              <a:t>On/Off-policy? ON-POLICY. Davranış = hedef politika; replay buffer yok; veri kullanılıp atılır.</a:t>
             </a:r>
           </a:p>
           <a:p>
@@ -8210,12 +7945,197 @@
               </a:spcAft>
             </a:pPr>
             <a:r>
+              <a:rPr sz="1600">
+                <a:solidFill>
+                  <a:srgbClr val="373737"/>
+                </a:solidFill>
+              </a:rPr>
+              <a:t>Markov? Yaklaşık sağlanır: lidar + hız (önceki eylem) + adım-deterministik engeller; gürültü/sınırlı görüş ile yalnızca yaklaşık.</a:t>
+            </a:r>
+          </a:p>
+          <a:p>
+            <a:pPr>
+              <a:spcAft>
+                <a:spcPts val="700"/>
+              </a:spcAft>
+            </a:pPr>
+            <a:r>
+              <a:rPr sz="1600">
+                <a:solidFill>
+                  <a:srgbClr val="373737"/>
+                </a:solidFill>
+              </a:rPr>
+              <a:t>POMDP mi? EVET. Gerçek durum != gözlem: odom gürültüsü, görüş-dışı duvarlar, engelin gelecek konumu gözlemde yok.</a:t>
+            </a:r>
+          </a:p>
+        </p:txBody>
+      </p:sp>
+    </p:spTree>
+  </p:cSld>
+  <p:clrMapOvr>
+    <a:masterClrMapping/>
+  </p:clrMapOvr>
+</p:sld>
+</file>
+
+<file path=ppt/slides/slide33.xml><?xml version="1.0" encoding="utf-8"?>
+<p:sld xmlns:a="http://schemas.openxmlformats.org/drawingml/2006/main" xmlns:p="http://schemas.openxmlformats.org/presentationml/2006/main" xmlns:r="http://schemas.openxmlformats.org/officeDocument/2006/relationships">
+  <p:cSld>
+    <p:bg>
+      <p:bgPr>
+        <a:solidFill>
+          <a:srgbClr val="FFFFFF"/>
+        </a:solidFill>
+        <a:effectLst/>
+      </p:bgPr>
+    </p:bg>
+    <p:spTree>
+      <p:nvGrpSpPr>
+        <p:cNvPr id="1" name=""/>
+        <p:cNvGrpSpPr/>
+        <p:nvPr/>
+      </p:nvGrpSpPr>
+      <p:grpSpPr/>
+      <p:sp>
+        <p:nvSpPr>
+          <p:cNvPr id="2" name="Rectangle 1"/>
+          <p:cNvSpPr/>
+          <p:nvPr/>
+        </p:nvSpPr>
+        <p:spPr>
+          <a:xfrm>
+            <a:off x="0" y="0"/>
+            <a:ext cx="12191695" cy="960120"/>
+          </a:xfrm>
+          <a:prstGeom prst="rect">
+            <a:avLst/>
+          </a:prstGeom>
+          <a:solidFill>
+            <a:srgbClr val="1A237E"/>
+          </a:solidFill>
+          <a:ln>
+            <a:noFill/>
+          </a:ln>
+        </p:spPr>
+        <p:style>
+          <a:lnRef idx="1">
+            <a:schemeClr val="accent1"/>
+          </a:lnRef>
+          <a:fillRef idx="3">
+            <a:schemeClr val="accent1"/>
+          </a:fillRef>
+          <a:effectRef idx="2">
+            <a:schemeClr val="accent1"/>
+          </a:effectRef>
+          <a:fontRef idx="minor">
+            <a:schemeClr val="lt1"/>
+          </a:fontRef>
+        </p:style>
+        <p:txBody>
+          <a:bodyPr rtlCol="0" anchor="ctr"/>
+          <a:lstStyle/>
+          <a:p>
+            <a:pPr algn="ctr"/>
+          </a:p>
+        </p:txBody>
+      </p:sp>
+      <p:sp>
+        <p:nvSpPr>
+          <p:cNvPr id="3" name="TextBox 2"/>
+          <p:cNvSpPr txBox="1"/>
+          <p:nvPr/>
+        </p:nvSpPr>
+        <p:spPr>
+          <a:xfrm>
+            <a:off x="457200" y="164592"/>
+            <a:ext cx="11247120" cy="685800"/>
+          </a:xfrm>
+          <a:prstGeom prst="rect">
+            <a:avLst/>
+          </a:prstGeom>
+          <a:noFill/>
+        </p:spPr>
+        <p:txBody>
+          <a:bodyPr wrap="square">
+            <a:spAutoFit/>
+          </a:bodyPr>
+          <a:lstStyle/>
+          <a:p>
+            <a:r>
+              <a:rPr sz="2800" b="1">
+                <a:solidFill>
+                  <a:srgbClr val="FFFFFF"/>
+                </a:solidFill>
+              </a:rPr>
+              <a:t>Sonuç</a:t>
+            </a:r>
+          </a:p>
+        </p:txBody>
+      </p:sp>
+      <p:sp>
+        <p:nvSpPr>
+          <p:cNvPr id="4" name="TextBox 3"/>
+          <p:cNvSpPr txBox="1"/>
+          <p:nvPr/>
+        </p:nvSpPr>
+        <p:spPr>
+          <a:xfrm>
+            <a:off x="640080" y="1234440"/>
+            <a:ext cx="10972800" cy="5212080"/>
+          </a:xfrm>
+          <a:prstGeom prst="rect">
+            <a:avLst/>
+          </a:prstGeom>
+          <a:noFill/>
+        </p:spPr>
+        <p:txBody>
+          <a:bodyPr wrap="square">
+            <a:spAutoFit/>
+          </a:bodyPr>
+          <a:lstStyle/>
+          <a:p>
+            <a:pPr>
+              <a:spcAft>
+                <a:spcPts val="700"/>
+              </a:spcAft>
+            </a:pPr>
+            <a:r>
               <a:rPr sz="1800">
                 <a:solidFill>
                   <a:srgbClr val="373737"/>
                 </a:solidFill>
               </a:rPr>
-              <a:t>Aynı ortamda eğitilen SAC ile kıyas, on-policy/off-policy ayrımını gerçek eğrilerle gösterdi.</a:t>
+              <a:t>PPO, on-policy ve replay buffer'sız olmasına rağmen rastgele ve sezgisel taban politikalarını belirgin geçti.</a:t>
+            </a:r>
+          </a:p>
+          <a:p>
+            <a:pPr>
+              <a:spcAft>
+                <a:spcPts val="700"/>
+              </a:spcAft>
+            </a:pPr>
+            <a:r>
+              <a:rPr sz="1800">
+                <a:solidFill>
+                  <a:srgbClr val="373737"/>
+                </a:solidFill>
+              </a:rPr>
+              <a:t>5 hiperparametre (clip/ent/gamma/lr/vf) yeniden eğitilerek tarandı; seçilen taban değerler gürbüz orta nokta.</a:t>
+            </a:r>
+          </a:p>
+          <a:p>
+            <a:pPr>
+              <a:spcAft>
+                <a:spcPts val="700"/>
+              </a:spcAft>
+            </a:pPr>
+            <a:r>
+              <a:rPr sz="1800">
+                <a:solidFill>
+                  <a:srgbClr val="373737"/>
+                </a:solidFill>
+              </a:rPr>
+              <a:t>Akif'in yayınlanmış SAC grafikleriyle yan-yana kıyas, on-policy/off-policy ayrımını gösterdi.</a:t>
             </a:r>
           </a:p>
           <a:p>

--- a/deliverables/sunum/220202046_sunum.pptx
+++ b/deliverables/sunum/220202046_sunum.pptx
@@ -38,6 +38,9 @@
     <p:sldId id="286" r:id="rId37"/>
     <p:sldId id="287" r:id="rId38"/>
     <p:sldId id="288" r:id="rId39"/>
+    <p:sldId id="289" r:id="rId40"/>
+    <p:sldId id="290" r:id="rId41"/>
+    <p:sldId id="291" r:id="rId42"/>
   </p:sldIdLst>
   <p:sldSz cx="12191695" cy="6858000" type="screen4x3"/>
   <p:notesSz cx="6858000" cy="9144000"/>
@@ -7882,7 +7885,7 @@
                   <a:srgbClr val="FFFFFF"/>
                 </a:solidFill>
               </a:rPr>
-              <a:t>Savunma Özeti (4 Kavram Alanı)</a:t>
+              <a:t>Savunma 1 — Deterministik mi, Stokastik mi?  →  STOKASTİK</a:t>
             </a:r>
           </a:p>
         </p:txBody>
@@ -7915,12 +7918,12 @@
               </a:spcAft>
             </a:pPr>
             <a:r>
-              <a:rPr sz="1600">
-                <a:solidFill>
-                  <a:srgbClr val="373737"/>
-                </a:solidFill>
-              </a:rPr>
-              <a:t>Stokastik mi? EVET. Kanıt kod satırı: rüzgar (step), lidar (_compute_lidar), odom (_make_obs) gürültüsü =&gt; p(s'|s,a) dejenere değil.</a:t>
+              <a:rPr sz="1400">
+                <a:solidFill>
+                  <a:srgbClr val="373737"/>
+                </a:solidFill>
+              </a:rPr>
+              <a:t>Tanım: ortam stokastik ⇔ p(s′|s,a) dejenere DEĞİL — aynı (s,a) farklı s′ üretebilir.</a:t>
             </a:r>
           </a:p>
           <a:p>
@@ -7930,12 +7933,72 @@
               </a:spcAft>
             </a:pPr>
             <a:r>
-              <a:rPr sz="1600">
-                <a:solidFill>
-                  <a:srgbClr val="373737"/>
-                </a:solidFill>
-              </a:rPr>
-              <a:t>On/Off-policy? ON-POLICY. Davranış = hedef politika; replay buffer yok; veri kullanılıp atılır.</a:t>
+              <a:rPr sz="1400">
+                <a:solidFill>
+                  <a:srgbClr val="373737"/>
+                </a:solidFill>
+              </a:rPr>
+              <a:t>Stokastikliği sağlayan değerler (kod satırı ile):</a:t>
+            </a:r>
+          </a:p>
+          <a:p>
+            <a:pPr lvl="1">
+              <a:spcAft>
+                <a:spcPts val="700"/>
+              </a:spcAft>
+            </a:pPr>
+            <a:r>
+              <a:rPr sz="1200">
+                <a:solidFill>
+                  <a:srgbClr val="373737"/>
+                </a:solidFill>
+              </a:rPr>
+              <a:t>• Rüzgar σ=0.015 → hız komutuna eklenir: vx,vy,ω += N(0,0.015)  [step(), satır 133-135] — GEÇİŞ gürültüsü.</a:t>
+            </a:r>
+          </a:p>
+          <a:p>
+            <a:pPr lvl="1">
+              <a:spcAft>
+                <a:spcPts val="700"/>
+              </a:spcAft>
+            </a:pPr>
+            <a:r>
+              <a:rPr sz="1200">
+                <a:solidFill>
+                  <a:srgbClr val="373737"/>
+                </a:solidFill>
+              </a:rPr>
+              <a:t>• Lidar σ=0.015 → her ışın mesafesine  [_compute_lidar, 319-320] — gözlem gürültüsü.</a:t>
+            </a:r>
+          </a:p>
+          <a:p>
+            <a:pPr lvl="1">
+              <a:spcAft>
+                <a:spcPts val="700"/>
+              </a:spcAft>
+            </a:pPr>
+            <a:r>
+              <a:rPr sz="1200">
+                <a:solidFill>
+                  <a:srgbClr val="373737"/>
+                </a:solidFill>
+              </a:rPr>
+              <a:t>• Odometri σ=0.004 → ölçülen poz/yaw'a  [_make_obs, 233-236] — gözlem gürültüsü.</a:t>
+            </a:r>
+          </a:p>
+          <a:p>
+            <a:pPr lvl="1">
+              <a:spcAft>
+                <a:spcPts val="700"/>
+              </a:spcAft>
+            </a:pPr>
+            <a:r>
+              <a:rPr sz="1200">
+                <a:solidFill>
+                  <a:srgbClr val="373737"/>
+                </a:solidFill>
+              </a:rPr>
+              <a:t>• 3 hareketli engel, sinüzoidal/zaman-değişken  [_moving_obstacles, 203-206].</a:t>
             </a:r>
           </a:p>
           <a:p>
@@ -7945,12 +8008,12 @@
               </a:spcAft>
             </a:pPr>
             <a:r>
-              <a:rPr sz="1600">
-                <a:solidFill>
-                  <a:srgbClr val="373737"/>
-                </a:solidFill>
-              </a:rPr>
-              <a:t>Markov? Yaklaşık sağlanır: lidar + hız (önceki eylem) + adım-deterministik engeller; gürültü/sınırlı görüş ile yalnızca yaklaşık.</a:t>
+              <a:rPr sz="1400">
+                <a:solidFill>
+                  <a:srgbClr val="373737"/>
+                </a:solidFill>
+              </a:rPr>
+              <a:t>Örnek: drone (5,5), eylem 'tam ileri'. Gürültüsüz s′=(5.144, 5.0); ama vx+=ε → her oynatımda farklı → s′ bir DAĞILIM (tek nokta değil).</a:t>
             </a:r>
           </a:p>
           <a:p>
@@ -7960,12 +8023,12 @@
               </a:spcAft>
             </a:pPr>
             <a:r>
-              <a:rPr sz="1600">
-                <a:solidFill>
-                  <a:srgbClr val="373737"/>
-                </a:solidFill>
-              </a:rPr>
-              <a:t>POMDP mi? EVET. Gerçek durum != gözlem: odom gürültüsü, görüş-dışı duvarlar, engelin gelecek konumu gözlemde yok.</a:t>
+              <a:rPr sz="1400">
+                <a:solidFill>
+                  <a:srgbClr val="373737"/>
+                </a:solidFill>
+              </a:rPr>
+              <a:t>Aynı tohum = sadece TEKRARLANABİLİRLİK (deterministik değil). Başlangıç rastgeleliği TEK BAŞINA stokastiklik değildir; stokastiklik geçiş+gözlem gürültüsünden gelir.</a:t>
             </a:r>
           </a:p>
         </p:txBody>
@@ -8067,6 +8130,606 @@
                   <a:srgbClr val="FFFFFF"/>
                 </a:solidFill>
               </a:rPr>
+              <a:t>Savunma 2 — On-policy mi, Off-policy mi?  →  ON-POLICY</a:t>
+            </a:r>
+          </a:p>
+        </p:txBody>
+      </p:sp>
+      <p:sp>
+        <p:nvSpPr>
+          <p:cNvPr id="4" name="TextBox 3"/>
+          <p:cNvSpPr txBox="1"/>
+          <p:nvPr/>
+        </p:nvSpPr>
+        <p:spPr>
+          <a:xfrm>
+            <a:off x="640080" y="1234440"/>
+            <a:ext cx="10972800" cy="5212080"/>
+          </a:xfrm>
+          <a:prstGeom prst="rect">
+            <a:avLst/>
+          </a:prstGeom>
+          <a:noFill/>
+        </p:spPr>
+        <p:txBody>
+          <a:bodyPr wrap="square">
+            <a:spAutoFit/>
+          </a:bodyPr>
+          <a:lstStyle/>
+          <a:p>
+            <a:pPr>
+              <a:spcAft>
+                <a:spcPts val="700"/>
+              </a:spcAft>
+            </a:pPr>
+            <a:r>
+              <a:rPr sz="1500">
+                <a:solidFill>
+                  <a:srgbClr val="373737"/>
+                </a:solidFill>
+              </a:rPr>
+              <a:t>Davranış politikası = hedef politika (aynı π_θ). Veri güncel π_θ ile toplanır, n_epochs sonra ATILIR; replay buffer YOK.</a:t>
+            </a:r>
+          </a:p>
+          <a:p>
+            <a:pPr>
+              <a:spcAft>
+                <a:spcPts val="700"/>
+              </a:spcAft>
+            </a:pPr>
+            <a:r>
+              <a:rPr sz="1500">
+                <a:solidFill>
+                  <a:srgbClr val="373737"/>
+                </a:solidFill>
+              </a:rPr>
+              <a:t>Bu on-policy'nin tanımı; SAC/DQN'in (replay buffer'lı off-policy) tersi.</a:t>
+            </a:r>
+          </a:p>
+          <a:p>
+            <a:pPr>
+              <a:spcAft>
+                <a:spcPts val="700"/>
+              </a:spcAft>
+            </a:pPr>
+            <a:r>
+              <a:rPr sz="1500">
+                <a:solidFill>
+                  <a:srgbClr val="373737"/>
+                </a:solidFill>
+              </a:rPr>
+              <a:t>Neden örnek-verimsiz? Her veri yalnız 1 kez kullanılır; politika değişince eski veri off-policy olup atılır → daha çok çevre etkileşimi (8 paralel ortam telafi).</a:t>
+            </a:r>
+          </a:p>
+          <a:p>
+            <a:pPr>
+              <a:spcAft>
+                <a:spcPts val="700"/>
+              </a:spcAft>
+            </a:pPr>
+            <a:r>
+              <a:rPr sz="1500">
+                <a:solidFill>
+                  <a:srgbClr val="373737"/>
+                </a:solidFill>
+              </a:rPr>
+              <a:t>SARSA vs Q-Learning (tek satır fark): SARSA hedefi Q(s′,a′) (davranıştan a′, on-policy); Q-Learning max_a Q(s′,a) (greedy hedef, off-policy).</a:t>
+            </a:r>
+          </a:p>
+          <a:p>
+            <a:pPr>
+              <a:spcAft>
+                <a:spcPts val="700"/>
+              </a:spcAft>
+            </a:pPr>
+            <a:r>
+              <a:rPr sz="1500">
+                <a:solidFill>
+                  <a:srgbClr val="373737"/>
+                </a:solidFill>
+              </a:rPr>
+              <a:t>Off-policy avantajı: replay ile veriyi tekrar kullanır (örnek-verimli); riski: eski veri güncel politikadan sapabilir (kararlılık).</a:t>
+            </a:r>
+          </a:p>
+        </p:txBody>
+      </p:sp>
+    </p:spTree>
+  </p:cSld>
+  <p:clrMapOvr>
+    <a:masterClrMapping/>
+  </p:clrMapOvr>
+</p:sld>
+</file>
+
+<file path=ppt/slides/slide34.xml><?xml version="1.0" encoding="utf-8"?>
+<p:sld xmlns:a="http://schemas.openxmlformats.org/drawingml/2006/main" xmlns:p="http://schemas.openxmlformats.org/presentationml/2006/main" xmlns:r="http://schemas.openxmlformats.org/officeDocument/2006/relationships">
+  <p:cSld>
+    <p:bg>
+      <p:bgPr>
+        <a:solidFill>
+          <a:srgbClr val="FFFFFF"/>
+        </a:solidFill>
+        <a:effectLst/>
+      </p:bgPr>
+    </p:bg>
+    <p:spTree>
+      <p:nvGrpSpPr>
+        <p:cNvPr id="1" name=""/>
+        <p:cNvGrpSpPr/>
+        <p:nvPr/>
+      </p:nvGrpSpPr>
+      <p:grpSpPr/>
+      <p:sp>
+        <p:nvSpPr>
+          <p:cNvPr id="2" name="Rectangle 1"/>
+          <p:cNvSpPr/>
+          <p:nvPr/>
+        </p:nvSpPr>
+        <p:spPr>
+          <a:xfrm>
+            <a:off x="0" y="0"/>
+            <a:ext cx="12191695" cy="960120"/>
+          </a:xfrm>
+          <a:prstGeom prst="rect">
+            <a:avLst/>
+          </a:prstGeom>
+          <a:solidFill>
+            <a:srgbClr val="1A237E"/>
+          </a:solidFill>
+          <a:ln>
+            <a:noFill/>
+          </a:ln>
+        </p:spPr>
+        <p:style>
+          <a:lnRef idx="1">
+            <a:schemeClr val="accent1"/>
+          </a:lnRef>
+          <a:fillRef idx="3">
+            <a:schemeClr val="accent1"/>
+          </a:fillRef>
+          <a:effectRef idx="2">
+            <a:schemeClr val="accent1"/>
+          </a:effectRef>
+          <a:fontRef idx="minor">
+            <a:schemeClr val="lt1"/>
+          </a:fontRef>
+        </p:style>
+        <p:txBody>
+          <a:bodyPr rtlCol="0" anchor="ctr"/>
+          <a:lstStyle/>
+          <a:p>
+            <a:pPr algn="ctr"/>
+          </a:p>
+        </p:txBody>
+      </p:sp>
+      <p:sp>
+        <p:nvSpPr>
+          <p:cNvPr id="3" name="TextBox 2"/>
+          <p:cNvSpPr txBox="1"/>
+          <p:nvPr/>
+        </p:nvSpPr>
+        <p:spPr>
+          <a:xfrm>
+            <a:off x="457200" y="164592"/>
+            <a:ext cx="11247120" cy="685800"/>
+          </a:xfrm>
+          <a:prstGeom prst="rect">
+            <a:avLst/>
+          </a:prstGeom>
+          <a:noFill/>
+        </p:spPr>
+        <p:txBody>
+          <a:bodyPr wrap="square">
+            <a:spAutoFit/>
+          </a:bodyPr>
+          <a:lstStyle/>
+          <a:p>
+            <a:r>
+              <a:rPr sz="2800" b="1">
+                <a:solidFill>
+                  <a:srgbClr val="FFFFFF"/>
+                </a:solidFill>
+              </a:rPr>
+              <a:t>Savunma 3 — Markov Özelliği?  →  YAKLAŞIK Markov</a:t>
+            </a:r>
+          </a:p>
+        </p:txBody>
+      </p:sp>
+      <p:sp>
+        <p:nvSpPr>
+          <p:cNvPr id="4" name="TextBox 3"/>
+          <p:cNvSpPr txBox="1"/>
+          <p:nvPr/>
+        </p:nvSpPr>
+        <p:spPr>
+          <a:xfrm>
+            <a:off x="640080" y="1234440"/>
+            <a:ext cx="10972800" cy="5212080"/>
+          </a:xfrm>
+          <a:prstGeom prst="rect">
+            <a:avLst/>
+          </a:prstGeom>
+          <a:noFill/>
+        </p:spPr>
+        <p:txBody>
+          <a:bodyPr wrap="square">
+            <a:spAutoFit/>
+          </a:bodyPr>
+          <a:lstStyle/>
+          <a:p>
+            <a:pPr>
+              <a:spcAft>
+                <a:spcPts val="700"/>
+              </a:spcAft>
+            </a:pPr>
+            <a:r>
+              <a:rPr sz="1500">
+                <a:solidFill>
+                  <a:srgbClr val="373737"/>
+                </a:solidFill>
+              </a:rPr>
+              <a:t>Tanım: P(s_{t+1}|s_t,a_t) = P(s_{t+1}|s_t,a_t,...,s_0) — gelecek yalnız şimdiki duruma bağlı, geçmişe değil.</a:t>
+            </a:r>
+          </a:p>
+          <a:p>
+            <a:pPr>
+              <a:spcAft>
+                <a:spcPts val="700"/>
+              </a:spcAft>
+            </a:pPr>
+            <a:r>
+              <a:rPr sz="1500">
+                <a:solidFill>
+                  <a:srgbClr val="373737"/>
+                </a:solidFill>
+              </a:rPr>
+              <a:t>Durumda önceki eylem(3) VAR → HIZ/momentum bilgisini taşır (top örneği: yalnız konum Markov değil, konum+hız Markov).</a:t>
+            </a:r>
+          </a:p>
+          <a:p>
+            <a:pPr>
+              <a:spcAft>
+                <a:spcPts val="700"/>
+              </a:spcAft>
+            </a:pPr>
+            <a:r>
+              <a:rPr sz="1500">
+                <a:solidFill>
+                  <a:srgbClr val="373737"/>
+                </a:solidFill>
+              </a:rPr>
+              <a:t>Eksik bilgi: hareketli engel konumu t'nin fonksiyonu (sin(2πt/T)) ama durum t'yi/engel fazını AÇIKÇA içermez → engelin gelecek yeri tek gözlemden tam belirlenemez → YAKLAŞIK Markov.</a:t>
+            </a:r>
+          </a:p>
+          <a:p>
+            <a:pPr>
+              <a:spcAft>
+                <a:spcPts val="700"/>
+              </a:spcAft>
+            </a:pPr>
+            <a:r>
+              <a:rPr sz="1500">
+                <a:solidFill>
+                  <a:srgbClr val="373737"/>
+                </a:solidFill>
+              </a:rPr>
+              <a:t>Atari: tek kare hızı vermez (Markov değil), DeepMind 4 kare istifledi; bizdeki karşılık önceki eylemi durumda tutmak.</a:t>
+            </a:r>
+          </a:p>
+          <a:p>
+            <a:pPr>
+              <a:spcAft>
+                <a:spcPts val="700"/>
+              </a:spcAft>
+            </a:pPr>
+            <a:r>
+              <a:rPr sz="1500">
+                <a:solidFill>
+                  <a:srgbClr val="373737"/>
+                </a:solidFill>
+              </a:rPr>
+              <a:t>Markov değilse 2 çözüm: (i) durumu zenginleştir (hız/faz ekle — biz önceki eylemi ekledik), (ii) bellek (RNN/LSTM, kare istifleme).</a:t>
+            </a:r>
+          </a:p>
+        </p:txBody>
+      </p:sp>
+    </p:spTree>
+  </p:cSld>
+  <p:clrMapOvr>
+    <a:masterClrMapping/>
+  </p:clrMapOvr>
+</p:sld>
+</file>
+
+<file path=ppt/slides/slide35.xml><?xml version="1.0" encoding="utf-8"?>
+<p:sld xmlns:a="http://schemas.openxmlformats.org/drawingml/2006/main" xmlns:p="http://schemas.openxmlformats.org/presentationml/2006/main" xmlns:r="http://schemas.openxmlformats.org/officeDocument/2006/relationships">
+  <p:cSld>
+    <p:bg>
+      <p:bgPr>
+        <a:solidFill>
+          <a:srgbClr val="FFFFFF"/>
+        </a:solidFill>
+        <a:effectLst/>
+      </p:bgPr>
+    </p:bg>
+    <p:spTree>
+      <p:nvGrpSpPr>
+        <p:cNvPr id="1" name=""/>
+        <p:cNvGrpSpPr/>
+        <p:nvPr/>
+      </p:nvGrpSpPr>
+      <p:grpSpPr/>
+      <p:sp>
+        <p:nvSpPr>
+          <p:cNvPr id="2" name="Rectangle 1"/>
+          <p:cNvSpPr/>
+          <p:nvPr/>
+        </p:nvSpPr>
+        <p:spPr>
+          <a:xfrm>
+            <a:off x="0" y="0"/>
+            <a:ext cx="12191695" cy="960120"/>
+          </a:xfrm>
+          <a:prstGeom prst="rect">
+            <a:avLst/>
+          </a:prstGeom>
+          <a:solidFill>
+            <a:srgbClr val="1A237E"/>
+          </a:solidFill>
+          <a:ln>
+            <a:noFill/>
+          </a:ln>
+        </p:spPr>
+        <p:style>
+          <a:lnRef idx="1">
+            <a:schemeClr val="accent1"/>
+          </a:lnRef>
+          <a:fillRef idx="3">
+            <a:schemeClr val="accent1"/>
+          </a:fillRef>
+          <a:effectRef idx="2">
+            <a:schemeClr val="accent1"/>
+          </a:effectRef>
+          <a:fontRef idx="minor">
+            <a:schemeClr val="lt1"/>
+          </a:fontRef>
+        </p:style>
+        <p:txBody>
+          <a:bodyPr rtlCol="0" anchor="ctr"/>
+          <a:lstStyle/>
+          <a:p>
+            <a:pPr algn="ctr"/>
+          </a:p>
+        </p:txBody>
+      </p:sp>
+      <p:sp>
+        <p:nvSpPr>
+          <p:cNvPr id="3" name="TextBox 2"/>
+          <p:cNvSpPr txBox="1"/>
+          <p:nvPr/>
+        </p:nvSpPr>
+        <p:spPr>
+          <a:xfrm>
+            <a:off x="457200" y="164592"/>
+            <a:ext cx="11247120" cy="685800"/>
+          </a:xfrm>
+          <a:prstGeom prst="rect">
+            <a:avLst/>
+          </a:prstGeom>
+          <a:noFill/>
+        </p:spPr>
+        <p:txBody>
+          <a:bodyPr wrap="square">
+            <a:spAutoFit/>
+          </a:bodyPr>
+          <a:lstStyle/>
+          <a:p>
+            <a:r>
+              <a:rPr sz="2800" b="1">
+                <a:solidFill>
+                  <a:srgbClr val="FFFFFF"/>
+                </a:solidFill>
+              </a:rPr>
+              <a:t>Savunma 4 — Kısmi Gözlemlenebilir mi?  →  EVET (POMDP)</a:t>
+            </a:r>
+          </a:p>
+        </p:txBody>
+      </p:sp>
+      <p:sp>
+        <p:nvSpPr>
+          <p:cNvPr id="4" name="TextBox 3"/>
+          <p:cNvSpPr txBox="1"/>
+          <p:nvPr/>
+        </p:nvSpPr>
+        <p:spPr>
+          <a:xfrm>
+            <a:off x="640080" y="1234440"/>
+            <a:ext cx="10972800" cy="5212080"/>
+          </a:xfrm>
+          <a:prstGeom prst="rect">
+            <a:avLst/>
+          </a:prstGeom>
+          <a:noFill/>
+        </p:spPr>
+        <p:txBody>
+          <a:bodyPr wrap="square">
+            <a:spAutoFit/>
+          </a:bodyPr>
+          <a:lstStyle/>
+          <a:p>
+            <a:pPr>
+              <a:spcAft>
+                <a:spcPts val="700"/>
+              </a:spcAft>
+            </a:pPr>
+            <a:r>
+              <a:rPr sz="1400">
+                <a:solidFill>
+                  <a:srgbClr val="373737"/>
+                </a:solidFill>
+              </a:rPr>
+              <a:t>Gerçek durum s: drone'un GERÇEK konum/yaw'ı, TÜM engellerin gerçek konumu, haritanın tam geometrisi.</a:t>
+            </a:r>
+          </a:p>
+          <a:p>
+            <a:pPr>
+              <a:spcAft>
+                <a:spcPts val="700"/>
+              </a:spcAft>
+            </a:pPr>
+            <a:r>
+              <a:rPr sz="1400">
+                <a:solidFill>
+                  <a:srgbClr val="373737"/>
+                </a:solidFill>
+              </a:rPr>
+              <a:t>Gözlem o: GÜRÜLTÜLÜ lidar (yalnız görüş hattı) + GÜRÜLTÜLÜ odometri poz/yaw + keşif istatistikleri.</a:t>
+            </a:r>
+          </a:p>
+          <a:p>
+            <a:pPr>
+              <a:spcAft>
+                <a:spcPts val="700"/>
+              </a:spcAft>
+            </a:pPr>
+            <a:r>
+              <a:rPr sz="1400">
+                <a:solidFill>
+                  <a:srgbClr val="373737"/>
+                </a:solidFill>
+              </a:rPr>
+              <a:t>Aradaki boşluk (eksik bilgi): (i) odom gürültüsü → ajan gerçek konumu TAM bilmez; (ii) lidar duvar ARKASINI görmez; (iii) engelin GELECEK konumu gözlemde yok.</a:t>
+            </a:r>
+          </a:p>
+          <a:p>
+            <a:pPr>
+              <a:spcAft>
+                <a:spcPts val="700"/>
+              </a:spcAft>
+            </a:pPr>
+            <a:r>
+              <a:rPr sz="1400">
+                <a:solidFill>
+                  <a:srgbClr val="373737"/>
+                </a:solidFill>
+              </a:rPr>
+              <a:t>Gözlem gürültüsü tek başına değil; asıl POMDP sınırlı görüşten (duvar arkası) gelir. Vanilla DQN yetersiz → bellek (RNN) veya gözlem istifleme gerekir.</a:t>
+            </a:r>
+          </a:p>
+          <a:p>
+            <a:pPr>
+              <a:spcAft>
+                <a:spcPts val="700"/>
+              </a:spcAft>
+            </a:pPr>
+            <a:r>
+              <a:rPr sz="1400">
+                <a:solidFill>
+                  <a:srgbClr val="373737"/>
+                </a:solidFill>
+              </a:rPr>
+              <a:t>Belief state: gerçek durum üzerindeki olasılık dağılımı (inanç); gözlemlerle Bayes ile güncellenir, POMDP'de optimal politika belief üzerinde tanımlıdır. Biz önceki eylem + politika bağlamıyla KISMEN telafi ederiz.</a:t>
+            </a:r>
+          </a:p>
+        </p:txBody>
+      </p:sp>
+    </p:spTree>
+  </p:cSld>
+  <p:clrMapOvr>
+    <a:masterClrMapping/>
+  </p:clrMapOvr>
+</p:sld>
+</file>
+
+<file path=ppt/slides/slide36.xml><?xml version="1.0" encoding="utf-8"?>
+<p:sld xmlns:a="http://schemas.openxmlformats.org/drawingml/2006/main" xmlns:p="http://schemas.openxmlformats.org/presentationml/2006/main" xmlns:r="http://schemas.openxmlformats.org/officeDocument/2006/relationships">
+  <p:cSld>
+    <p:bg>
+      <p:bgPr>
+        <a:solidFill>
+          <a:srgbClr val="FFFFFF"/>
+        </a:solidFill>
+        <a:effectLst/>
+      </p:bgPr>
+    </p:bg>
+    <p:spTree>
+      <p:nvGrpSpPr>
+        <p:cNvPr id="1" name=""/>
+        <p:cNvGrpSpPr/>
+        <p:nvPr/>
+      </p:nvGrpSpPr>
+      <p:grpSpPr/>
+      <p:sp>
+        <p:nvSpPr>
+          <p:cNvPr id="2" name="Rectangle 1"/>
+          <p:cNvSpPr/>
+          <p:nvPr/>
+        </p:nvSpPr>
+        <p:spPr>
+          <a:xfrm>
+            <a:off x="0" y="0"/>
+            <a:ext cx="12191695" cy="960120"/>
+          </a:xfrm>
+          <a:prstGeom prst="rect">
+            <a:avLst/>
+          </a:prstGeom>
+          <a:solidFill>
+            <a:srgbClr val="1A237E"/>
+          </a:solidFill>
+          <a:ln>
+            <a:noFill/>
+          </a:ln>
+        </p:spPr>
+        <p:style>
+          <a:lnRef idx="1">
+            <a:schemeClr val="accent1"/>
+          </a:lnRef>
+          <a:fillRef idx="3">
+            <a:schemeClr val="accent1"/>
+          </a:fillRef>
+          <a:effectRef idx="2">
+            <a:schemeClr val="accent1"/>
+          </a:effectRef>
+          <a:fontRef idx="minor">
+            <a:schemeClr val="lt1"/>
+          </a:fontRef>
+        </p:style>
+        <p:txBody>
+          <a:bodyPr rtlCol="0" anchor="ctr"/>
+          <a:lstStyle/>
+          <a:p>
+            <a:pPr algn="ctr"/>
+          </a:p>
+        </p:txBody>
+      </p:sp>
+      <p:sp>
+        <p:nvSpPr>
+          <p:cNvPr id="3" name="TextBox 2"/>
+          <p:cNvSpPr txBox="1"/>
+          <p:nvPr/>
+        </p:nvSpPr>
+        <p:spPr>
+          <a:xfrm>
+            <a:off x="457200" y="164592"/>
+            <a:ext cx="11247120" cy="685800"/>
+          </a:xfrm>
+          <a:prstGeom prst="rect">
+            <a:avLst/>
+          </a:prstGeom>
+          <a:noFill/>
+        </p:spPr>
+        <p:txBody>
+          <a:bodyPr wrap="square">
+            <a:spAutoFit/>
+          </a:bodyPr>
+          <a:lstStyle/>
+          <a:p>
+            <a:r>
+              <a:rPr sz="2800" b="1">
+                <a:solidFill>
+                  <a:srgbClr val="FFFFFF"/>
+                </a:solidFill>
+              </a:rPr>
               <a:t>Sonuç</a:t>
             </a:r>
           </a:p>
@@ -8285,7 +8948,7 @@
               </a:spcAft>
             </a:pPr>
             <a:r>
-              <a:rPr sz="1700">
+              <a:rPr sz="1600">
                 <a:solidFill>
                   <a:srgbClr val="373737"/>
                 </a:solidFill>
@@ -8300,7 +8963,7 @@
               </a:spcAft>
             </a:pPr>
             <a:r>
-              <a:rPr sz="1700">
+              <a:rPr sz="1600">
                 <a:solidFill>
                   <a:srgbClr val="373737"/>
                 </a:solidFill>
@@ -8315,7 +8978,7 @@
               </a:spcAft>
             </a:pPr>
             <a:r>
-              <a:rPr sz="1700">
+              <a:rPr sz="1600">
                 <a:solidFill>
                   <a:srgbClr val="373737"/>
                 </a:solidFill>
@@ -8330,7 +8993,7 @@
               </a:spcAft>
             </a:pPr>
             <a:r>
-              <a:rPr sz="1700">
+              <a:rPr sz="1600">
                 <a:solidFill>
                   <a:srgbClr val="373737"/>
                 </a:solidFill>
@@ -8345,7 +9008,7 @@
               </a:spcAft>
             </a:pPr>
             <a:r>
-              <a:rPr sz="1700">
+              <a:rPr sz="1600">
                 <a:solidFill>
                   <a:srgbClr val="373737"/>
                 </a:solidFill>
@@ -8360,7 +9023,22 @@
               </a:spcAft>
             </a:pPr>
             <a:r>
-              <a:rPr sz="1700">
+              <a:rPr sz="1600">
+                <a:solidFill>
+                  <a:srgbClr val="373737"/>
+                </a:solidFill>
+              </a:rPr>
+              <a:t>STOKASTİK: rüzgar σ=0.015 (geçiş, satır 133-135) + lidar σ=0.015 + odometri σ=0.004 (gözlem) + 3 hareketli engel → p(s′|s,a) dejenere değil.</a:t>
+            </a:r>
+          </a:p>
+          <a:p>
+            <a:pPr>
+              <a:spcAft>
+                <a:spcPts val="700"/>
+              </a:spcAft>
+            </a:pPr>
+            <a:r>
+              <a:rPr sz="1600">
                 <a:solidFill>
                   <a:srgbClr val="373737"/>
                 </a:solidFill>
